--- a/Marketing/Decks/VL-VLC-Video-Promo-EN.pptx
+++ b/Marketing/Decks/VL-VLC-Video-Promo-EN.pptx
@@ -20,9 +20,10 @@
     <p:sldId id="268" r:id="rId14"/>
     <p:sldId id="269" r:id="rId15"/>
     <p:sldId id="270" r:id="rId16"/>
+    <p:sldId id="271" r:id="rId17"/>
   </p:sldIdLst>
   <p:notesMasterIdLst>
-    <p:notesMasterId r:id="rId17"/>
+    <p:notesMasterId r:id="rId18"/>
   </p:notesMasterIdLst>
   <p:sldSz cx="12191695" cy="6858000"/>
   <p:notesSz cx="6858000" cy="12191695"/>
@@ -1068,6 +1069,94 @@
             <a:fld id="{F7021451-1387-4CA6-816F-3879F97B5CBC}" type="slidenum">
               <a:rPr lang="en-US"/>
               <a:t>15</a:t>
+            </a:fld>
+            <a:endParaRPr lang="en-US"/>
+          </a:p>
+        </p:txBody>
+      </p:sp>
+    </p:spTree>
+    <p:extLst>
+      <p:ext uri="{BB962C8B-B14F-4D97-AF65-F5344CB8AC3E}">
+        <p14:creationId xmlns:p14="http://schemas.microsoft.com/office/powerpoint/2010/main" val="1024086991"/>
+      </p:ext>
+    </p:extLst>
+  </p:cSld>
+  <p:clrMapOvr>
+    <a:masterClrMapping/>
+  </p:clrMapOvr>
+</p:notes>
+</file>
+
+<file path=ppt/notesSlides/notesSlide16.xml><?xml version="1.0" encoding="utf-8"?>
+<p:notes xmlns:a="http://schemas.openxmlformats.org/drawingml/2006/main" xmlns:r="http://schemas.openxmlformats.org/officeDocument/2006/relationships" xmlns:p="http://schemas.openxmlformats.org/presentationml/2006/main">
+  <p:cSld>
+    <p:spTree>
+      <p:nvGrpSpPr>
+        <p:cNvPr id="1" name=""/>
+        <p:cNvGrpSpPr/>
+        <p:nvPr/>
+      </p:nvGrpSpPr>
+      <p:grpSpPr>
+        <a:xfrm>
+          <a:off x="0" y="0"/>
+          <a:ext cx="0" cy="0"/>
+          <a:chOff x="0" y="0"/>
+          <a:chExt cx="0" cy="0"/>
+        </a:xfrm>
+      </p:grpSpPr>
+      <p:sp>
+        <p:nvSpPr>
+          <p:cNvPr id="2" name="Slide Image Placeholder 1"/>
+          <p:cNvSpPr>
+            <a:spLocks noGrp="1" noRot="1" noChangeAspect="1"/>
+          </p:cNvSpPr>
+          <p:nvPr>
+            <p:ph type="sldImg"/>
+          </p:nvPr>
+        </p:nvSpPr>
+        <p:spPr/>
+      </p:sp>
+      <p:sp>
+        <p:nvSpPr>
+          <p:cNvPr id="3" name="Notes Placeholder 2"/>
+          <p:cNvSpPr>
+            <a:spLocks noGrp="1"/>
+          </p:cNvSpPr>
+          <p:nvPr>
+            <p:ph type="body" idx="1"/>
+          </p:nvPr>
+        </p:nvSpPr>
+        <p:spPr/>
+        <p:txBody>
+          <a:bodyPr/>
+          <a:lstStyle/>
+          <a:p>
+            <a:r>
+              <a:rPr lang="en-US" dirty="0"/>
+              <a:t/>
+            </a:r>
+            <a:endParaRPr lang="en-US" dirty="0"/>
+          </a:p>
+        </p:txBody>
+      </p:sp>
+      <p:sp>
+        <p:nvSpPr>
+          <p:cNvPr id="4" name="Slide Number Placeholder 3"/>
+          <p:cNvSpPr>
+            <a:spLocks noGrp="1"/>
+          </p:cNvSpPr>
+          <p:nvPr>
+            <p:ph type="sldNum" sz="quarter" idx="10"/>
+          </p:nvPr>
+        </p:nvSpPr>
+        <p:spPr/>
+        <p:txBody>
+          <a:bodyPr/>
+          <a:lstStyle/>
+          <a:p>
+            <a:fld id="{F7021451-1387-4CA6-816F-3879F97B5CBC}" type="slidenum">
+              <a:rPr lang="en-US"/>
+              <a:t>16</a:t>
             </a:fld>
             <a:endParaRPr lang="en-US"/>
           </a:p>
@@ -4075,7 +4164,7 @@
                 <a:ea typeface="Helvetica Neue" pitchFamily="34" charset="-122"/>
                 <a:cs typeface="Helvetica Neue" pitchFamily="34" charset="-120"/>
               </a:rPr>
-              <a:t>PART II · THE IDE</a:t>
+              <a:t>DAG HARNESS</a:t>
             </a:r>
             <a:endParaRPr lang="en-US" sz="1150" dirty="0"/>
           </a:p>
@@ -4090,7 +4179,7 @@
         <p:spPr>
           <a:xfrm>
             <a:off x="566928" y="1078992"/>
-            <a:ext cx="6035040" cy="1097280"/>
+            <a:ext cx="10515600" cy="868680"/>
           </a:xfrm>
           <a:prstGeom prst="rect">
             <a:avLst/>
@@ -4109,7 +4198,7 @@
               <a:buNone/>
             </a:pPr>
             <a:r>
-              <a:rPr lang="en-US" sz="2900" b="1" dirty="0">
+              <a:rPr lang="en-US" sz="2700" b="1" dirty="0">
                 <a:solidFill>
                   <a:srgbClr val="0F1B2E"/>
                 </a:solidFill>
@@ -4117,29 +4206,9 @@
                 <a:ea typeface="Helvetica Neue" pitchFamily="34" charset="-122"/>
                 <a:cs typeface="Helvetica Neue" pitchFamily="34" charset="-120"/>
               </a:rPr>
-              <a:t>Build software with</a:t>
-            </a:r>
-            <a:endParaRPr lang="en-US" sz="2900" dirty="0"/>
-          </a:p>
-          <a:p>
-            <a:pPr algn="l" indent="0" marL="0">
-              <a:lnSpc>
-                <a:spcPct val="104000"/>
-              </a:lnSpc>
-              <a:buNone/>
-            </a:pPr>
-            <a:r>
-              <a:rPr lang="en-US" sz="2900" b="1" dirty="0">
-                <a:solidFill>
-                  <a:srgbClr val="0F1B2E"/>
-                </a:solidFill>
-                <a:latin typeface="Helvetica Neue" pitchFamily="34" charset="0"/>
-                <a:ea typeface="Helvetica Neue" pitchFamily="34" charset="-122"/>
-                <a:cs typeface="Helvetica Neue" pitchFamily="34" charset="-120"/>
-              </a:rPr>
-              <a:t>zero programming knowledge.</a:t>
-            </a:r>
-            <a:endParaRPr lang="en-US" sz="2900" dirty="0"/>
+              <a:t>Point AI creates output. A DAG harness creates progress.</a:t>
+            </a:r>
+            <a:endParaRPr lang="en-US" sz="2700" dirty="0"/>
           </a:p>
         </p:txBody>
       </p:sp>
@@ -4151,8 +4220,8 @@
         </p:nvSpPr>
         <p:spPr>
           <a:xfrm>
-            <a:off x="566928" y="2377440"/>
-            <a:ext cx="5577840" cy="1188720"/>
+            <a:off x="566928" y="1993392"/>
+            <a:ext cx="10241280" cy="548640"/>
           </a:xfrm>
           <a:prstGeom prst="rect">
             <a:avLst/>
@@ -4179,7 +4248,7 @@
                 <a:ea typeface="Helvetica Neue" pitchFamily="34" charset="-122"/>
                 <a:cs typeface="Helvetica Neue" pitchFamily="34" charset="-120"/>
               </a:rPr>
-              <a:t>Say what you want, watch the DAG run, refine visually. Code is still there — but it's no longer the only doorway in.</a:t>
+              <a:t>Complex systems are not finished in one step. A DAG makes inputs, outputs, node capability, validation and the next step explicit.</a:t>
             </a:r>
             <a:endParaRPr lang="en-US" sz="1350" dirty="0"/>
           </a:p>
@@ -4193,12 +4262,12 @@
         </p:nvSpPr>
         <p:spPr>
           <a:xfrm>
-            <a:off x="566928" y="3931920"/>
-            <a:ext cx="1554480" cy="914400"/>
+            <a:off x="566928" y="2743200"/>
+            <a:ext cx="5029200" cy="2331720"/>
           </a:xfrm>
           <a:prstGeom prst="roundRect">
             <a:avLst>
-              <a:gd name="adj" fmla="val 8000"/>
+              <a:gd name="adj" fmla="val 3529"/>
             </a:avLst>
           </a:prstGeom>
           <a:solidFill>
@@ -4227,24 +4296,24 @@
         </p:nvSpPr>
         <p:spPr>
           <a:xfrm>
-            <a:off x="566928" y="4133088"/>
-            <a:ext cx="1554480" cy="365760"/>
-          </a:xfrm>
-          <a:prstGeom prst="rect">
-            <a:avLst/>
-          </a:prstGeom>
-          <a:noFill/>
-          <a:ln/>
-        </p:spPr>
-        <p:txBody>
-          <a:bodyPr wrap="square" lIns="0" tIns="0" rIns="0" bIns="0" rtlCol="0" anchor="ctr"/>
-          <a:lstStyle/>
-          <a:p>
-            <a:pPr algn="ctr" indent="0" marL="0">
-              <a:buNone/>
-            </a:pPr>
-            <a:r>
-              <a:rPr lang="en-US" sz="1450" b="1" dirty="0">
+            <a:off x="841248" y="2944368"/>
+            <a:ext cx="1828800" cy="201168"/>
+          </a:xfrm>
+          <a:prstGeom prst="rect">
+            <a:avLst/>
+          </a:prstGeom>
+          <a:noFill/>
+          <a:ln/>
+        </p:spPr>
+        <p:txBody>
+          <a:bodyPr wrap="square" lIns="0" tIns="0" rIns="0" bIns="0" rtlCol="0" anchor="ctr"/>
+          <a:lstStyle/>
+          <a:p>
+            <a:pPr indent="0" marL="0">
+              <a:buNone/>
+            </a:pPr>
+            <a:r>
+              <a:rPr lang="en-US" sz="1300" b="1" dirty="0">
                 <a:solidFill>
                   <a:srgbClr val="0F1B2E"/>
                 </a:solidFill>
@@ -4252,93 +4321,30 @@
                 <a:ea typeface="Helvetica Neue" pitchFamily="34" charset="-122"/>
                 <a:cs typeface="Helvetica Neue" pitchFamily="34" charset="-120"/>
               </a:rPr>
-              <a:t>Intent</a:t>
-            </a:r>
-            <a:endParaRPr lang="en-US" sz="1450" dirty="0"/>
-          </a:p>
-        </p:txBody>
-      </p:sp>
-      <p:sp>
-        <p:nvSpPr>
-          <p:cNvPr id="9" name="Text 7"/>
-          <p:cNvSpPr/>
-          <p:nvPr/>
-        </p:nvSpPr>
-        <p:spPr>
-          <a:xfrm>
-            <a:off x="566928" y="4480560"/>
-            <a:ext cx="1554480" cy="320040"/>
-          </a:xfrm>
-          <a:prstGeom prst="rect">
-            <a:avLst/>
-          </a:prstGeom>
-          <a:noFill/>
-          <a:ln/>
-        </p:spPr>
-        <p:txBody>
-          <a:bodyPr wrap="square" lIns="0" tIns="0" rIns="0" bIns="0" rtlCol="0" anchor="ctr"/>
-          <a:lstStyle/>
-          <a:p>
-            <a:pPr algn="ctr" indent="0" marL="0">
-              <a:buNone/>
-            </a:pPr>
-            <a:r>
-              <a:rPr lang="en-US" sz="1000" dirty="0">
-                <a:solidFill>
-                  <a:srgbClr val="6B7C93"/>
-                </a:solidFill>
-                <a:latin typeface="Helvetica Neue" pitchFamily="34" charset="0"/>
-                <a:ea typeface="Helvetica Neue" pitchFamily="34" charset="-122"/>
-                <a:cs typeface="Helvetica Neue" pitchFamily="34" charset="-120"/>
-              </a:rPr>
-              <a:t>say what to build</a:t>
-            </a:r>
-            <a:endParaRPr lang="en-US" sz="1000" dirty="0"/>
-          </a:p>
-        </p:txBody>
-      </p:sp>
-      <p:sp>
-        <p:nvSpPr>
-          <p:cNvPr id="10" name="Shape 8"/>
-          <p:cNvSpPr/>
-          <p:nvPr/>
-        </p:nvSpPr>
-        <p:spPr>
-          <a:xfrm>
-            <a:off x="2176272" y="4389120"/>
-            <a:ext cx="301752" cy="0"/>
-          </a:xfrm>
-          <a:prstGeom prst="line">
-            <a:avLst/>
-          </a:prstGeom>
-          <a:noFill/>
-          <a:ln w="25400">
-            <a:solidFill>
-              <a:srgbClr val="15B3A4"/>
-            </a:solidFill>
-            <a:prstDash val="solid"/>
-            <a:tailEnd type="triangle"/>
-          </a:ln>
-        </p:spPr>
-      </p:sp>
-      <p:sp>
-        <p:nvSpPr>
-          <p:cNvPr id="11" name="Shape 9"/>
-          <p:cNvSpPr/>
-          <p:nvPr/>
-        </p:nvSpPr>
-        <p:spPr>
-          <a:xfrm>
-            <a:off x="2532888" y="3931920"/>
-            <a:ext cx="1554480" cy="914400"/>
+              <a:t>Single AI node</a:t>
+            </a:r>
+            <a:endParaRPr lang="en-US" sz="1300" dirty="0"/>
+          </a:p>
+        </p:txBody>
+      </p:sp>
+      <p:sp>
+        <p:nvSpPr>
+          <p:cNvPr id="9" name="Shape 7"/>
+          <p:cNvSpPr/>
+          <p:nvPr/>
+        </p:nvSpPr>
+        <p:spPr>
+          <a:xfrm>
+            <a:off x="859536" y="3401568"/>
+            <a:ext cx="822960" cy="182880"/>
           </a:xfrm>
           <a:prstGeom prst="roundRect">
             <a:avLst>
-              <a:gd name="adj" fmla="val 8000"/>
+              <a:gd name="adj" fmla="val 20000"/>
             </a:avLst>
           </a:prstGeom>
           <a:solidFill>
-            <a:srgbClr val="15B3A4"/>
+            <a:srgbClr val="EAF2F8"/>
           </a:solidFill>
           <a:ln w="12700">
             <a:solidFill>
@@ -4346,6 +4352,648 @@
             </a:solidFill>
             <a:prstDash val="solid"/>
           </a:ln>
+        </p:spPr>
+      </p:sp>
+      <p:sp>
+        <p:nvSpPr>
+          <p:cNvPr id="10" name="Text 8"/>
+          <p:cNvSpPr/>
+          <p:nvPr/>
+        </p:nvSpPr>
+        <p:spPr>
+          <a:xfrm>
+            <a:off x="859536" y="3456432"/>
+            <a:ext cx="822960" cy="54864"/>
+          </a:xfrm>
+          <a:prstGeom prst="rect">
+            <a:avLst/>
+          </a:prstGeom>
+          <a:noFill/>
+          <a:ln/>
+        </p:spPr>
+        <p:txBody>
+          <a:bodyPr wrap="square" lIns="0" tIns="0" rIns="0" bIns="0" rtlCol="0" anchor="ctr"/>
+          <a:lstStyle/>
+          <a:p>
+            <a:pPr algn="ctr" indent="0" marL="0">
+              <a:buNone/>
+            </a:pPr>
+            <a:r>
+              <a:rPr lang="en-US" sz="580" b="1" dirty="0">
+                <a:solidFill>
+                  <a:srgbClr val="2A3A51"/>
+                </a:solidFill>
+                <a:latin typeface="Helvetica Neue" pitchFamily="34" charset="0"/>
+                <a:ea typeface="Helvetica Neue" pitchFamily="34" charset="-122"/>
+                <a:cs typeface="Helvetica Neue" pitchFamily="34" charset="-120"/>
+              </a:rPr>
+              <a:t>Prompt</a:t>
+            </a:r>
+            <a:endParaRPr lang="en-US" sz="580" dirty="0"/>
+          </a:p>
+        </p:txBody>
+      </p:sp>
+      <p:sp>
+        <p:nvSpPr>
+          <p:cNvPr id="11" name="Shape 9"/>
+          <p:cNvSpPr/>
+          <p:nvPr/>
+        </p:nvSpPr>
+        <p:spPr>
+          <a:xfrm>
+            <a:off x="1709928" y="3493008"/>
+            <a:ext cx="969264" cy="530352"/>
+          </a:xfrm>
+          <a:prstGeom prst="line">
+            <a:avLst/>
+          </a:prstGeom>
+          <a:noFill/>
+          <a:ln w="12700">
+            <a:solidFill>
+              <a:srgbClr val="E4EAF1"/>
+            </a:solidFill>
+            <a:prstDash val="solid"/>
+            <a:tailEnd type="triangle"/>
+          </a:ln>
+        </p:spPr>
+      </p:sp>
+      <p:sp>
+        <p:nvSpPr>
+          <p:cNvPr id="12" name="Shape 10"/>
+          <p:cNvSpPr/>
+          <p:nvPr/>
+        </p:nvSpPr>
+        <p:spPr>
+          <a:xfrm>
+            <a:off x="859536" y="3657600"/>
+            <a:ext cx="822960" cy="182880"/>
+          </a:xfrm>
+          <a:prstGeom prst="roundRect">
+            <a:avLst>
+              <a:gd name="adj" fmla="val 20000"/>
+            </a:avLst>
+          </a:prstGeom>
+          <a:solidFill>
+            <a:srgbClr val="EAF2F8"/>
+          </a:solidFill>
+          <a:ln w="12700">
+            <a:solidFill>
+              <a:srgbClr val="E4EAF1"/>
+            </a:solidFill>
+            <a:prstDash val="solid"/>
+          </a:ln>
+        </p:spPr>
+      </p:sp>
+      <p:sp>
+        <p:nvSpPr>
+          <p:cNvPr id="13" name="Text 11"/>
+          <p:cNvSpPr/>
+          <p:nvPr/>
+        </p:nvSpPr>
+        <p:spPr>
+          <a:xfrm>
+            <a:off x="859536" y="3712464"/>
+            <a:ext cx="822960" cy="54864"/>
+          </a:xfrm>
+          <a:prstGeom prst="rect">
+            <a:avLst/>
+          </a:prstGeom>
+          <a:noFill/>
+          <a:ln/>
+        </p:spPr>
+        <p:txBody>
+          <a:bodyPr wrap="square" lIns="0" tIns="0" rIns="0" bIns="0" rtlCol="0" anchor="ctr"/>
+          <a:lstStyle/>
+          <a:p>
+            <a:pPr algn="ctr" indent="0" marL="0">
+              <a:buNone/>
+            </a:pPr>
+            <a:r>
+              <a:rPr lang="en-US" sz="580" b="1" dirty="0">
+                <a:solidFill>
+                  <a:srgbClr val="2A3A51"/>
+                </a:solidFill>
+                <a:latin typeface="Helvetica Neue" pitchFamily="34" charset="0"/>
+                <a:ea typeface="Helvetica Neue" pitchFamily="34" charset="-122"/>
+                <a:cs typeface="Helvetica Neue" pitchFamily="34" charset="-120"/>
+              </a:rPr>
+              <a:t>Docs</a:t>
+            </a:r>
+            <a:endParaRPr lang="en-US" sz="580" dirty="0"/>
+          </a:p>
+        </p:txBody>
+      </p:sp>
+      <p:sp>
+        <p:nvSpPr>
+          <p:cNvPr id="14" name="Shape 12"/>
+          <p:cNvSpPr/>
+          <p:nvPr/>
+        </p:nvSpPr>
+        <p:spPr>
+          <a:xfrm>
+            <a:off x="1709928" y="3749040"/>
+            <a:ext cx="969264" cy="402336"/>
+          </a:xfrm>
+          <a:prstGeom prst="line">
+            <a:avLst/>
+          </a:prstGeom>
+          <a:noFill/>
+          <a:ln w="12700">
+            <a:solidFill>
+              <a:srgbClr val="E4EAF1"/>
+            </a:solidFill>
+            <a:prstDash val="solid"/>
+            <a:tailEnd type="triangle"/>
+          </a:ln>
+        </p:spPr>
+      </p:sp>
+      <p:sp>
+        <p:nvSpPr>
+          <p:cNvPr id="15" name="Shape 13"/>
+          <p:cNvSpPr/>
+          <p:nvPr/>
+        </p:nvSpPr>
+        <p:spPr>
+          <a:xfrm>
+            <a:off x="859536" y="3913632"/>
+            <a:ext cx="822960" cy="182880"/>
+          </a:xfrm>
+          <a:prstGeom prst="roundRect">
+            <a:avLst>
+              <a:gd name="adj" fmla="val 20000"/>
+            </a:avLst>
+          </a:prstGeom>
+          <a:solidFill>
+            <a:srgbClr val="EAF2F8"/>
+          </a:solidFill>
+          <a:ln w="12700">
+            <a:solidFill>
+              <a:srgbClr val="E4EAF1"/>
+            </a:solidFill>
+            <a:prstDash val="solid"/>
+          </a:ln>
+        </p:spPr>
+      </p:sp>
+      <p:sp>
+        <p:nvSpPr>
+          <p:cNvPr id="16" name="Text 14"/>
+          <p:cNvSpPr/>
+          <p:nvPr/>
+        </p:nvSpPr>
+        <p:spPr>
+          <a:xfrm>
+            <a:off x="859536" y="3968496"/>
+            <a:ext cx="822960" cy="54864"/>
+          </a:xfrm>
+          <a:prstGeom prst="rect">
+            <a:avLst/>
+          </a:prstGeom>
+          <a:noFill/>
+          <a:ln/>
+        </p:spPr>
+        <p:txBody>
+          <a:bodyPr wrap="square" lIns="0" tIns="0" rIns="0" bIns="0" rtlCol="0" anchor="ctr"/>
+          <a:lstStyle/>
+          <a:p>
+            <a:pPr algn="ctr" indent="0" marL="0">
+              <a:buNone/>
+            </a:pPr>
+            <a:r>
+              <a:rPr lang="en-US" sz="580" b="1" dirty="0">
+                <a:solidFill>
+                  <a:srgbClr val="2A3A51"/>
+                </a:solidFill>
+                <a:latin typeface="Helvetica Neue" pitchFamily="34" charset="0"/>
+                <a:ea typeface="Helvetica Neue" pitchFamily="34" charset="-122"/>
+                <a:cs typeface="Helvetica Neue" pitchFamily="34" charset="-120"/>
+              </a:rPr>
+              <a:t>Code</a:t>
+            </a:r>
+            <a:endParaRPr lang="en-US" sz="580" dirty="0"/>
+          </a:p>
+        </p:txBody>
+      </p:sp>
+      <p:sp>
+        <p:nvSpPr>
+          <p:cNvPr id="17" name="Shape 15"/>
+          <p:cNvSpPr/>
+          <p:nvPr/>
+        </p:nvSpPr>
+        <p:spPr>
+          <a:xfrm>
+            <a:off x="1709928" y="4005072"/>
+            <a:ext cx="969264" cy="274320"/>
+          </a:xfrm>
+          <a:prstGeom prst="line">
+            <a:avLst/>
+          </a:prstGeom>
+          <a:noFill/>
+          <a:ln w="12700">
+            <a:solidFill>
+              <a:srgbClr val="E4EAF1"/>
+            </a:solidFill>
+            <a:prstDash val="solid"/>
+            <a:tailEnd type="triangle"/>
+          </a:ln>
+        </p:spPr>
+      </p:sp>
+      <p:sp>
+        <p:nvSpPr>
+          <p:cNvPr id="18" name="Shape 16"/>
+          <p:cNvSpPr/>
+          <p:nvPr/>
+        </p:nvSpPr>
+        <p:spPr>
+          <a:xfrm>
+            <a:off x="859536" y="4169664"/>
+            <a:ext cx="822960" cy="182880"/>
+          </a:xfrm>
+          <a:prstGeom prst="roundRect">
+            <a:avLst>
+              <a:gd name="adj" fmla="val 20000"/>
+            </a:avLst>
+          </a:prstGeom>
+          <a:solidFill>
+            <a:srgbClr val="EAF2F8"/>
+          </a:solidFill>
+          <a:ln w="12700">
+            <a:solidFill>
+              <a:srgbClr val="E4EAF1"/>
+            </a:solidFill>
+            <a:prstDash val="solid"/>
+          </a:ln>
+        </p:spPr>
+      </p:sp>
+      <p:sp>
+        <p:nvSpPr>
+          <p:cNvPr id="19" name="Text 17"/>
+          <p:cNvSpPr/>
+          <p:nvPr/>
+        </p:nvSpPr>
+        <p:spPr>
+          <a:xfrm>
+            <a:off x="859536" y="4224528"/>
+            <a:ext cx="822960" cy="54864"/>
+          </a:xfrm>
+          <a:prstGeom prst="rect">
+            <a:avLst/>
+          </a:prstGeom>
+          <a:noFill/>
+          <a:ln/>
+        </p:spPr>
+        <p:txBody>
+          <a:bodyPr wrap="square" lIns="0" tIns="0" rIns="0" bIns="0" rtlCol="0" anchor="ctr"/>
+          <a:lstStyle/>
+          <a:p>
+            <a:pPr algn="ctr" indent="0" marL="0">
+              <a:buNone/>
+            </a:pPr>
+            <a:r>
+              <a:rPr lang="en-US" sz="580" b="1" dirty="0">
+                <a:solidFill>
+                  <a:srgbClr val="2A3A51"/>
+                </a:solidFill>
+                <a:latin typeface="Helvetica Neue" pitchFamily="34" charset="0"/>
+                <a:ea typeface="Helvetica Neue" pitchFamily="34" charset="-122"/>
+                <a:cs typeface="Helvetica Neue" pitchFamily="34" charset="-120"/>
+              </a:rPr>
+              <a:t>Data</a:t>
+            </a:r>
+            <a:endParaRPr lang="en-US" sz="580" dirty="0"/>
+          </a:p>
+        </p:txBody>
+      </p:sp>
+      <p:sp>
+        <p:nvSpPr>
+          <p:cNvPr id="20" name="Shape 18"/>
+          <p:cNvSpPr/>
+          <p:nvPr/>
+        </p:nvSpPr>
+        <p:spPr>
+          <a:xfrm>
+            <a:off x="1709928" y="4261104"/>
+            <a:ext cx="969264" cy="146304"/>
+          </a:xfrm>
+          <a:prstGeom prst="line">
+            <a:avLst/>
+          </a:prstGeom>
+          <a:noFill/>
+          <a:ln w="12700">
+            <a:solidFill>
+              <a:srgbClr val="E4EAF1"/>
+            </a:solidFill>
+            <a:prstDash val="solid"/>
+            <a:tailEnd type="triangle"/>
+          </a:ln>
+        </p:spPr>
+      </p:sp>
+      <p:sp>
+        <p:nvSpPr>
+          <p:cNvPr id="21" name="Shape 19"/>
+          <p:cNvSpPr/>
+          <p:nvPr/>
+        </p:nvSpPr>
+        <p:spPr>
+          <a:xfrm>
+            <a:off x="859536" y="4425696"/>
+            <a:ext cx="822960" cy="182880"/>
+          </a:xfrm>
+          <a:prstGeom prst="roundRect">
+            <a:avLst>
+              <a:gd name="adj" fmla="val 20000"/>
+            </a:avLst>
+          </a:prstGeom>
+          <a:solidFill>
+            <a:srgbClr val="EAF2F8"/>
+          </a:solidFill>
+          <a:ln w="12700">
+            <a:solidFill>
+              <a:srgbClr val="E4EAF1"/>
+            </a:solidFill>
+            <a:prstDash val="solid"/>
+          </a:ln>
+        </p:spPr>
+      </p:sp>
+      <p:sp>
+        <p:nvSpPr>
+          <p:cNvPr id="22" name="Text 20"/>
+          <p:cNvSpPr/>
+          <p:nvPr/>
+        </p:nvSpPr>
+        <p:spPr>
+          <a:xfrm>
+            <a:off x="859536" y="4480560"/>
+            <a:ext cx="822960" cy="54864"/>
+          </a:xfrm>
+          <a:prstGeom prst="rect">
+            <a:avLst/>
+          </a:prstGeom>
+          <a:noFill/>
+          <a:ln/>
+        </p:spPr>
+        <p:txBody>
+          <a:bodyPr wrap="square" lIns="0" tIns="0" rIns="0" bIns="0" rtlCol="0" anchor="ctr"/>
+          <a:lstStyle/>
+          <a:p>
+            <a:pPr algn="ctr" indent="0" marL="0">
+              <a:buNone/>
+            </a:pPr>
+            <a:r>
+              <a:rPr lang="en-US" sz="580" b="1" dirty="0">
+                <a:solidFill>
+                  <a:srgbClr val="2A3A51"/>
+                </a:solidFill>
+                <a:latin typeface="Helvetica Neue" pitchFamily="34" charset="0"/>
+                <a:ea typeface="Helvetica Neue" pitchFamily="34" charset="-122"/>
+                <a:cs typeface="Helvetica Neue" pitchFamily="34" charset="-120"/>
+              </a:rPr>
+              <a:t>Tools</a:t>
+            </a:r>
+            <a:endParaRPr lang="en-US" sz="580" dirty="0"/>
+          </a:p>
+        </p:txBody>
+      </p:sp>
+      <p:sp>
+        <p:nvSpPr>
+          <p:cNvPr id="23" name="Shape 21"/>
+          <p:cNvSpPr/>
+          <p:nvPr/>
+        </p:nvSpPr>
+        <p:spPr>
+          <a:xfrm>
+            <a:off x="1709928" y="4517136"/>
+            <a:ext cx="969264" cy="18288"/>
+          </a:xfrm>
+          <a:prstGeom prst="line">
+            <a:avLst/>
+          </a:prstGeom>
+          <a:noFill/>
+          <a:ln w="12700">
+            <a:solidFill>
+              <a:srgbClr val="E4EAF1"/>
+            </a:solidFill>
+            <a:prstDash val="solid"/>
+            <a:tailEnd type="triangle"/>
+          </a:ln>
+        </p:spPr>
+      </p:sp>
+      <p:sp>
+        <p:nvSpPr>
+          <p:cNvPr id="24" name="Shape 22"/>
+          <p:cNvSpPr/>
+          <p:nvPr/>
+        </p:nvSpPr>
+        <p:spPr>
+          <a:xfrm>
+            <a:off x="2779776" y="3730752"/>
+            <a:ext cx="786384" cy="530352"/>
+          </a:xfrm>
+          <a:prstGeom prst="roundRect">
+            <a:avLst>
+              <a:gd name="adj" fmla="val 13793"/>
+            </a:avLst>
+          </a:prstGeom>
+          <a:solidFill>
+            <a:srgbClr val="0A1526"/>
+          </a:solidFill>
+          <a:ln w="12700">
+            <a:solidFill>
+              <a:srgbClr val="0A1526"/>
+            </a:solidFill>
+            <a:prstDash val="solid"/>
+          </a:ln>
+        </p:spPr>
+      </p:sp>
+      <p:sp>
+        <p:nvSpPr>
+          <p:cNvPr id="25" name="Text 23"/>
+          <p:cNvSpPr/>
+          <p:nvPr/>
+        </p:nvSpPr>
+        <p:spPr>
+          <a:xfrm>
+            <a:off x="2779776" y="3913632"/>
+            <a:ext cx="786384" cy="109728"/>
+          </a:xfrm>
+          <a:prstGeom prst="rect">
+            <a:avLst/>
+          </a:prstGeom>
+          <a:noFill/>
+          <a:ln/>
+        </p:spPr>
+        <p:txBody>
+          <a:bodyPr wrap="square" lIns="0" tIns="0" rIns="0" bIns="0" rtlCol="0" anchor="ctr"/>
+          <a:lstStyle/>
+          <a:p>
+            <a:pPr algn="ctr" indent="0" marL="0">
+              <a:buNone/>
+            </a:pPr>
+            <a:r>
+              <a:rPr lang="en-US" sz="1600" b="1" dirty="0">
+                <a:solidFill>
+                  <a:srgbClr val="7FE7DA"/>
+                </a:solidFill>
+                <a:latin typeface="Helvetica Neue" pitchFamily="34" charset="0"/>
+                <a:ea typeface="Helvetica Neue" pitchFamily="34" charset="-122"/>
+                <a:cs typeface="Helvetica Neue" pitchFamily="34" charset="-120"/>
+              </a:rPr>
+              <a:t>AI</a:t>
+            </a:r>
+            <a:endParaRPr lang="en-US" sz="1600" dirty="0"/>
+          </a:p>
+        </p:txBody>
+      </p:sp>
+      <p:sp>
+        <p:nvSpPr>
+          <p:cNvPr id="26" name="Shape 24"/>
+          <p:cNvSpPr/>
+          <p:nvPr/>
+        </p:nvSpPr>
+        <p:spPr>
+          <a:xfrm>
+            <a:off x="3621024" y="3986784"/>
+            <a:ext cx="530352" cy="0"/>
+          </a:xfrm>
+          <a:prstGeom prst="line">
+            <a:avLst/>
+          </a:prstGeom>
+          <a:noFill/>
+          <a:ln w="19050">
+            <a:solidFill>
+              <a:srgbClr val="0E9F91"/>
+            </a:solidFill>
+            <a:prstDash val="solid"/>
+            <a:tailEnd type="triangle"/>
+          </a:ln>
+        </p:spPr>
+      </p:sp>
+      <p:sp>
+        <p:nvSpPr>
+          <p:cNvPr id="27" name="Shape 25"/>
+          <p:cNvSpPr/>
+          <p:nvPr/>
+        </p:nvSpPr>
+        <p:spPr>
+          <a:xfrm>
+            <a:off x="4242816" y="3694176"/>
+            <a:ext cx="914400" cy="603504"/>
+          </a:xfrm>
+          <a:prstGeom prst="roundRect">
+            <a:avLst>
+              <a:gd name="adj" fmla="val 12121"/>
+            </a:avLst>
+          </a:prstGeom>
+          <a:solidFill>
+            <a:srgbClr val="15B3A4"/>
+          </a:solidFill>
+          <a:ln w="12700">
+            <a:solidFill>
+              <a:srgbClr val="15B3A4"/>
+            </a:solidFill>
+            <a:prstDash val="solid"/>
+          </a:ln>
+        </p:spPr>
+      </p:sp>
+      <p:sp>
+        <p:nvSpPr>
+          <p:cNvPr id="28" name="Text 26"/>
+          <p:cNvSpPr/>
+          <p:nvPr/>
+        </p:nvSpPr>
+        <p:spPr>
+          <a:xfrm>
+            <a:off x="4242816" y="3904488"/>
+            <a:ext cx="914400" cy="73152"/>
+          </a:xfrm>
+          <a:prstGeom prst="rect">
+            <a:avLst/>
+          </a:prstGeom>
+          <a:noFill/>
+          <a:ln/>
+        </p:spPr>
+        <p:txBody>
+          <a:bodyPr wrap="square" lIns="0" tIns="0" rIns="0" bIns="0" rtlCol="0" anchor="ctr"/>
+          <a:lstStyle/>
+          <a:p>
+            <a:pPr algn="ctr" indent="0" marL="0">
+              <a:buNone/>
+            </a:pPr>
+            <a:r>
+              <a:rPr lang="en-US" sz="750" b="1" dirty="0">
+                <a:solidFill>
+                  <a:srgbClr val="FFFFFF"/>
+                </a:solidFill>
+                <a:latin typeface="Helvetica Neue" pitchFamily="34" charset="0"/>
+                <a:ea typeface="Helvetica Neue" pitchFamily="34" charset="-122"/>
+                <a:cs typeface="Helvetica Neue" pitchFamily="34" charset="-120"/>
+              </a:rPr>
+              <a:t>Output</a:t>
+            </a:r>
+            <a:endParaRPr lang="en-US" sz="750" dirty="0"/>
+          </a:p>
+        </p:txBody>
+      </p:sp>
+      <p:sp>
+        <p:nvSpPr>
+          <p:cNvPr id="29" name="Text 27"/>
+          <p:cNvSpPr/>
+          <p:nvPr/>
+        </p:nvSpPr>
+        <p:spPr>
+          <a:xfrm>
+            <a:off x="877824" y="4645152"/>
+            <a:ext cx="4407408" cy="164592"/>
+          </a:xfrm>
+          <a:prstGeom prst="rect">
+            <a:avLst/>
+          </a:prstGeom>
+          <a:noFill/>
+          <a:ln/>
+        </p:spPr>
+        <p:txBody>
+          <a:bodyPr wrap="square" lIns="0" tIns="0" rIns="0" bIns="0" rtlCol="0" anchor="ctr">
+            <a:normAutofit/>
+          </a:bodyPr>
+          <a:lstStyle/>
+          <a:p>
+            <a:pPr algn="ctr" indent="0" marL="0">
+              <a:buNone/>
+            </a:pPr>
+            <a:r>
+              <a:rPr lang="en-US" sz="880" i="1" dirty="0">
+                <a:solidFill>
+                  <a:srgbClr val="6B7C93"/>
+                </a:solidFill>
+                <a:latin typeface="Helvetica Neue" pitchFamily="34" charset="0"/>
+                <a:ea typeface="Helvetica Neue" pitchFamily="34" charset="-122"/>
+                <a:cs typeface="Helvetica Neue" pitchFamily="34" charset="-120"/>
+              </a:rPr>
+              <a:t>Powerful, but the next step depends on a skilled operator — and each run may drift.</a:t>
+            </a:r>
+            <a:endParaRPr lang="en-US" sz="880" dirty="0"/>
+          </a:p>
+        </p:txBody>
+      </p:sp>
+      <p:sp>
+        <p:nvSpPr>
+          <p:cNvPr id="30" name="Shape 28"/>
+          <p:cNvSpPr/>
+          <p:nvPr/>
+        </p:nvSpPr>
+        <p:spPr>
+          <a:xfrm>
+            <a:off x="5989320" y="2743200"/>
+            <a:ext cx="5623560" cy="2331720"/>
+          </a:xfrm>
+          <a:prstGeom prst="roundRect">
+            <a:avLst>
+              <a:gd name="adj" fmla="val 3529"/>
+            </a:avLst>
+          </a:prstGeom>
+          <a:solidFill>
+            <a:srgbClr val="0A1526"/>
+          </a:solidFill>
+          <a:ln/>
           <a:effectLst>
             <a:outerShdw sx="100000" sy="100000" kx="0" ky="0" algn="bl" rotWithShape="0" blurRad="88900" dist="38100" dir="8100000">
               <a:srgbClr val="0A1526">
@@ -4357,30 +5005,98 @@
       </p:sp>
       <p:sp>
         <p:nvSpPr>
-          <p:cNvPr id="12" name="Text 10"/>
-          <p:cNvSpPr/>
-          <p:nvPr/>
-        </p:nvSpPr>
-        <p:spPr>
-          <a:xfrm>
-            <a:off x="2532888" y="4133088"/>
-            <a:ext cx="1554480" cy="365760"/>
-          </a:xfrm>
-          <a:prstGeom prst="rect">
-            <a:avLst/>
-          </a:prstGeom>
-          <a:noFill/>
-          <a:ln/>
-        </p:spPr>
-        <p:txBody>
-          <a:bodyPr wrap="square" lIns="0" tIns="0" rIns="0" bIns="0" rtlCol="0" anchor="ctr"/>
+          <p:cNvPr id="31" name="Text 29"/>
+          <p:cNvSpPr/>
+          <p:nvPr/>
+        </p:nvSpPr>
+        <p:spPr>
+          <a:xfrm>
+            <a:off x="6263640" y="2944368"/>
+            <a:ext cx="1828800" cy="201168"/>
+          </a:xfrm>
+          <a:prstGeom prst="rect">
+            <a:avLst/>
+          </a:prstGeom>
+          <a:noFill/>
+          <a:ln/>
+        </p:spPr>
+        <p:txBody>
+          <a:bodyPr wrap="square" lIns="0" tIns="0" rIns="0" bIns="0" rtlCol="0" anchor="ctr"/>
+          <a:lstStyle/>
+          <a:p>
+            <a:pPr indent="0" marL="0">
+              <a:buNone/>
+            </a:pPr>
+            <a:r>
+              <a:rPr lang="en-US" sz="1300" b="1" dirty="0">
+                <a:solidFill>
+                  <a:srgbClr val="FFFFFF"/>
+                </a:solidFill>
+                <a:latin typeface="Helvetica Neue" pitchFamily="34" charset="0"/>
+                <a:ea typeface="Helvetica Neue" pitchFamily="34" charset="-122"/>
+                <a:cs typeface="Helvetica Neue" pitchFamily="34" charset="-120"/>
+              </a:rPr>
+              <a:t>DAG Harness</a:t>
+            </a:r>
+            <a:endParaRPr lang="en-US" sz="1300" dirty="0"/>
+          </a:p>
+        </p:txBody>
+      </p:sp>
+      <p:sp>
+        <p:nvSpPr>
+          <p:cNvPr id="32" name="Shape 30"/>
+          <p:cNvSpPr/>
+          <p:nvPr/>
+        </p:nvSpPr>
+        <p:spPr>
+          <a:xfrm>
+            <a:off x="6281928" y="3456432"/>
+            <a:ext cx="932688" cy="438912"/>
+          </a:xfrm>
+          <a:prstGeom prst="roundRect">
+            <a:avLst>
+              <a:gd name="adj" fmla="val 12500"/>
+            </a:avLst>
+          </a:prstGeom>
+          <a:solidFill>
+            <a:srgbClr val="102747"/>
+          </a:solidFill>
+          <a:ln w="12700">
+            <a:solidFill>
+              <a:srgbClr val="26405F"/>
+            </a:solidFill>
+            <a:prstDash val="solid"/>
+          </a:ln>
+        </p:spPr>
+      </p:sp>
+      <p:sp>
+        <p:nvSpPr>
+          <p:cNvPr id="33" name="Text 31"/>
+          <p:cNvSpPr/>
+          <p:nvPr/>
+        </p:nvSpPr>
+        <p:spPr>
+          <a:xfrm>
+            <a:off x="6336792" y="3566160"/>
+            <a:ext cx="822960" cy="73152"/>
+          </a:xfrm>
+          <a:prstGeom prst="rect">
+            <a:avLst/>
+          </a:prstGeom>
+          <a:noFill/>
+          <a:ln/>
+        </p:spPr>
+        <p:txBody>
+          <a:bodyPr wrap="square" lIns="0" tIns="0" rIns="0" bIns="0" rtlCol="0" anchor="ctr">
+            <a:normAutofit/>
+          </a:bodyPr>
           <a:lstStyle/>
           <a:p>
             <a:pPr algn="ctr" indent="0" marL="0">
               <a:buNone/>
             </a:pPr>
             <a:r>
-              <a:rPr lang="en-US" sz="1450" b="1" dirty="0">
+              <a:rPr lang="en-US" sz="670" b="1" dirty="0">
                 <a:solidFill>
                   <a:srgbClr val="FFFFFF"/>
                 </a:solidFill>
@@ -4388,381 +5104,964 @@
                 <a:ea typeface="Helvetica Neue" pitchFamily="34" charset="-122"/>
                 <a:cs typeface="Helvetica Neue" pitchFamily="34" charset="-120"/>
               </a:rPr>
-              <a:t>DAG</a:t>
-            </a:r>
-            <a:endParaRPr lang="en-US" sz="1450" dirty="0"/>
-          </a:p>
-        </p:txBody>
-      </p:sp>
-      <p:sp>
-        <p:nvSpPr>
-          <p:cNvPr id="13" name="Text 11"/>
-          <p:cNvSpPr/>
-          <p:nvPr/>
-        </p:nvSpPr>
-        <p:spPr>
-          <a:xfrm>
-            <a:off x="2532888" y="4480560"/>
-            <a:ext cx="1554480" cy="320040"/>
-          </a:xfrm>
-          <a:prstGeom prst="rect">
-            <a:avLst/>
-          </a:prstGeom>
-          <a:noFill/>
-          <a:ln/>
-        </p:spPr>
-        <p:txBody>
-          <a:bodyPr wrap="square" lIns="0" tIns="0" rIns="0" bIns="0" rtlCol="0" anchor="ctr"/>
+              <a:t>Intent</a:t>
+            </a:r>
+            <a:endParaRPr lang="en-US" sz="670" dirty="0"/>
+          </a:p>
+        </p:txBody>
+      </p:sp>
+      <p:sp>
+        <p:nvSpPr>
+          <p:cNvPr id="34" name="Text 32"/>
+          <p:cNvSpPr/>
+          <p:nvPr/>
+        </p:nvSpPr>
+        <p:spPr>
+          <a:xfrm>
+            <a:off x="6336792" y="3730752"/>
+            <a:ext cx="822960" cy="54864"/>
+          </a:xfrm>
+          <a:prstGeom prst="rect">
+            <a:avLst/>
+          </a:prstGeom>
+          <a:noFill/>
+          <a:ln/>
+        </p:spPr>
+        <p:txBody>
+          <a:bodyPr wrap="square" lIns="0" tIns="0" rIns="0" bIns="0" rtlCol="0" anchor="ctr">
+            <a:normAutofit/>
+          </a:bodyPr>
           <a:lstStyle/>
           <a:p>
             <a:pPr algn="ctr" indent="0" marL="0">
               <a:buNone/>
             </a:pPr>
             <a:r>
-              <a:rPr lang="en-US" sz="1000" dirty="0">
-                <a:solidFill>
-                  <a:srgbClr val="DCF5F0"/>
-                </a:solidFill>
-                <a:latin typeface="Helvetica Neue" pitchFamily="34" charset="0"/>
-                <a:ea typeface="Helvetica Neue" pitchFamily="34" charset="-122"/>
-                <a:cs typeface="Helvetica Neue" pitchFamily="34" charset="-120"/>
-              </a:rPr>
-              <a:t>watch the process</a:t>
-            </a:r>
-            <a:endParaRPr lang="en-US" sz="1000" dirty="0"/>
-          </a:p>
-        </p:txBody>
-      </p:sp>
-      <p:sp>
-        <p:nvSpPr>
-          <p:cNvPr id="14" name="Shape 12"/>
-          <p:cNvSpPr/>
-          <p:nvPr/>
-        </p:nvSpPr>
-        <p:spPr>
-          <a:xfrm>
-            <a:off x="4142232" y="4389120"/>
-            <a:ext cx="301752" cy="0"/>
+              <a:rPr lang="en-US" sz="560" dirty="0">
+                <a:solidFill>
+                  <a:srgbClr val="9FB0C8"/>
+                </a:solidFill>
+                <a:latin typeface="Helvetica Neue" pitchFamily="34" charset="0"/>
+                <a:ea typeface="Helvetica Neue" pitchFamily="34" charset="-122"/>
+                <a:cs typeface="Helvetica Neue" pitchFamily="34" charset="-120"/>
+              </a:rPr>
+              <a:t>input</a:t>
+            </a:r>
+            <a:endParaRPr lang="en-US" sz="560" dirty="0"/>
+          </a:p>
+        </p:txBody>
+      </p:sp>
+      <p:sp>
+        <p:nvSpPr>
+          <p:cNvPr id="35" name="Shape 33"/>
+          <p:cNvSpPr/>
+          <p:nvPr/>
+        </p:nvSpPr>
+        <p:spPr>
+          <a:xfrm>
+            <a:off x="7214616" y="3675888"/>
+            <a:ext cx="310896" cy="0"/>
           </a:xfrm>
           <a:prstGeom prst="line">
             <a:avLst/>
           </a:prstGeom>
           <a:noFill/>
-          <a:ln w="25400">
+          <a:ln w="13970">
+            <a:solidFill>
+              <a:srgbClr val="7FE7DA"/>
+            </a:solidFill>
+            <a:prstDash val="solid"/>
+            <a:tailEnd type="triangle"/>
+          </a:ln>
+        </p:spPr>
+      </p:sp>
+      <p:sp>
+        <p:nvSpPr>
+          <p:cNvPr id="36" name="Shape 34"/>
+          <p:cNvSpPr/>
+          <p:nvPr/>
+        </p:nvSpPr>
+        <p:spPr>
+          <a:xfrm>
+            <a:off x="7543800" y="3456432"/>
+            <a:ext cx="932688" cy="438912"/>
+          </a:xfrm>
+          <a:prstGeom prst="roundRect">
+            <a:avLst>
+              <a:gd name="adj" fmla="val 12500"/>
+            </a:avLst>
+          </a:prstGeom>
+          <a:solidFill>
+            <a:srgbClr val="102747"/>
+          </a:solidFill>
+          <a:ln w="12700">
+            <a:solidFill>
+              <a:srgbClr val="26405F"/>
+            </a:solidFill>
+            <a:prstDash val="solid"/>
+          </a:ln>
+        </p:spPr>
+      </p:sp>
+      <p:sp>
+        <p:nvSpPr>
+          <p:cNvPr id="37" name="Text 35"/>
+          <p:cNvSpPr/>
+          <p:nvPr/>
+        </p:nvSpPr>
+        <p:spPr>
+          <a:xfrm>
+            <a:off x="7598664" y="3566160"/>
+            <a:ext cx="822960" cy="73152"/>
+          </a:xfrm>
+          <a:prstGeom prst="rect">
+            <a:avLst/>
+          </a:prstGeom>
+          <a:noFill/>
+          <a:ln/>
+        </p:spPr>
+        <p:txBody>
+          <a:bodyPr wrap="square" lIns="0" tIns="0" rIns="0" bIns="0" rtlCol="0" anchor="ctr">
+            <a:normAutofit/>
+          </a:bodyPr>
+          <a:lstStyle/>
+          <a:p>
+            <a:pPr algn="ctr" indent="0" marL="0">
+              <a:buNone/>
+            </a:pPr>
+            <a:r>
+              <a:rPr lang="en-US" sz="670" b="1" dirty="0">
+                <a:solidFill>
+                  <a:srgbClr val="FFFFFF"/>
+                </a:solidFill>
+                <a:latin typeface="Helvetica Neue" pitchFamily="34" charset="0"/>
+                <a:ea typeface="Helvetica Neue" pitchFamily="34" charset="-122"/>
+                <a:cs typeface="Helvetica Neue" pitchFamily="34" charset="-120"/>
+              </a:rPr>
+              <a:t>Manifest</a:t>
+            </a:r>
+            <a:endParaRPr lang="en-US" sz="670" dirty="0"/>
+          </a:p>
+        </p:txBody>
+      </p:sp>
+      <p:sp>
+        <p:nvSpPr>
+          <p:cNvPr id="38" name="Text 36"/>
+          <p:cNvSpPr/>
+          <p:nvPr/>
+        </p:nvSpPr>
+        <p:spPr>
+          <a:xfrm>
+            <a:off x="7598664" y="3730752"/>
+            <a:ext cx="822960" cy="54864"/>
+          </a:xfrm>
+          <a:prstGeom prst="rect">
+            <a:avLst/>
+          </a:prstGeom>
+          <a:noFill/>
+          <a:ln/>
+        </p:spPr>
+        <p:txBody>
+          <a:bodyPr wrap="square" lIns="0" tIns="0" rIns="0" bIns="0" rtlCol="0" anchor="ctr">
+            <a:normAutofit/>
+          </a:bodyPr>
+          <a:lstStyle/>
+          <a:p>
+            <a:pPr algn="ctr" indent="0" marL="0">
+              <a:buNone/>
+            </a:pPr>
+            <a:r>
+              <a:rPr lang="en-US" sz="560" dirty="0">
+                <a:solidFill>
+                  <a:srgbClr val="9FB0C8"/>
+                </a:solidFill>
+                <a:latin typeface="Helvetica Neue" pitchFamily="34" charset="0"/>
+                <a:ea typeface="Helvetica Neue" pitchFamily="34" charset="-122"/>
+                <a:cs typeface="Helvetica Neue" pitchFamily="34" charset="-120"/>
+              </a:rPr>
+              <a:t>contract</a:t>
+            </a:r>
+            <a:endParaRPr lang="en-US" sz="560" dirty="0"/>
+          </a:p>
+        </p:txBody>
+      </p:sp>
+      <p:sp>
+        <p:nvSpPr>
+          <p:cNvPr id="39" name="Shape 37"/>
+          <p:cNvSpPr/>
+          <p:nvPr/>
+        </p:nvSpPr>
+        <p:spPr>
+          <a:xfrm>
+            <a:off x="8476488" y="3675888"/>
+            <a:ext cx="310896" cy="0"/>
+          </a:xfrm>
+          <a:prstGeom prst="line">
+            <a:avLst/>
+          </a:prstGeom>
+          <a:noFill/>
+          <a:ln w="13970">
+            <a:solidFill>
+              <a:srgbClr val="7FE7DA"/>
+            </a:solidFill>
+            <a:prstDash val="solid"/>
+            <a:tailEnd type="triangle"/>
+          </a:ln>
+        </p:spPr>
+      </p:sp>
+      <p:sp>
+        <p:nvSpPr>
+          <p:cNvPr id="40" name="Shape 38"/>
+          <p:cNvSpPr/>
+          <p:nvPr/>
+        </p:nvSpPr>
+        <p:spPr>
+          <a:xfrm>
+            <a:off x="8805672" y="3456432"/>
+            <a:ext cx="932688" cy="438912"/>
+          </a:xfrm>
+          <a:prstGeom prst="roundRect">
+            <a:avLst>
+              <a:gd name="adj" fmla="val 12500"/>
+            </a:avLst>
+          </a:prstGeom>
+          <a:solidFill>
+            <a:srgbClr val="15B3A4"/>
+          </a:solidFill>
+          <a:ln w="12700">
             <a:solidFill>
               <a:srgbClr val="15B3A4"/>
             </a:solidFill>
             <a:prstDash val="solid"/>
+          </a:ln>
+        </p:spPr>
+      </p:sp>
+      <p:sp>
+        <p:nvSpPr>
+          <p:cNvPr id="41" name="Text 39"/>
+          <p:cNvSpPr/>
+          <p:nvPr/>
+        </p:nvSpPr>
+        <p:spPr>
+          <a:xfrm>
+            <a:off x="8860536" y="3566160"/>
+            <a:ext cx="822960" cy="73152"/>
+          </a:xfrm>
+          <a:prstGeom prst="rect">
+            <a:avLst/>
+          </a:prstGeom>
+          <a:noFill/>
+          <a:ln/>
+        </p:spPr>
+        <p:txBody>
+          <a:bodyPr wrap="square" lIns="0" tIns="0" rIns="0" bIns="0" rtlCol="0" anchor="ctr">
+            <a:normAutofit/>
+          </a:bodyPr>
+          <a:lstStyle/>
+          <a:p>
+            <a:pPr algn="ctr" indent="0" marL="0">
+              <a:buNone/>
+            </a:pPr>
+            <a:r>
+              <a:rPr lang="en-US" sz="670" b="1" dirty="0">
+                <a:solidFill>
+                  <a:srgbClr val="063C36"/>
+                </a:solidFill>
+                <a:latin typeface="Helvetica Neue" pitchFamily="34" charset="0"/>
+                <a:ea typeface="Helvetica Neue" pitchFamily="34" charset="-122"/>
+                <a:cs typeface="Helvetica Neue" pitchFamily="34" charset="-120"/>
+              </a:rPr>
+              <a:t>AI Build</a:t>
+            </a:r>
+            <a:endParaRPr lang="en-US" sz="670" dirty="0"/>
+          </a:p>
+        </p:txBody>
+      </p:sp>
+      <p:sp>
+        <p:nvSpPr>
+          <p:cNvPr id="42" name="Text 40"/>
+          <p:cNvSpPr/>
+          <p:nvPr/>
+        </p:nvSpPr>
+        <p:spPr>
+          <a:xfrm>
+            <a:off x="8860536" y="3730752"/>
+            <a:ext cx="822960" cy="54864"/>
+          </a:xfrm>
+          <a:prstGeom prst="rect">
+            <a:avLst/>
+          </a:prstGeom>
+          <a:noFill/>
+          <a:ln/>
+        </p:spPr>
+        <p:txBody>
+          <a:bodyPr wrap="square" lIns="0" tIns="0" rIns="0" bIns="0" rtlCol="0" anchor="ctr">
+            <a:normAutofit/>
+          </a:bodyPr>
+          <a:lstStyle/>
+          <a:p>
+            <a:pPr algn="ctr" indent="0" marL="0">
+              <a:buNone/>
+            </a:pPr>
+            <a:r>
+              <a:rPr lang="en-US" sz="560" dirty="0">
+                <a:solidFill>
+                  <a:srgbClr val="063C36"/>
+                </a:solidFill>
+                <a:latin typeface="Helvetica Neue" pitchFamily="34" charset="0"/>
+                <a:ea typeface="Helvetica Neue" pitchFamily="34" charset="-122"/>
+                <a:cs typeface="Helvetica Neue" pitchFamily="34" charset="-120"/>
+              </a:rPr>
+              <a:t>AI</a:t>
+            </a:r>
+            <a:endParaRPr lang="en-US" sz="560" dirty="0"/>
+          </a:p>
+        </p:txBody>
+      </p:sp>
+      <p:sp>
+        <p:nvSpPr>
+          <p:cNvPr id="43" name="Shape 41"/>
+          <p:cNvSpPr/>
+          <p:nvPr/>
+        </p:nvSpPr>
+        <p:spPr>
+          <a:xfrm>
+            <a:off x="9738360" y="3675888"/>
+            <a:ext cx="310896" cy="0"/>
+          </a:xfrm>
+          <a:prstGeom prst="line">
+            <a:avLst/>
+          </a:prstGeom>
+          <a:noFill/>
+          <a:ln w="13970">
+            <a:solidFill>
+              <a:srgbClr val="7FE7DA"/>
+            </a:solidFill>
+            <a:prstDash val="solid"/>
             <a:tailEnd type="triangle"/>
           </a:ln>
         </p:spPr>
       </p:sp>
       <p:sp>
         <p:nvSpPr>
-          <p:cNvPr id="15" name="Shape 13"/>
-          <p:cNvSpPr/>
-          <p:nvPr/>
-        </p:nvSpPr>
-        <p:spPr>
-          <a:xfrm>
-            <a:off x="4498848" y="3931920"/>
-            <a:ext cx="1554480" cy="914400"/>
+          <p:cNvPr id="44" name="Shape 42"/>
+          <p:cNvSpPr/>
+          <p:nvPr/>
+        </p:nvSpPr>
+        <p:spPr>
+          <a:xfrm>
+            <a:off x="10067544" y="3456432"/>
+            <a:ext cx="932688" cy="438912"/>
           </a:xfrm>
           <a:prstGeom prst="roundRect">
             <a:avLst>
-              <a:gd name="adj" fmla="val 8000"/>
+              <a:gd name="adj" fmla="val 12500"/>
             </a:avLst>
           </a:prstGeom>
           <a:solidFill>
-            <a:srgbClr val="FFFFFF"/>
+            <a:srgbClr val="102747"/>
           </a:solidFill>
+          <a:ln w="12700">
+            <a:solidFill>
+              <a:srgbClr val="26405F"/>
+            </a:solidFill>
+            <a:prstDash val="solid"/>
+          </a:ln>
+        </p:spPr>
+      </p:sp>
+      <p:sp>
+        <p:nvSpPr>
+          <p:cNvPr id="45" name="Text 43"/>
+          <p:cNvSpPr/>
+          <p:nvPr/>
+        </p:nvSpPr>
+        <p:spPr>
+          <a:xfrm>
+            <a:off x="10122408" y="3566160"/>
+            <a:ext cx="822960" cy="73152"/>
+          </a:xfrm>
+          <a:prstGeom prst="rect">
+            <a:avLst/>
+          </a:prstGeom>
+          <a:noFill/>
+          <a:ln/>
+        </p:spPr>
+        <p:txBody>
+          <a:bodyPr wrap="square" lIns="0" tIns="0" rIns="0" bIns="0" rtlCol="0" anchor="ctr">
+            <a:normAutofit/>
+          </a:bodyPr>
+          <a:lstStyle/>
+          <a:p>
+            <a:pPr algn="ctr" indent="0" marL="0">
+              <a:buNone/>
+            </a:pPr>
+            <a:r>
+              <a:rPr lang="en-US" sz="670" b="1" dirty="0">
+                <a:solidFill>
+                  <a:srgbClr val="FFFFFF"/>
+                </a:solidFill>
+                <a:latin typeface="Helvetica Neue" pitchFamily="34" charset="0"/>
+                <a:ea typeface="Helvetica Neue" pitchFamily="34" charset="-122"/>
+                <a:cs typeface="Helvetica Neue" pitchFamily="34" charset="-120"/>
+              </a:rPr>
+              <a:t>Tool</a:t>
+            </a:r>
+            <a:endParaRPr lang="en-US" sz="670" dirty="0"/>
+          </a:p>
+        </p:txBody>
+      </p:sp>
+      <p:sp>
+        <p:nvSpPr>
+          <p:cNvPr id="46" name="Text 44"/>
+          <p:cNvSpPr/>
+          <p:nvPr/>
+        </p:nvSpPr>
+        <p:spPr>
+          <a:xfrm>
+            <a:off x="10122408" y="3730752"/>
+            <a:ext cx="822960" cy="54864"/>
+          </a:xfrm>
+          <a:prstGeom prst="rect">
+            <a:avLst/>
+          </a:prstGeom>
+          <a:noFill/>
+          <a:ln/>
+        </p:spPr>
+        <p:txBody>
+          <a:bodyPr wrap="square" lIns="0" tIns="0" rIns="0" bIns="0" rtlCol="0" anchor="ctr">
+            <a:normAutofit/>
+          </a:bodyPr>
+          <a:lstStyle/>
+          <a:p>
+            <a:pPr algn="ctr" indent="0" marL="0">
+              <a:buNone/>
+            </a:pPr>
+            <a:r>
+              <a:rPr lang="en-US" sz="560" dirty="0">
+                <a:solidFill>
+                  <a:srgbClr val="9FB0C8"/>
+                </a:solidFill>
+                <a:latin typeface="Helvetica Neue" pitchFamily="34" charset="0"/>
+                <a:ea typeface="Helvetica Neue" pitchFamily="34" charset="-122"/>
+                <a:cs typeface="Helvetica Neue" pitchFamily="34" charset="-120"/>
+              </a:rPr>
+              <a:t>node</a:t>
+            </a:r>
+            <a:endParaRPr lang="en-US" sz="560" dirty="0"/>
+          </a:p>
+        </p:txBody>
+      </p:sp>
+      <p:sp>
+        <p:nvSpPr>
+          <p:cNvPr id="47" name="Shape 45"/>
+          <p:cNvSpPr/>
+          <p:nvPr/>
+        </p:nvSpPr>
+        <p:spPr>
+          <a:xfrm>
+            <a:off x="10533888" y="3895344"/>
+            <a:ext cx="0" cy="219456"/>
+          </a:xfrm>
+          <a:prstGeom prst="line">
+            <a:avLst/>
+          </a:prstGeom>
+          <a:noFill/>
+          <a:ln w="13970">
+            <a:solidFill>
+              <a:srgbClr val="7FE7DA"/>
+            </a:solidFill>
+            <a:prstDash val="solid"/>
+          </a:ln>
+        </p:spPr>
+      </p:sp>
+      <p:sp>
+        <p:nvSpPr>
+          <p:cNvPr id="48" name="Shape 46"/>
+          <p:cNvSpPr/>
+          <p:nvPr/>
+        </p:nvSpPr>
+        <p:spPr>
+          <a:xfrm>
+            <a:off x="6748272" y="4114800"/>
+            <a:ext cx="3785616" cy="0"/>
+          </a:xfrm>
+          <a:prstGeom prst="line">
+            <a:avLst/>
+          </a:prstGeom>
+          <a:noFill/>
+          <a:ln w="13970">
+            <a:solidFill>
+              <a:srgbClr val="7FE7DA"/>
+            </a:solidFill>
+            <a:prstDash val="solid"/>
+          </a:ln>
+        </p:spPr>
+      </p:sp>
+      <p:sp>
+        <p:nvSpPr>
+          <p:cNvPr id="49" name="Shape 47"/>
+          <p:cNvSpPr/>
+          <p:nvPr/>
+        </p:nvSpPr>
+        <p:spPr>
+          <a:xfrm>
+            <a:off x="6748272" y="4114800"/>
+            <a:ext cx="0" cy="219456"/>
+          </a:xfrm>
+          <a:prstGeom prst="line">
+            <a:avLst/>
+          </a:prstGeom>
+          <a:noFill/>
+          <a:ln w="13970">
+            <a:solidFill>
+              <a:srgbClr val="7FE7DA"/>
+            </a:solidFill>
+            <a:prstDash val="solid"/>
+            <a:tailEnd type="triangle"/>
+          </a:ln>
+        </p:spPr>
+      </p:sp>
+      <p:sp>
+        <p:nvSpPr>
+          <p:cNvPr id="50" name="Shape 48"/>
+          <p:cNvSpPr/>
+          <p:nvPr/>
+        </p:nvSpPr>
+        <p:spPr>
+          <a:xfrm>
+            <a:off x="6281928" y="4297680"/>
+            <a:ext cx="932688" cy="438912"/>
+          </a:xfrm>
+          <a:prstGeom prst="roundRect">
+            <a:avLst>
+              <a:gd name="adj" fmla="val 12500"/>
+            </a:avLst>
+          </a:prstGeom>
+          <a:solidFill>
+            <a:srgbClr val="102747"/>
+          </a:solidFill>
+          <a:ln w="12700">
+            <a:solidFill>
+              <a:srgbClr val="26405F"/>
+            </a:solidFill>
+            <a:prstDash val="solid"/>
+          </a:ln>
+        </p:spPr>
+      </p:sp>
+      <p:sp>
+        <p:nvSpPr>
+          <p:cNvPr id="51" name="Text 49"/>
+          <p:cNvSpPr/>
+          <p:nvPr/>
+        </p:nvSpPr>
+        <p:spPr>
+          <a:xfrm>
+            <a:off x="6336792" y="4407408"/>
+            <a:ext cx="822960" cy="73152"/>
+          </a:xfrm>
+          <a:prstGeom prst="rect">
+            <a:avLst/>
+          </a:prstGeom>
+          <a:noFill/>
+          <a:ln/>
+        </p:spPr>
+        <p:txBody>
+          <a:bodyPr wrap="square" lIns="0" tIns="0" rIns="0" bIns="0" rtlCol="0" anchor="ctr">
+            <a:normAutofit/>
+          </a:bodyPr>
+          <a:lstStyle/>
+          <a:p>
+            <a:pPr algn="ctr" indent="0" marL="0">
+              <a:buNone/>
+            </a:pPr>
+            <a:r>
+              <a:rPr lang="en-US" sz="670" b="1" dirty="0">
+                <a:solidFill>
+                  <a:srgbClr val="FFFFFF"/>
+                </a:solidFill>
+                <a:latin typeface="Helvetica Neue" pitchFamily="34" charset="0"/>
+                <a:ea typeface="Helvetica Neue" pitchFamily="34" charset="-122"/>
+                <a:cs typeface="Helvetica Neue" pitchFamily="34" charset="-120"/>
+              </a:rPr>
+              <a:t>Check</a:t>
+            </a:r>
+            <a:endParaRPr lang="en-US" sz="670" dirty="0"/>
+          </a:p>
+        </p:txBody>
+      </p:sp>
+      <p:sp>
+        <p:nvSpPr>
+          <p:cNvPr id="52" name="Text 50"/>
+          <p:cNvSpPr/>
+          <p:nvPr/>
+        </p:nvSpPr>
+        <p:spPr>
+          <a:xfrm>
+            <a:off x="6336792" y="4572000"/>
+            <a:ext cx="822960" cy="54864"/>
+          </a:xfrm>
+          <a:prstGeom prst="rect">
+            <a:avLst/>
+          </a:prstGeom>
+          <a:noFill/>
+          <a:ln/>
+        </p:spPr>
+        <p:txBody>
+          <a:bodyPr wrap="square" lIns="0" tIns="0" rIns="0" bIns="0" rtlCol="0" anchor="ctr">
+            <a:normAutofit/>
+          </a:bodyPr>
+          <a:lstStyle/>
+          <a:p>
+            <a:pPr algn="ctr" indent="0" marL="0">
+              <a:buNone/>
+            </a:pPr>
+            <a:r>
+              <a:rPr lang="en-US" sz="560" dirty="0">
+                <a:solidFill>
+                  <a:srgbClr val="9FB0C8"/>
+                </a:solidFill>
+                <a:latin typeface="Helvetica Neue" pitchFamily="34" charset="0"/>
+                <a:ea typeface="Helvetica Neue" pitchFamily="34" charset="-122"/>
+                <a:cs typeface="Helvetica Neue" pitchFamily="34" charset="-120"/>
+              </a:rPr>
+              <a:t>lint</a:t>
+            </a:r>
+            <a:endParaRPr lang="en-US" sz="560" dirty="0"/>
+          </a:p>
+        </p:txBody>
+      </p:sp>
+      <p:sp>
+        <p:nvSpPr>
+          <p:cNvPr id="53" name="Shape 51"/>
+          <p:cNvSpPr/>
+          <p:nvPr/>
+        </p:nvSpPr>
+        <p:spPr>
+          <a:xfrm>
+            <a:off x="7214616" y="4517136"/>
+            <a:ext cx="310896" cy="0"/>
+          </a:xfrm>
+          <a:prstGeom prst="line">
+            <a:avLst/>
+          </a:prstGeom>
+          <a:noFill/>
+          <a:ln w="13970">
+            <a:solidFill>
+              <a:srgbClr val="7FE7DA"/>
+            </a:solidFill>
+            <a:prstDash val="solid"/>
+            <a:tailEnd type="triangle"/>
+          </a:ln>
+        </p:spPr>
+      </p:sp>
+      <p:sp>
+        <p:nvSpPr>
+          <p:cNvPr id="54" name="Shape 52"/>
+          <p:cNvSpPr/>
+          <p:nvPr/>
+        </p:nvSpPr>
+        <p:spPr>
+          <a:xfrm>
+            <a:off x="7543800" y="4297680"/>
+            <a:ext cx="932688" cy="438912"/>
+          </a:xfrm>
+          <a:prstGeom prst="roundRect">
+            <a:avLst>
+              <a:gd name="adj" fmla="val 12500"/>
+            </a:avLst>
+          </a:prstGeom>
+          <a:solidFill>
+            <a:srgbClr val="15B3A4"/>
+          </a:solidFill>
+          <a:ln w="12700">
+            <a:solidFill>
+              <a:srgbClr val="15B3A4"/>
+            </a:solidFill>
+            <a:prstDash val="solid"/>
+          </a:ln>
+        </p:spPr>
+      </p:sp>
+      <p:sp>
+        <p:nvSpPr>
+          <p:cNvPr id="55" name="Text 53"/>
+          <p:cNvSpPr/>
+          <p:nvPr/>
+        </p:nvSpPr>
+        <p:spPr>
+          <a:xfrm>
+            <a:off x="7598664" y="4407408"/>
+            <a:ext cx="822960" cy="73152"/>
+          </a:xfrm>
+          <a:prstGeom prst="rect">
+            <a:avLst/>
+          </a:prstGeom>
+          <a:noFill/>
+          <a:ln/>
+        </p:spPr>
+        <p:txBody>
+          <a:bodyPr wrap="square" lIns="0" tIns="0" rIns="0" bIns="0" rtlCol="0" anchor="ctr">
+            <a:normAutofit/>
+          </a:bodyPr>
+          <a:lstStyle/>
+          <a:p>
+            <a:pPr algn="ctr" indent="0" marL="0">
+              <a:buNone/>
+            </a:pPr>
+            <a:r>
+              <a:rPr lang="en-US" sz="670" b="1" dirty="0">
+                <a:solidFill>
+                  <a:srgbClr val="063C36"/>
+                </a:solidFill>
+                <a:latin typeface="Helvetica Neue" pitchFamily="34" charset="0"/>
+                <a:ea typeface="Helvetica Neue" pitchFamily="34" charset="-122"/>
+                <a:cs typeface="Helvetica Neue" pitchFamily="34" charset="-120"/>
+              </a:rPr>
+              <a:t>Repair</a:t>
+            </a:r>
+            <a:endParaRPr lang="en-US" sz="670" dirty="0"/>
+          </a:p>
+        </p:txBody>
+      </p:sp>
+      <p:sp>
+        <p:nvSpPr>
+          <p:cNvPr id="56" name="Text 54"/>
+          <p:cNvSpPr/>
+          <p:nvPr/>
+        </p:nvSpPr>
+        <p:spPr>
+          <a:xfrm>
+            <a:off x="7598664" y="4572000"/>
+            <a:ext cx="822960" cy="54864"/>
+          </a:xfrm>
+          <a:prstGeom prst="rect">
+            <a:avLst/>
+          </a:prstGeom>
+          <a:noFill/>
+          <a:ln/>
+        </p:spPr>
+        <p:txBody>
+          <a:bodyPr wrap="square" lIns="0" tIns="0" rIns="0" bIns="0" rtlCol="0" anchor="ctr">
+            <a:normAutofit/>
+          </a:bodyPr>
+          <a:lstStyle/>
+          <a:p>
+            <a:pPr algn="ctr" indent="0" marL="0">
+              <a:buNone/>
+            </a:pPr>
+            <a:r>
+              <a:rPr lang="en-US" sz="560" dirty="0">
+                <a:solidFill>
+                  <a:srgbClr val="063C36"/>
+                </a:solidFill>
+                <a:latin typeface="Helvetica Neue" pitchFamily="34" charset="0"/>
+                <a:ea typeface="Helvetica Neue" pitchFamily="34" charset="-122"/>
+                <a:cs typeface="Helvetica Neue" pitchFamily="34" charset="-120"/>
+              </a:rPr>
+              <a:t>AI</a:t>
+            </a:r>
+            <a:endParaRPr lang="en-US" sz="560" dirty="0"/>
+          </a:p>
+        </p:txBody>
+      </p:sp>
+      <p:sp>
+        <p:nvSpPr>
+          <p:cNvPr id="57" name="Shape 55"/>
+          <p:cNvSpPr/>
+          <p:nvPr/>
+        </p:nvSpPr>
+        <p:spPr>
+          <a:xfrm>
+            <a:off x="8476488" y="4517136"/>
+            <a:ext cx="310896" cy="0"/>
+          </a:xfrm>
+          <a:prstGeom prst="line">
+            <a:avLst/>
+          </a:prstGeom>
+          <a:noFill/>
+          <a:ln w="13970">
+            <a:solidFill>
+              <a:srgbClr val="7FE7DA"/>
+            </a:solidFill>
+            <a:prstDash val="solid"/>
+            <a:tailEnd type="triangle"/>
+          </a:ln>
+        </p:spPr>
+      </p:sp>
+      <p:sp>
+        <p:nvSpPr>
+          <p:cNvPr id="58" name="Shape 56"/>
+          <p:cNvSpPr/>
+          <p:nvPr/>
+        </p:nvSpPr>
+        <p:spPr>
+          <a:xfrm>
+            <a:off x="8805672" y="4297680"/>
+            <a:ext cx="932688" cy="438912"/>
+          </a:xfrm>
+          <a:prstGeom prst="roundRect">
+            <a:avLst>
+              <a:gd name="adj" fmla="val 12500"/>
+            </a:avLst>
+          </a:prstGeom>
+          <a:solidFill>
+            <a:srgbClr val="102747"/>
+          </a:solidFill>
+          <a:ln w="12700">
+            <a:solidFill>
+              <a:srgbClr val="26405F"/>
+            </a:solidFill>
+            <a:prstDash val="solid"/>
+          </a:ln>
+        </p:spPr>
+      </p:sp>
+      <p:sp>
+        <p:nvSpPr>
+          <p:cNvPr id="59" name="Text 57"/>
+          <p:cNvSpPr/>
+          <p:nvPr/>
+        </p:nvSpPr>
+        <p:spPr>
+          <a:xfrm>
+            <a:off x="8860536" y="4407408"/>
+            <a:ext cx="822960" cy="73152"/>
+          </a:xfrm>
+          <a:prstGeom prst="rect">
+            <a:avLst/>
+          </a:prstGeom>
+          <a:noFill/>
+          <a:ln/>
+        </p:spPr>
+        <p:txBody>
+          <a:bodyPr wrap="square" lIns="0" tIns="0" rIns="0" bIns="0" rtlCol="0" anchor="ctr">
+            <a:normAutofit/>
+          </a:bodyPr>
+          <a:lstStyle/>
+          <a:p>
+            <a:pPr algn="ctr" indent="0" marL="0">
+              <a:buNone/>
+            </a:pPr>
+            <a:r>
+              <a:rPr lang="en-US" sz="670" b="1" dirty="0">
+                <a:solidFill>
+                  <a:srgbClr val="FFFFFF"/>
+                </a:solidFill>
+                <a:latin typeface="Helvetica Neue" pitchFamily="34" charset="0"/>
+                <a:ea typeface="Helvetica Neue" pitchFamily="34" charset="-122"/>
+                <a:cs typeface="Helvetica Neue" pitchFamily="34" charset="-120"/>
+              </a:rPr>
+              <a:t>Ship</a:t>
+            </a:r>
+            <a:endParaRPr lang="en-US" sz="670" dirty="0"/>
+          </a:p>
+        </p:txBody>
+      </p:sp>
+      <p:sp>
+        <p:nvSpPr>
+          <p:cNvPr id="60" name="Text 58"/>
+          <p:cNvSpPr/>
+          <p:nvPr/>
+        </p:nvSpPr>
+        <p:spPr>
+          <a:xfrm>
+            <a:off x="8860536" y="4572000"/>
+            <a:ext cx="822960" cy="54864"/>
+          </a:xfrm>
+          <a:prstGeom prst="rect">
+            <a:avLst/>
+          </a:prstGeom>
+          <a:noFill/>
+          <a:ln/>
+        </p:spPr>
+        <p:txBody>
+          <a:bodyPr wrap="square" lIns="0" tIns="0" rIns="0" bIns="0" rtlCol="0" anchor="ctr">
+            <a:normAutofit/>
+          </a:bodyPr>
+          <a:lstStyle/>
+          <a:p>
+            <a:pPr algn="ctr" indent="0" marL="0">
+              <a:buNone/>
+            </a:pPr>
+            <a:r>
+              <a:rPr lang="en-US" sz="560" dirty="0">
+                <a:solidFill>
+                  <a:srgbClr val="9FB0C8"/>
+                </a:solidFill>
+                <a:latin typeface="Helvetica Neue" pitchFamily="34" charset="0"/>
+                <a:ea typeface="Helvetica Neue" pitchFamily="34" charset="-122"/>
+                <a:cs typeface="Helvetica Neue" pitchFamily="34" charset="-120"/>
+              </a:rPr>
+              <a:t>output</a:t>
+            </a:r>
+            <a:endParaRPr lang="en-US" sz="560" dirty="0"/>
+          </a:p>
+        </p:txBody>
+      </p:sp>
+      <p:sp>
+        <p:nvSpPr>
+          <p:cNvPr id="61" name="Text 59"/>
+          <p:cNvSpPr/>
+          <p:nvPr/>
+        </p:nvSpPr>
+        <p:spPr>
+          <a:xfrm>
+            <a:off x="6336792" y="4645152"/>
+            <a:ext cx="4928616" cy="164592"/>
+          </a:xfrm>
+          <a:prstGeom prst="rect">
+            <a:avLst/>
+          </a:prstGeom>
+          <a:noFill/>
+          <a:ln/>
+        </p:spPr>
+        <p:txBody>
+          <a:bodyPr wrap="square" lIns="0" tIns="0" rIns="0" bIns="0" rtlCol="0" anchor="ctr">
+            <a:normAutofit/>
+          </a:bodyPr>
+          <a:lstStyle/>
+          <a:p>
+            <a:pPr algn="ctr" indent="0" marL="0">
+              <a:buNone/>
+            </a:pPr>
+            <a:r>
+              <a:rPr lang="en-US" sz="880" dirty="0">
+                <a:solidFill>
+                  <a:srgbClr val="9FB0C8"/>
+                </a:solidFill>
+                <a:latin typeface="Helvetica Neue" pitchFamily="34" charset="0"/>
+                <a:ea typeface="Helvetica Neue" pitchFamily="34" charset="-122"/>
+                <a:cs typeface="Helvetica Neue" pitchFamily="34" charset="-120"/>
+              </a:rPr>
+              <a:t>The graph harnesses every capability: AI nodes, tool nodes, manifests, checks, human gates and outputs.</a:t>
+            </a:r>
+            <a:endParaRPr lang="en-US" sz="880" dirty="0"/>
+          </a:p>
+        </p:txBody>
+      </p:sp>
+      <p:sp>
+        <p:nvSpPr>
+          <p:cNvPr id="62" name="Shape 60"/>
+          <p:cNvSpPr/>
+          <p:nvPr/>
+        </p:nvSpPr>
+        <p:spPr>
+          <a:xfrm>
+            <a:off x="566928" y="6327648"/>
+            <a:ext cx="11057839" cy="0"/>
+          </a:xfrm>
+          <a:prstGeom prst="line">
+            <a:avLst/>
+          </a:prstGeom>
+          <a:noFill/>
           <a:ln w="12700">
             <a:solidFill>
               <a:srgbClr val="E4EAF1"/>
             </a:solidFill>
             <a:prstDash val="solid"/>
           </a:ln>
-          <a:effectLst>
-            <a:outerShdw sx="100000" sy="100000" kx="0" ky="0" algn="bl" rotWithShape="0" blurRad="88900" dist="38100" dir="8100000">
-              <a:srgbClr val="0A1526">
-                <a:alpha val="10000"/>
-              </a:srgbClr>
-            </a:outerShdw>
-          </a:effectLst>
-        </p:spPr>
-      </p:sp>
-      <p:sp>
-        <p:nvSpPr>
-          <p:cNvPr id="16" name="Text 14"/>
-          <p:cNvSpPr/>
-          <p:nvPr/>
-        </p:nvSpPr>
-        <p:spPr>
-          <a:xfrm>
-            <a:off x="4498848" y="4133088"/>
-            <a:ext cx="1554480" cy="365760"/>
-          </a:xfrm>
-          <a:prstGeom prst="rect">
-            <a:avLst/>
-          </a:prstGeom>
-          <a:noFill/>
-          <a:ln/>
-        </p:spPr>
-        <p:txBody>
-          <a:bodyPr wrap="square" lIns="0" tIns="0" rIns="0" bIns="0" rtlCol="0" anchor="ctr"/>
-          <a:lstStyle/>
-          <a:p>
-            <a:pPr algn="ctr" indent="0" marL="0">
-              <a:buNone/>
-            </a:pPr>
-            <a:r>
-              <a:rPr lang="en-US" sz="1450" b="1" dirty="0">
-                <a:solidFill>
-                  <a:srgbClr val="0F1B2E"/>
-                </a:solidFill>
-                <a:latin typeface="Helvetica Neue" pitchFamily="34" charset="0"/>
-                <a:ea typeface="Helvetica Neue" pitchFamily="34" charset="-122"/>
-                <a:cs typeface="Helvetica Neue" pitchFamily="34" charset="-120"/>
-              </a:rPr>
-              <a:t>Visual edit</a:t>
-            </a:r>
-            <a:endParaRPr lang="en-US" sz="1450" dirty="0"/>
-          </a:p>
-        </p:txBody>
-      </p:sp>
-      <p:sp>
-        <p:nvSpPr>
-          <p:cNvPr id="17" name="Text 15"/>
-          <p:cNvSpPr/>
-          <p:nvPr/>
-        </p:nvSpPr>
-        <p:spPr>
-          <a:xfrm>
-            <a:off x="4498848" y="4480560"/>
-            <a:ext cx="1554480" cy="320040"/>
-          </a:xfrm>
-          <a:prstGeom prst="rect">
-            <a:avLst/>
-          </a:prstGeom>
-          <a:noFill/>
-          <a:ln/>
-        </p:spPr>
-        <p:txBody>
-          <a:bodyPr wrap="square" lIns="0" tIns="0" rIns="0" bIns="0" rtlCol="0" anchor="ctr"/>
-          <a:lstStyle/>
-          <a:p>
-            <a:pPr algn="ctr" indent="0" marL="0">
-              <a:buNone/>
-            </a:pPr>
-            <a:r>
-              <a:rPr lang="en-US" sz="1000" dirty="0">
-                <a:solidFill>
-                  <a:srgbClr val="6B7C93"/>
-                </a:solidFill>
-                <a:latin typeface="Helvetica Neue" pitchFamily="34" charset="0"/>
-                <a:ea typeface="Helvetica Neue" pitchFamily="34" charset="-122"/>
-                <a:cs typeface="Helvetica Neue" pitchFamily="34" charset="-120"/>
-              </a:rPr>
-              <a:t>refine the structure</a:t>
-            </a:r>
-            <a:endParaRPr lang="en-US" sz="1000" dirty="0"/>
-          </a:p>
-        </p:txBody>
-      </p:sp>
-      <p:sp>
-        <p:nvSpPr>
-          <p:cNvPr id="18" name="Shape 16"/>
-          <p:cNvSpPr/>
-          <p:nvPr/>
-        </p:nvSpPr>
-        <p:spPr>
-          <a:xfrm>
-            <a:off x="6542532" y="1513332"/>
-            <a:ext cx="5202936" cy="3595293"/>
-          </a:xfrm>
-          <a:prstGeom prst="rect">
-            <a:avLst/>
-          </a:prstGeom>
-          <a:solidFill>
-            <a:srgbClr val="FFFFFF"/>
-          </a:solidFill>
-          <a:ln w="12700">
-            <a:solidFill>
-              <a:srgbClr val="E4EAF1"/>
-            </a:solidFill>
-            <a:prstDash val="solid"/>
-          </a:ln>
-          <a:effectLst>
-            <a:outerShdw sx="100000" sy="100000" kx="0" ky="0" algn="bl" rotWithShape="0" blurRad="114300" dist="50800" dir="8100000">
-              <a:srgbClr val="0A1526">
-                <a:alpha val="18000"/>
-              </a:srgbClr>
-            </a:outerShdw>
-          </a:effectLst>
-        </p:spPr>
-      </p:sp>
-      <p:pic>
-        <p:nvPicPr>
-          <p:cNvPr id="19" name="Image 0" descr="/Users/ivx/Documents/VLC-Marketing/brief/assets/vlc-visual-panel-2026-04-03.png">    </p:cNvPr>
-          <p:cNvPicPr>
-            <a:picLocks noChangeAspect="1"/>
-          </p:cNvPicPr>
-          <p:nvPr/>
-        </p:nvPicPr>
-        <p:blipFill>
-          <a:blip r:embed="rId1"/>
-          <a:stretch>
-            <a:fillRect/>
-          </a:stretch>
-        </p:blipFill>
-        <p:spPr>
-          <a:xfrm>
-            <a:off x="6583680" y="1554480"/>
-            <a:ext cx="5120640" cy="3512997"/>
-          </a:xfrm>
-          <a:prstGeom prst="rect">
-            <a:avLst/>
-          </a:prstGeom>
-        </p:spPr>
-      </p:pic>
-      <p:sp>
-        <p:nvSpPr>
-          <p:cNvPr id="20" name="Text 17"/>
-          <p:cNvSpPr/>
-          <p:nvPr/>
-        </p:nvSpPr>
-        <p:spPr>
-          <a:xfrm>
-            <a:off x="6583680" y="5131485"/>
-            <a:ext cx="5120640" cy="274320"/>
-          </a:xfrm>
-          <a:prstGeom prst="rect">
-            <a:avLst/>
-          </a:prstGeom>
-          <a:noFill/>
-          <a:ln/>
-        </p:spPr>
-        <p:txBody>
-          <a:bodyPr wrap="square" lIns="0" tIns="0" rIns="0" bIns="0" rtlCol="0" anchor="ctr"/>
-          <a:lstStyle/>
-          <a:p>
-            <a:pPr algn="l" indent="0" marL="0">
-              <a:buNone/>
-            </a:pPr>
-            <a:r>
-              <a:rPr lang="en-US" sz="900" i="1" dirty="0">
-                <a:solidFill>
-                  <a:srgbClr val="6B7C93"/>
-                </a:solidFill>
-                <a:latin typeface="Helvetica Neue" pitchFamily="34" charset="0"/>
-                <a:ea typeface="Helvetica Neue" pitchFamily="34" charset="-122"/>
-                <a:cs typeface="Helvetica Neue" pitchFamily="34" charset="-120"/>
-              </a:rPr>
-              <a:t>Visual Panel — inspect and adjust the app as structure.</a:t>
-            </a:r>
-            <a:endParaRPr lang="en-US" sz="900" dirty="0"/>
-          </a:p>
-        </p:txBody>
-      </p:sp>
-      <p:sp>
-        <p:nvSpPr>
-          <p:cNvPr id="21" name="Shape 18"/>
-          <p:cNvSpPr/>
-          <p:nvPr/>
-        </p:nvSpPr>
-        <p:spPr>
-          <a:xfrm>
-            <a:off x="566928" y="5486400"/>
-            <a:ext cx="11057839" cy="676656"/>
-          </a:xfrm>
-          <a:prstGeom prst="roundRect">
-            <a:avLst>
-              <a:gd name="adj" fmla="val 12162"/>
-            </a:avLst>
-          </a:prstGeom>
-          <a:solidFill>
-            <a:srgbClr val="EAF2F8"/>
-          </a:solidFill>
-          <a:ln w="12700">
-            <a:solidFill>
-              <a:srgbClr val="D6E6F2"/>
-            </a:solidFill>
-            <a:prstDash val="solid"/>
-          </a:ln>
-          <a:effectLst>
-            <a:outerShdw sx="100000" sy="100000" kx="0" ky="0" algn="bl" rotWithShape="0" blurRad="88900" dist="38100" dir="8100000">
-              <a:srgbClr val="0A1526">
-                <a:alpha val="10000"/>
-              </a:srgbClr>
-            </a:outerShdw>
-          </a:effectLst>
-        </p:spPr>
-      </p:sp>
-      <p:sp>
-        <p:nvSpPr>
-          <p:cNvPr id="22" name="Text 19"/>
-          <p:cNvSpPr/>
-          <p:nvPr/>
-        </p:nvSpPr>
-        <p:spPr>
-          <a:xfrm>
-            <a:off x="886968" y="5486400"/>
-            <a:ext cx="10417759" cy="676656"/>
-          </a:xfrm>
-          <a:prstGeom prst="rect">
-            <a:avLst/>
-          </a:prstGeom>
-          <a:noFill/>
-          <a:ln/>
-        </p:spPr>
-        <p:txBody>
-          <a:bodyPr wrap="square" lIns="0" tIns="0" rIns="0" bIns="0" rtlCol="0" anchor="ctr"/>
-          <a:lstStyle/>
-          <a:p>
-            <a:pPr algn="ctr" indent="0" marL="0">
-              <a:buNone/>
-            </a:pPr>
-            <a:r>
-              <a:rPr lang="en-US" sz="1400" b="1" i="1" dirty="0">
-                <a:solidFill>
-                  <a:srgbClr val="1F4FA8"/>
-                </a:solidFill>
-                <a:latin typeface="Helvetica Neue" pitchFamily="34" charset="0"/>
-                <a:ea typeface="Helvetica Neue" pitchFamily="34" charset="-122"/>
-                <a:cs typeface="Helvetica Neue" pitchFamily="34" charset="-120"/>
-              </a:rPr>
-              <a:t>For the first time, the door to programming opens to everyone.</a:t>
-            </a:r>
-            <a:endParaRPr lang="en-US" sz="1400" dirty="0"/>
-          </a:p>
-        </p:txBody>
-      </p:sp>
-      <p:sp>
-        <p:nvSpPr>
-          <p:cNvPr id="23" name="Shape 20"/>
-          <p:cNvSpPr/>
-          <p:nvPr/>
-        </p:nvSpPr>
-        <p:spPr>
-          <a:xfrm>
-            <a:off x="566928" y="6327648"/>
-            <a:ext cx="11057839" cy="0"/>
-          </a:xfrm>
-          <a:prstGeom prst="line">
-            <a:avLst/>
-          </a:prstGeom>
-          <a:noFill/>
-          <a:ln w="12700">
-            <a:solidFill>
-              <a:srgbClr val="E4EAF1"/>
-            </a:solidFill>
-            <a:prstDash val="solid"/>
-          </a:ln>
-        </p:spPr>
-      </p:sp>
-      <p:sp>
-        <p:nvSpPr>
-          <p:cNvPr id="24" name="Text 21"/>
+        </p:spPr>
+      </p:sp>
+      <p:sp>
+        <p:nvSpPr>
+          <p:cNvPr id="63" name="Text 61"/>
           <p:cNvSpPr/>
           <p:nvPr/>
         </p:nvSpPr>
@@ -4815,7 +6114,7 @@
       </p:sp>
       <p:sp>
         <p:nvSpPr>
-          <p:cNvPr id="25" name="Text 22"/>
+          <p:cNvPr id="64" name="Text 62"/>
           <p:cNvSpPr/>
           <p:nvPr/>
         </p:nvSpPr>
@@ -4939,7 +6238,7 @@
                 <a:ea typeface="Helvetica Neue" pitchFamily="34" charset="-122"/>
                 <a:cs typeface="Helvetica Neue" pitchFamily="34" charset="-120"/>
               </a:rPr>
-              <a:t>11</a:t>
+              <a:t>10</a:t>
             </a:r>
             <a:endParaRPr lang="en-US" sz="1300" dirty="0"/>
           </a:p>
@@ -4993,7 +6292,7 @@
         <p:spPr>
           <a:xfrm>
             <a:off x="566928" y="1078992"/>
-            <a:ext cx="7680960" cy="1188720"/>
+            <a:ext cx="6035040" cy="1097280"/>
           </a:xfrm>
           <a:prstGeom prst="rect">
             <a:avLst/>
@@ -5012,7 +6311,7 @@
               <a:buNone/>
             </a:pPr>
             <a:r>
-              <a:rPr lang="en-US" sz="3200" b="1" dirty="0">
+              <a:rPr lang="en-US" sz="2900" b="1" dirty="0">
                 <a:solidFill>
                   <a:srgbClr val="0F1B2E"/>
                 </a:solidFill>
@@ -5020,9 +6319,9 @@
                 <a:ea typeface="Helvetica Neue" pitchFamily="34" charset="-122"/>
                 <a:cs typeface="Helvetica Neue" pitchFamily="34" charset="-120"/>
               </a:rPr>
-              <a:t>Search-and-assemble nodes:</a:t>
-            </a:r>
-            <a:endParaRPr lang="en-US" sz="3200" dirty="0"/>
+              <a:t>Build software with</a:t>
+            </a:r>
+            <a:endParaRPr lang="en-US" sz="2900" dirty="0"/>
           </a:p>
           <a:p>
             <a:pPr algn="l" indent="0" marL="0">
@@ -5032,7 +6331,7 @@
               <a:buNone/>
             </a:pPr>
             <a:r>
-              <a:rPr lang="en-US" sz="3200" b="1" dirty="0">
+              <a:rPr lang="en-US" sz="2900" b="1" dirty="0">
                 <a:solidFill>
                   <a:srgbClr val="0F1B2E"/>
                 </a:solidFill>
@@ -5040,9 +6339,9 @@
                 <a:ea typeface="Helvetica Neue" pitchFamily="34" charset="-122"/>
                 <a:cs typeface="Helvetica Neue" pitchFamily="34" charset="-120"/>
               </a:rPr>
-              <a:t>store the compute, don't burn it.</a:t>
-            </a:r>
-            <a:endParaRPr lang="en-US" sz="3200" dirty="0"/>
+              <a:t>zero programming knowledge.</a:t>
+            </a:r>
+            <a:endParaRPr lang="en-US" sz="2900" dirty="0"/>
           </a:p>
         </p:txBody>
       </p:sp>
@@ -5055,7 +6354,7 @@
         <p:spPr>
           <a:xfrm>
             <a:off x="566928" y="2377440"/>
-            <a:ext cx="7498080" cy="914400"/>
+            <a:ext cx="5577840" cy="1188720"/>
           </a:xfrm>
           <a:prstGeom prst="rect">
             <a:avLst/>
@@ -5082,7 +6381,7 @@
                 <a:ea typeface="Helvetica Neue" pitchFamily="34" charset="-122"/>
                 <a:cs typeface="Helvetica Neue" pitchFamily="34" charset="-120"/>
               </a:rPr>
-              <a:t>Drop a 'search components' node into the DAG. Every match is fetched, the AI confirms, and they snap together automatically.</a:t>
+              <a:t>Say what you want, watch the DAG run, refine visually. Code is still there — but it's no longer the only doorway in.</a:t>
             </a:r>
             <a:endParaRPr lang="en-US" sz="1350" dirty="0"/>
           </a:p>
@@ -5096,12 +6395,12 @@
         </p:nvSpPr>
         <p:spPr>
           <a:xfrm>
-            <a:off x="1683868" y="3456432"/>
-            <a:ext cx="1828800" cy="868680"/>
+            <a:off x="566928" y="3931920"/>
+            <a:ext cx="1554480" cy="914400"/>
           </a:xfrm>
           <a:prstGeom prst="roundRect">
             <a:avLst>
-              <a:gd name="adj" fmla="val 8421"/>
+              <a:gd name="adj" fmla="val 8000"/>
             </a:avLst>
           </a:prstGeom>
           <a:solidFill>
@@ -5130,8 +6429,8 @@
         </p:nvSpPr>
         <p:spPr>
           <a:xfrm>
-            <a:off x="1683868" y="3456432"/>
-            <a:ext cx="1828800" cy="868680"/>
+            <a:off x="566928" y="4133088"/>
+            <a:ext cx="1554480" cy="365760"/>
           </a:xfrm>
           <a:prstGeom prst="rect">
             <a:avLst/>
@@ -5147,7 +6446,7 @@
               <a:buNone/>
             </a:pPr>
             <a:r>
-              <a:rPr lang="en-US" sz="1200" b="1" dirty="0">
+              <a:rPr lang="en-US" sz="1450" b="1" dirty="0">
                 <a:solidFill>
                   <a:srgbClr val="0F1B2E"/>
                 </a:solidFill>
@@ -5155,46 +6454,225 @@
                 <a:ea typeface="Helvetica Neue" pitchFamily="34" charset="-122"/>
                 <a:cs typeface="Helvetica Neue" pitchFamily="34" charset="-120"/>
               </a:rPr>
-              <a:t>Search components</a:t>
-            </a:r>
-            <a:endParaRPr lang="en-US" sz="1200" dirty="0"/>
-          </a:p>
-        </p:txBody>
-      </p:sp>
-      <p:sp>
-        <p:nvSpPr>
-          <p:cNvPr id="9" name="Shape 7"/>
-          <p:cNvSpPr/>
-          <p:nvPr/>
-        </p:nvSpPr>
-        <p:spPr>
-          <a:xfrm>
-            <a:off x="3718408" y="3817620"/>
-            <a:ext cx="146304" cy="146304"/>
-          </a:xfrm>
-          <a:prstGeom prst="rtTriangle">
-            <a:avLst/>
+              <a:t>Intent</a:t>
+            </a:r>
+            <a:endParaRPr lang="en-US" sz="1450" dirty="0"/>
+          </a:p>
+        </p:txBody>
+      </p:sp>
+      <p:sp>
+        <p:nvSpPr>
+          <p:cNvPr id="9" name="Text 7"/>
+          <p:cNvSpPr/>
+          <p:nvPr/>
+        </p:nvSpPr>
+        <p:spPr>
+          <a:xfrm>
+            <a:off x="566928" y="4480560"/>
+            <a:ext cx="1554480" cy="320040"/>
+          </a:xfrm>
+          <a:prstGeom prst="rect">
+            <a:avLst/>
+          </a:prstGeom>
+          <a:noFill/>
+          <a:ln/>
+        </p:spPr>
+        <p:txBody>
+          <a:bodyPr wrap="square" lIns="0" tIns="0" rIns="0" bIns="0" rtlCol="0" anchor="ctr"/>
+          <a:lstStyle/>
+          <a:p>
+            <a:pPr algn="ctr" indent="0" marL="0">
+              <a:buNone/>
+            </a:pPr>
+            <a:r>
+              <a:rPr lang="en-US" sz="1000" dirty="0">
+                <a:solidFill>
+                  <a:srgbClr val="6B7C93"/>
+                </a:solidFill>
+                <a:latin typeface="Helvetica Neue" pitchFamily="34" charset="0"/>
+                <a:ea typeface="Helvetica Neue" pitchFamily="34" charset="-122"/>
+                <a:cs typeface="Helvetica Neue" pitchFamily="34" charset="-120"/>
+              </a:rPr>
+              <a:t>say what to build</a:t>
+            </a:r>
+            <a:endParaRPr lang="en-US" sz="1000" dirty="0"/>
+          </a:p>
+        </p:txBody>
+      </p:sp>
+      <p:sp>
+        <p:nvSpPr>
+          <p:cNvPr id="10" name="Shape 8"/>
+          <p:cNvSpPr/>
+          <p:nvPr/>
+        </p:nvSpPr>
+        <p:spPr>
+          <a:xfrm>
+            <a:off x="2176272" y="4389120"/>
+            <a:ext cx="301752" cy="0"/>
+          </a:xfrm>
+          <a:prstGeom prst="line">
+            <a:avLst/>
+          </a:prstGeom>
+          <a:noFill/>
+          <a:ln w="25400">
+            <a:solidFill>
+              <a:srgbClr val="15B3A4"/>
+            </a:solidFill>
+            <a:prstDash val="solid"/>
+            <a:tailEnd type="triangle"/>
+          </a:ln>
+        </p:spPr>
+      </p:sp>
+      <p:sp>
+        <p:nvSpPr>
+          <p:cNvPr id="11" name="Shape 9"/>
+          <p:cNvSpPr/>
+          <p:nvPr/>
+        </p:nvSpPr>
+        <p:spPr>
+          <a:xfrm>
+            <a:off x="2532888" y="3931920"/>
+            <a:ext cx="1554480" cy="914400"/>
+          </a:xfrm>
+          <a:prstGeom prst="roundRect">
+            <a:avLst>
+              <a:gd name="adj" fmla="val 8000"/>
+            </a:avLst>
           </a:prstGeom>
           <a:solidFill>
             <a:srgbClr val="15B3A4"/>
           </a:solidFill>
-          <a:ln/>
-        </p:spPr>
-      </p:sp>
-      <p:sp>
-        <p:nvSpPr>
-          <p:cNvPr id="10" name="Shape 8"/>
-          <p:cNvSpPr/>
-          <p:nvPr/>
-        </p:nvSpPr>
-        <p:spPr>
-          <a:xfrm>
-            <a:off x="4015588" y="3456432"/>
-            <a:ext cx="1828800" cy="868680"/>
+          <a:ln w="12700">
+            <a:solidFill>
+              <a:srgbClr val="E4EAF1"/>
+            </a:solidFill>
+            <a:prstDash val="solid"/>
+          </a:ln>
+          <a:effectLst>
+            <a:outerShdw sx="100000" sy="100000" kx="0" ky="0" algn="bl" rotWithShape="0" blurRad="88900" dist="38100" dir="8100000">
+              <a:srgbClr val="0A1526">
+                <a:alpha val="10000"/>
+              </a:srgbClr>
+            </a:outerShdw>
+          </a:effectLst>
+        </p:spPr>
+      </p:sp>
+      <p:sp>
+        <p:nvSpPr>
+          <p:cNvPr id="12" name="Text 10"/>
+          <p:cNvSpPr/>
+          <p:nvPr/>
+        </p:nvSpPr>
+        <p:spPr>
+          <a:xfrm>
+            <a:off x="2532888" y="4133088"/>
+            <a:ext cx="1554480" cy="365760"/>
+          </a:xfrm>
+          <a:prstGeom prst="rect">
+            <a:avLst/>
+          </a:prstGeom>
+          <a:noFill/>
+          <a:ln/>
+        </p:spPr>
+        <p:txBody>
+          <a:bodyPr wrap="square" lIns="0" tIns="0" rIns="0" bIns="0" rtlCol="0" anchor="ctr"/>
+          <a:lstStyle/>
+          <a:p>
+            <a:pPr algn="ctr" indent="0" marL="0">
+              <a:buNone/>
+            </a:pPr>
+            <a:r>
+              <a:rPr lang="en-US" sz="1450" b="1" dirty="0">
+                <a:solidFill>
+                  <a:srgbClr val="FFFFFF"/>
+                </a:solidFill>
+                <a:latin typeface="Helvetica Neue" pitchFamily="34" charset="0"/>
+                <a:ea typeface="Helvetica Neue" pitchFamily="34" charset="-122"/>
+                <a:cs typeface="Helvetica Neue" pitchFamily="34" charset="-120"/>
+              </a:rPr>
+              <a:t>DAG</a:t>
+            </a:r>
+            <a:endParaRPr lang="en-US" sz="1450" dirty="0"/>
+          </a:p>
+        </p:txBody>
+      </p:sp>
+      <p:sp>
+        <p:nvSpPr>
+          <p:cNvPr id="13" name="Text 11"/>
+          <p:cNvSpPr/>
+          <p:nvPr/>
+        </p:nvSpPr>
+        <p:spPr>
+          <a:xfrm>
+            <a:off x="2532888" y="4480560"/>
+            <a:ext cx="1554480" cy="320040"/>
+          </a:xfrm>
+          <a:prstGeom prst="rect">
+            <a:avLst/>
+          </a:prstGeom>
+          <a:noFill/>
+          <a:ln/>
+        </p:spPr>
+        <p:txBody>
+          <a:bodyPr wrap="square" lIns="0" tIns="0" rIns="0" bIns="0" rtlCol="0" anchor="ctr"/>
+          <a:lstStyle/>
+          <a:p>
+            <a:pPr algn="ctr" indent="0" marL="0">
+              <a:buNone/>
+            </a:pPr>
+            <a:r>
+              <a:rPr lang="en-US" sz="1000" dirty="0">
+                <a:solidFill>
+                  <a:srgbClr val="DCF5F0"/>
+                </a:solidFill>
+                <a:latin typeface="Helvetica Neue" pitchFamily="34" charset="0"/>
+                <a:ea typeface="Helvetica Neue" pitchFamily="34" charset="-122"/>
+                <a:cs typeface="Helvetica Neue" pitchFamily="34" charset="-120"/>
+              </a:rPr>
+              <a:t>watch the process</a:t>
+            </a:r>
+            <a:endParaRPr lang="en-US" sz="1000" dirty="0"/>
+          </a:p>
+        </p:txBody>
+      </p:sp>
+      <p:sp>
+        <p:nvSpPr>
+          <p:cNvPr id="14" name="Shape 12"/>
+          <p:cNvSpPr/>
+          <p:nvPr/>
+        </p:nvSpPr>
+        <p:spPr>
+          <a:xfrm>
+            <a:off x="4142232" y="4389120"/>
+            <a:ext cx="301752" cy="0"/>
+          </a:xfrm>
+          <a:prstGeom prst="line">
+            <a:avLst/>
+          </a:prstGeom>
+          <a:noFill/>
+          <a:ln w="25400">
+            <a:solidFill>
+              <a:srgbClr val="15B3A4"/>
+            </a:solidFill>
+            <a:prstDash val="solid"/>
+            <a:tailEnd type="triangle"/>
+          </a:ln>
+        </p:spPr>
+      </p:sp>
+      <p:sp>
+        <p:nvSpPr>
+          <p:cNvPr id="15" name="Shape 13"/>
+          <p:cNvSpPr/>
+          <p:nvPr/>
+        </p:nvSpPr>
+        <p:spPr>
+          <a:xfrm>
+            <a:off x="4498848" y="3931920"/>
+            <a:ext cx="1554480" cy="914400"/>
           </a:xfrm>
           <a:prstGeom prst="roundRect">
             <a:avLst>
-              <a:gd name="adj" fmla="val 8421"/>
+              <a:gd name="adj" fmla="val 8000"/>
             </a:avLst>
           </a:prstGeom>
           <a:solidFill>
@@ -5217,14 +6695,14 @@
       </p:sp>
       <p:sp>
         <p:nvSpPr>
-          <p:cNvPr id="11" name="Text 9"/>
-          <p:cNvSpPr/>
-          <p:nvPr/>
-        </p:nvSpPr>
-        <p:spPr>
-          <a:xfrm>
-            <a:off x="4015588" y="3456432"/>
-            <a:ext cx="1828800" cy="868680"/>
+          <p:cNvPr id="16" name="Text 14"/>
+          <p:cNvSpPr/>
+          <p:nvPr/>
+        </p:nvSpPr>
+        <p:spPr>
+          <a:xfrm>
+            <a:off x="4498848" y="4133088"/>
+            <a:ext cx="1554480" cy="365760"/>
           </a:xfrm>
           <a:prstGeom prst="rect">
             <a:avLst/>
@@ -5240,7 +6718,7 @@
               <a:buNone/>
             </a:pPr>
             <a:r>
-              <a:rPr lang="en-US" sz="1200" b="1" dirty="0">
+              <a:rPr lang="en-US" sz="1450" b="1" dirty="0">
                 <a:solidFill>
                   <a:srgbClr val="0F1B2E"/>
                 </a:solidFill>
@@ -5248,76 +6726,22 @@
                 <a:ea typeface="Helvetica Neue" pitchFamily="34" charset="-122"/>
                 <a:cs typeface="Helvetica Neue" pitchFamily="34" charset="-120"/>
               </a:rPr>
-              <a:t>AI confirms</a:t>
-            </a:r>
-            <a:endParaRPr lang="en-US" sz="1200" dirty="0"/>
-          </a:p>
-        </p:txBody>
-      </p:sp>
-      <p:sp>
-        <p:nvSpPr>
-          <p:cNvPr id="12" name="Shape 10"/>
-          <p:cNvSpPr/>
-          <p:nvPr/>
-        </p:nvSpPr>
-        <p:spPr>
-          <a:xfrm>
-            <a:off x="6050128" y="3817620"/>
-            <a:ext cx="146304" cy="146304"/>
-          </a:xfrm>
-          <a:prstGeom prst="rtTriangle">
-            <a:avLst/>
-          </a:prstGeom>
-          <a:solidFill>
-            <a:srgbClr val="15B3A4"/>
-          </a:solidFill>
-          <a:ln/>
-        </p:spPr>
-      </p:sp>
-      <p:sp>
-        <p:nvSpPr>
-          <p:cNvPr id="13" name="Shape 11"/>
-          <p:cNvSpPr/>
-          <p:nvPr/>
-        </p:nvSpPr>
-        <p:spPr>
-          <a:xfrm>
-            <a:off x="6347308" y="3456432"/>
-            <a:ext cx="1828800" cy="868680"/>
-          </a:xfrm>
-          <a:prstGeom prst="roundRect">
-            <a:avLst>
-              <a:gd name="adj" fmla="val 8421"/>
-            </a:avLst>
-          </a:prstGeom>
-          <a:solidFill>
-            <a:srgbClr val="15B3A4"/>
-          </a:solidFill>
-          <a:ln w="12700">
-            <a:solidFill>
-              <a:srgbClr val="E4EAF1"/>
-            </a:solidFill>
-            <a:prstDash val="solid"/>
-          </a:ln>
-          <a:effectLst>
-            <a:outerShdw sx="100000" sy="100000" kx="0" ky="0" algn="bl" rotWithShape="0" blurRad="88900" dist="38100" dir="8100000">
-              <a:srgbClr val="0A1526">
-                <a:alpha val="10000"/>
-              </a:srgbClr>
-            </a:outerShdw>
-          </a:effectLst>
-        </p:spPr>
-      </p:sp>
-      <p:sp>
-        <p:nvSpPr>
-          <p:cNvPr id="14" name="Text 12"/>
-          <p:cNvSpPr/>
-          <p:nvPr/>
-        </p:nvSpPr>
-        <p:spPr>
-          <a:xfrm>
-            <a:off x="6347308" y="3456432"/>
-            <a:ext cx="1828800" cy="868680"/>
+              <a:t>Visual edit</a:t>
+            </a:r>
+            <a:endParaRPr lang="en-US" sz="1450" dirty="0"/>
+          </a:p>
+        </p:txBody>
+      </p:sp>
+      <p:sp>
+        <p:nvSpPr>
+          <p:cNvPr id="17" name="Text 15"/>
+          <p:cNvSpPr/>
+          <p:nvPr/>
+        </p:nvSpPr>
+        <p:spPr>
+          <a:xfrm>
+            <a:off x="4498848" y="4480560"/>
+            <a:ext cx="1554480" cy="320040"/>
           </a:xfrm>
           <a:prstGeom prst="rect">
             <a:avLst/>
@@ -5333,55 +6757,33 @@
               <a:buNone/>
             </a:pPr>
             <a:r>
-              <a:rPr lang="en-US" sz="1200" b="1" dirty="0">
-                <a:solidFill>
-                  <a:srgbClr val="FFFFFF"/>
-                </a:solidFill>
-                <a:latin typeface="Helvetica Neue" pitchFamily="34" charset="0"/>
-                <a:ea typeface="Helvetica Neue" pitchFamily="34" charset="-122"/>
-                <a:cs typeface="Helvetica Neue" pitchFamily="34" charset="-120"/>
-              </a:rPr>
-              <a:t>Auto-assemble</a:t>
-            </a:r>
-            <a:endParaRPr lang="en-US" sz="1200" dirty="0"/>
-          </a:p>
-        </p:txBody>
-      </p:sp>
-      <p:sp>
-        <p:nvSpPr>
-          <p:cNvPr id="15" name="Shape 13"/>
-          <p:cNvSpPr/>
-          <p:nvPr/>
-        </p:nvSpPr>
-        <p:spPr>
-          <a:xfrm>
-            <a:off x="8381848" y="3817620"/>
-            <a:ext cx="146304" cy="146304"/>
-          </a:xfrm>
-          <a:prstGeom prst="rtTriangle">
-            <a:avLst/>
-          </a:prstGeom>
-          <a:solidFill>
-            <a:srgbClr val="15B3A4"/>
-          </a:solidFill>
-          <a:ln/>
-        </p:spPr>
-      </p:sp>
-      <p:sp>
-        <p:nvSpPr>
-          <p:cNvPr id="16" name="Shape 14"/>
-          <p:cNvSpPr/>
-          <p:nvPr/>
-        </p:nvSpPr>
-        <p:spPr>
-          <a:xfrm>
-            <a:off x="8679028" y="3456432"/>
-            <a:ext cx="1828800" cy="868680"/>
-          </a:xfrm>
-          <a:prstGeom prst="roundRect">
-            <a:avLst>
-              <a:gd name="adj" fmla="val 8421"/>
-            </a:avLst>
+              <a:rPr lang="en-US" sz="1000" dirty="0">
+                <a:solidFill>
+                  <a:srgbClr val="6B7C93"/>
+                </a:solidFill>
+                <a:latin typeface="Helvetica Neue" pitchFamily="34" charset="0"/>
+                <a:ea typeface="Helvetica Neue" pitchFamily="34" charset="-122"/>
+                <a:cs typeface="Helvetica Neue" pitchFamily="34" charset="-120"/>
+              </a:rPr>
+              <a:t>refine the structure</a:t>
+            </a:r>
+            <a:endParaRPr lang="en-US" sz="1000" dirty="0"/>
+          </a:p>
+        </p:txBody>
+      </p:sp>
+      <p:sp>
+        <p:nvSpPr>
+          <p:cNvPr id="18" name="Shape 16"/>
+          <p:cNvSpPr/>
+          <p:nvPr/>
+        </p:nvSpPr>
+        <p:spPr>
+          <a:xfrm>
+            <a:off x="6542532" y="1513332"/>
+            <a:ext cx="5202936" cy="3595293"/>
+          </a:xfrm>
+          <a:prstGeom prst="rect">
+            <a:avLst/>
           </a:prstGeom>
           <a:solidFill>
             <a:srgbClr val="FFFFFF"/>
@@ -5393,163 +6795,80 @@
             <a:prstDash val="solid"/>
           </a:ln>
           <a:effectLst>
-            <a:outerShdw sx="100000" sy="100000" kx="0" ky="0" algn="bl" rotWithShape="0" blurRad="88900" dist="38100" dir="8100000">
+            <a:outerShdw sx="100000" sy="100000" kx="0" ky="0" algn="bl" rotWithShape="0" blurRad="114300" dist="50800" dir="8100000">
               <a:srgbClr val="0A1526">
-                <a:alpha val="10000"/>
+                <a:alpha val="18000"/>
               </a:srgbClr>
             </a:outerShdw>
           </a:effectLst>
         </p:spPr>
       </p:sp>
-      <p:sp>
-        <p:nvSpPr>
-          <p:cNvPr id="17" name="Text 15"/>
-          <p:cNvSpPr/>
-          <p:nvPr/>
-        </p:nvSpPr>
-        <p:spPr>
-          <a:xfrm>
-            <a:off x="8679028" y="3456432"/>
-            <a:ext cx="1828800" cy="868680"/>
-          </a:xfrm>
-          <a:prstGeom prst="rect">
-            <a:avLst/>
-          </a:prstGeom>
-          <a:noFill/>
-          <a:ln/>
-        </p:spPr>
-        <p:txBody>
-          <a:bodyPr wrap="square" lIns="0" tIns="0" rIns="0" bIns="0" rtlCol="0" anchor="ctr"/>
-          <a:lstStyle/>
-          <a:p>
-            <a:pPr algn="ctr" indent="0" marL="0">
-              <a:buNone/>
-            </a:pPr>
-            <a:r>
-              <a:rPr lang="en-US" sz="1200" b="1" dirty="0">
-                <a:solidFill>
-                  <a:srgbClr val="0F1B2E"/>
-                </a:solidFill>
-                <a:latin typeface="Helvetica Neue" pitchFamily="34" charset="0"/>
-                <a:ea typeface="Helvetica Neue" pitchFamily="34" charset="-122"/>
-                <a:cs typeface="Helvetica Neue" pitchFamily="34" charset="-120"/>
-              </a:rPr>
-              <a:t>Compile</a:t>
-            </a:r>
-            <a:endParaRPr lang="en-US" sz="1200" dirty="0"/>
-          </a:p>
-        </p:txBody>
-      </p:sp>
-      <p:sp>
-        <p:nvSpPr>
-          <p:cNvPr id="18" name="Shape 16"/>
-          <p:cNvSpPr/>
-          <p:nvPr/>
-        </p:nvSpPr>
-        <p:spPr>
-          <a:xfrm>
-            <a:off x="3901288" y="4434840"/>
-            <a:ext cx="4389120" cy="822960"/>
-          </a:xfrm>
-          <a:prstGeom prst="roundRect">
-            <a:avLst>
-              <a:gd name="adj" fmla="val 10000"/>
-            </a:avLst>
-          </a:prstGeom>
-          <a:solidFill>
-            <a:srgbClr val="0A1526"/>
-          </a:solidFill>
-          <a:ln/>
-          <a:effectLst>
-            <a:outerShdw sx="100000" sy="100000" kx="0" ky="0" algn="bl" rotWithShape="0" blurRad="88900" dist="38100" dir="8100000">
-              <a:srgbClr val="0A1526">
-                <a:alpha val="10000"/>
-              </a:srgbClr>
-            </a:outerShdw>
-          </a:effectLst>
-        </p:spPr>
-      </p:sp>
-      <p:sp>
-        <p:nvSpPr>
-          <p:cNvPr id="19" name="Text 17"/>
-          <p:cNvSpPr/>
-          <p:nvPr/>
-        </p:nvSpPr>
-        <p:spPr>
-          <a:xfrm>
-            <a:off x="3901288" y="4498848"/>
-            <a:ext cx="4389120" cy="457200"/>
-          </a:xfrm>
-          <a:prstGeom prst="rect">
-            <a:avLst/>
-          </a:prstGeom>
-          <a:noFill/>
-          <a:ln/>
-        </p:spPr>
-        <p:txBody>
-          <a:bodyPr wrap="square" lIns="0" tIns="0" rIns="0" bIns="0" rtlCol="0" anchor="ctr"/>
-          <a:lstStyle/>
-          <a:p>
-            <a:pPr algn="ctr" indent="0" marL="0">
-              <a:buNone/>
-            </a:pPr>
-            <a:r>
-              <a:rPr lang="en-US" sz="2600" b="1" dirty="0">
-                <a:solidFill>
-                  <a:srgbClr val="7FE7DA"/>
-                </a:solidFill>
-                <a:latin typeface="Helvetica Neue" pitchFamily="34" charset="0"/>
-                <a:ea typeface="Helvetica Neue" pitchFamily="34" charset="-122"/>
-                <a:cs typeface="Helvetica Neue" pitchFamily="34" charset="-120"/>
-              </a:rPr>
-              <a:t>÷10</a:t>
-            </a:r>
-            <a:endParaRPr lang="en-US" sz="2600" dirty="0"/>
-          </a:p>
-        </p:txBody>
-      </p:sp>
-      <p:sp>
-        <p:nvSpPr>
-          <p:cNvPr id="20" name="Text 18"/>
-          <p:cNvSpPr/>
-          <p:nvPr/>
-        </p:nvSpPr>
-        <p:spPr>
-          <a:xfrm>
-            <a:off x="3901288" y="4956048"/>
-            <a:ext cx="4389120" cy="292608"/>
-          </a:xfrm>
-          <a:prstGeom prst="rect">
-            <a:avLst/>
-          </a:prstGeom>
-          <a:noFill/>
-          <a:ln/>
-        </p:spPr>
-        <p:txBody>
-          <a:bodyPr wrap="square" lIns="0" tIns="0" rIns="0" bIns="0" rtlCol="0" anchor="ctr"/>
-          <a:lstStyle/>
-          <a:p>
-            <a:pPr algn="ctr" indent="0" marL="0">
-              <a:buNone/>
-            </a:pPr>
-            <a:r>
-              <a:rPr lang="en-US" sz="1150" dirty="0">
-                <a:solidFill>
-                  <a:srgbClr val="9FB0C8"/>
-                </a:solidFill>
-                <a:latin typeface="Helvetica Neue" pitchFamily="34" charset="0"/>
-                <a:ea typeface="Helvetica Neue" pitchFamily="34" charset="-122"/>
-                <a:cs typeface="Helvetica Neue" pitchFamily="34" charset="-120"/>
-              </a:rPr>
-              <a:t>tokens vs. regenerating from scratch</a:t>
-            </a:r>
-            <a:endParaRPr lang="en-US" sz="1150" dirty="0"/>
-          </a:p>
-        </p:txBody>
-      </p:sp>
-      <p:sp>
-        <p:nvSpPr>
-          <p:cNvPr id="21" name="Shape 19"/>
+      <p:pic>
+        <p:nvPicPr>
+          <p:cNvPr id="19" name="Image 0" descr="/Users/ivx/Documents/VLC-Marketing/brief/assets/vlc-visual-panel-2026-04-03.png">    </p:cNvPr>
+          <p:cNvPicPr>
+            <a:picLocks noChangeAspect="1"/>
+          </p:cNvPicPr>
+          <p:nvPr/>
+        </p:nvPicPr>
+        <p:blipFill>
+          <a:blip r:embed="rId1"/>
+          <a:stretch>
+            <a:fillRect/>
+          </a:stretch>
+        </p:blipFill>
+        <p:spPr>
+          <a:xfrm>
+            <a:off x="6583680" y="1554480"/>
+            <a:ext cx="5120640" cy="3512997"/>
+          </a:xfrm>
+          <a:prstGeom prst="rect">
+            <a:avLst/>
+          </a:prstGeom>
+        </p:spPr>
+      </p:pic>
+      <p:sp>
+        <p:nvSpPr>
+          <p:cNvPr id="20" name="Text 17"/>
+          <p:cNvSpPr/>
+          <p:nvPr/>
+        </p:nvSpPr>
+        <p:spPr>
+          <a:xfrm>
+            <a:off x="6583680" y="5131485"/>
+            <a:ext cx="5120640" cy="274320"/>
+          </a:xfrm>
+          <a:prstGeom prst="rect">
+            <a:avLst/>
+          </a:prstGeom>
+          <a:noFill/>
+          <a:ln/>
+        </p:spPr>
+        <p:txBody>
+          <a:bodyPr wrap="square" lIns="0" tIns="0" rIns="0" bIns="0" rtlCol="0" anchor="ctr"/>
+          <a:lstStyle/>
+          <a:p>
+            <a:pPr algn="l" indent="0" marL="0">
+              <a:buNone/>
+            </a:pPr>
+            <a:r>
+              <a:rPr lang="en-US" sz="900" i="1" dirty="0">
+                <a:solidFill>
+                  <a:srgbClr val="6B7C93"/>
+                </a:solidFill>
+                <a:latin typeface="Helvetica Neue" pitchFamily="34" charset="0"/>
+                <a:ea typeface="Helvetica Neue" pitchFamily="34" charset="-122"/>
+                <a:cs typeface="Helvetica Neue" pitchFamily="34" charset="-120"/>
+              </a:rPr>
+              <a:t>Visual Panel — inspect and adjust the app as structure.</a:t>
+            </a:r>
+            <a:endParaRPr lang="en-US" sz="900" dirty="0"/>
+          </a:p>
+        </p:txBody>
+      </p:sp>
+      <p:sp>
+        <p:nvSpPr>
+          <p:cNvPr id="21" name="Shape 18"/>
           <p:cNvSpPr/>
           <p:nvPr/>
         </p:nvSpPr>
@@ -5583,7 +6902,7 @@
       </p:sp>
       <p:sp>
         <p:nvSpPr>
-          <p:cNvPr id="22" name="Text 20"/>
+          <p:cNvPr id="22" name="Text 19"/>
           <p:cNvSpPr/>
           <p:nvPr/>
         </p:nvSpPr>
@@ -5614,7 +6933,7 @@
                 <a:ea typeface="Helvetica Neue" pitchFamily="34" charset="-122"/>
                 <a:cs typeface="Helvetica Neue" pitchFamily="34" charset="-120"/>
               </a:rPr>
-              <a:t>Intelligence is banked in components, in the cloud — loaded on demand, not re-billed.</a:t>
+              <a:t>For the first time, the door to programming opens to everyone.</a:t>
             </a:r>
             <a:endParaRPr lang="en-US" sz="1400" dirty="0"/>
           </a:p>
@@ -5622,7 +6941,7 @@
       </p:sp>
       <p:sp>
         <p:nvSpPr>
-          <p:cNvPr id="23" name="Shape 21"/>
+          <p:cNvPr id="23" name="Shape 20"/>
           <p:cNvSpPr/>
           <p:nvPr/>
         </p:nvSpPr>
@@ -5645,7 +6964,7 @@
       </p:sp>
       <p:sp>
         <p:nvSpPr>
-          <p:cNvPr id="24" name="Text 22"/>
+          <p:cNvPr id="24" name="Text 21"/>
           <p:cNvSpPr/>
           <p:nvPr/>
         </p:nvSpPr>
@@ -5698,7 +7017,7 @@
       </p:sp>
       <p:sp>
         <p:nvSpPr>
-          <p:cNvPr id="25" name="Text 23"/>
+          <p:cNvPr id="25" name="Text 22"/>
           <p:cNvSpPr/>
           <p:nvPr/>
         </p:nvSpPr>
@@ -5822,7 +7141,7 @@
                 <a:ea typeface="Helvetica Neue" pitchFamily="34" charset="-122"/>
                 <a:cs typeface="Helvetica Neue" pitchFamily="34" charset="-120"/>
               </a:rPr>
-              <a:t>12</a:t>
+              <a:t>11</a:t>
             </a:r>
             <a:endParaRPr lang="en-US" sz="1300" dirty="0"/>
           </a:p>
@@ -5861,7 +7180,7 @@
                 <a:ea typeface="Helvetica Neue" pitchFamily="34" charset="-122"/>
                 <a:cs typeface="Helvetica Neue" pitchFamily="34" charset="-120"/>
               </a:rPr>
-              <a:t>PART III · OPEN</a:t>
+              <a:t>PART II · THE IDE</a:t>
             </a:r>
             <a:endParaRPr lang="en-US" sz="1150" dirty="0"/>
           </a:p>
@@ -5876,7 +7195,7 @@
         <p:spPr>
           <a:xfrm>
             <a:off x="566928" y="1078992"/>
-            <a:ext cx="10515600" cy="1188720"/>
+            <a:ext cx="7680960" cy="1188720"/>
           </a:xfrm>
           <a:prstGeom prst="rect">
             <a:avLst/>
@@ -5903,7 +7222,7 @@
                 <a:ea typeface="Helvetica Neue" pitchFamily="34" charset="-122"/>
                 <a:cs typeface="Helvetica Neue" pitchFamily="34" charset="-120"/>
               </a:rPr>
-              <a:t>Nothing is a black box —</a:t>
+              <a:t>Search-and-assemble nodes:</a:t>
             </a:r>
             <a:endParaRPr lang="en-US" sz="3200" dirty="0"/>
           </a:p>
@@ -5923,7 +7242,7 @@
                 <a:ea typeface="Helvetica Neue" pitchFamily="34" charset="-122"/>
                 <a:cs typeface="Helvetica Neue" pitchFamily="34" charset="-120"/>
               </a:rPr>
-              <a:t>bring your own.</a:t>
+              <a:t>store the compute, don't burn it.</a:t>
             </a:r>
             <a:endParaRPr lang="en-US" sz="3200" dirty="0"/>
           </a:p>
@@ -5938,7 +7257,7 @@
         <p:spPr>
           <a:xfrm>
             <a:off x="566928" y="2377440"/>
-            <a:ext cx="10058400" cy="548640"/>
+            <a:ext cx="7498080" cy="914400"/>
           </a:xfrm>
           <a:prstGeom prst="rect">
             <a:avLst/>
@@ -5965,7 +7284,7 @@
                 <a:ea typeface="Helvetica Neue" pitchFamily="34" charset="-122"/>
                 <a:cs typeface="Helvetica Neue" pitchFamily="34" charset="-120"/>
               </a:rPr>
-              <a:t>Every resource layer is open for you to extend. Upload it, version it, reuse it across projects.</a:t>
+              <a:t>Drop a 'search components' node into the DAG. Every match is fetched, the AI confirms, and they snap together automatically.</a:t>
             </a:r>
             <a:endParaRPr lang="en-US" sz="1350" dirty="0"/>
           </a:p>
@@ -5979,12 +7298,12 @@
         </p:nvSpPr>
         <p:spPr>
           <a:xfrm>
-            <a:off x="566928" y="3246120"/>
-            <a:ext cx="1992112" cy="1691640"/>
+            <a:off x="1683868" y="3456432"/>
+            <a:ext cx="1828800" cy="868680"/>
           </a:xfrm>
           <a:prstGeom prst="roundRect">
             <a:avLst>
-              <a:gd name="adj" fmla="val 4865"/>
+              <a:gd name="adj" fmla="val 8421"/>
             </a:avLst>
           </a:prstGeom>
           <a:solidFill>
@@ -6007,160 +7326,77 @@
       </p:sp>
       <p:sp>
         <p:nvSpPr>
-          <p:cNvPr id="8" name="Shape 6"/>
-          <p:cNvSpPr/>
-          <p:nvPr/>
-        </p:nvSpPr>
-        <p:spPr>
-          <a:xfrm>
-            <a:off x="1261232" y="3538728"/>
-            <a:ext cx="603504" cy="603504"/>
-          </a:xfrm>
-          <a:prstGeom prst="ellipse">
+          <p:cNvPr id="8" name="Text 6"/>
+          <p:cNvSpPr/>
+          <p:nvPr/>
+        </p:nvSpPr>
+        <p:spPr>
+          <a:xfrm>
+            <a:off x="1683868" y="3456432"/>
+            <a:ext cx="1828800" cy="868680"/>
+          </a:xfrm>
+          <a:prstGeom prst="rect">
+            <a:avLst/>
+          </a:prstGeom>
+          <a:noFill/>
+          <a:ln/>
+        </p:spPr>
+        <p:txBody>
+          <a:bodyPr wrap="square" lIns="0" tIns="0" rIns="0" bIns="0" rtlCol="0" anchor="ctr"/>
+          <a:lstStyle/>
+          <a:p>
+            <a:pPr algn="ctr" indent="0" marL="0">
+              <a:buNone/>
+            </a:pPr>
+            <a:r>
+              <a:rPr lang="en-US" sz="1200" b="1" dirty="0">
+                <a:solidFill>
+                  <a:srgbClr val="0F1B2E"/>
+                </a:solidFill>
+                <a:latin typeface="Helvetica Neue" pitchFamily="34" charset="0"/>
+                <a:ea typeface="Helvetica Neue" pitchFamily="34" charset="-122"/>
+                <a:cs typeface="Helvetica Neue" pitchFamily="34" charset="-120"/>
+              </a:rPr>
+              <a:t>Search components</a:t>
+            </a:r>
+            <a:endParaRPr lang="en-US" sz="1200" dirty="0"/>
+          </a:p>
+        </p:txBody>
+      </p:sp>
+      <p:sp>
+        <p:nvSpPr>
+          <p:cNvPr id="9" name="Shape 7"/>
+          <p:cNvSpPr/>
+          <p:nvPr/>
+        </p:nvSpPr>
+        <p:spPr>
+          <a:xfrm>
+            <a:off x="3718408" y="3817620"/>
+            <a:ext cx="146304" cy="146304"/>
+          </a:xfrm>
+          <a:prstGeom prst="rtTriangle">
             <a:avLst/>
           </a:prstGeom>
           <a:solidFill>
-            <a:srgbClr val="EAF2F8"/>
+            <a:srgbClr val="15B3A4"/>
           </a:solidFill>
-          <a:ln w="19050">
-            <a:solidFill>
-              <a:srgbClr val="15B3A4"/>
-            </a:solidFill>
-            <a:prstDash val="solid"/>
-          </a:ln>
-        </p:spPr>
-      </p:sp>
-      <p:sp>
-        <p:nvSpPr>
-          <p:cNvPr id="9" name="Text 7"/>
-          <p:cNvSpPr/>
-          <p:nvPr/>
-        </p:nvSpPr>
-        <p:spPr>
-          <a:xfrm>
-            <a:off x="1261232" y="3538728"/>
-            <a:ext cx="603504" cy="603504"/>
-          </a:xfrm>
-          <a:prstGeom prst="rect">
-            <a:avLst/>
-          </a:prstGeom>
-          <a:noFill/>
-          <a:ln/>
-        </p:spPr>
-        <p:txBody>
-          <a:bodyPr wrap="square" lIns="0" tIns="0" rIns="0" bIns="0" rtlCol="0" anchor="ctr"/>
-          <a:lstStyle/>
-          <a:p>
-            <a:pPr algn="ctr" indent="0" marL="0">
-              <a:buNone/>
-            </a:pPr>
-            <a:r>
-              <a:rPr lang="en-US" sz="2200" b="1" dirty="0">
-                <a:solidFill>
-                  <a:srgbClr val="0E9F91"/>
-                </a:solidFill>
-                <a:latin typeface="Helvetica Neue" pitchFamily="34" charset="0"/>
-                <a:ea typeface="Helvetica Neue" pitchFamily="34" charset="-122"/>
-                <a:cs typeface="Helvetica Neue" pitchFamily="34" charset="-120"/>
-              </a:rPr>
-              <a:t>↑</a:t>
-            </a:r>
-            <a:endParaRPr lang="en-US" sz="2200" dirty="0"/>
-          </a:p>
-        </p:txBody>
-      </p:sp>
-      <p:sp>
-        <p:nvSpPr>
-          <p:cNvPr id="10" name="Text 8"/>
-          <p:cNvSpPr/>
-          <p:nvPr/>
-        </p:nvSpPr>
-        <p:spPr>
-          <a:xfrm>
-            <a:off x="658368" y="4270248"/>
-            <a:ext cx="1809232" cy="320040"/>
-          </a:xfrm>
-          <a:prstGeom prst="rect">
-            <a:avLst/>
-          </a:prstGeom>
-          <a:noFill/>
-          <a:ln/>
-        </p:spPr>
-        <p:txBody>
-          <a:bodyPr wrap="square" lIns="0" tIns="0" rIns="0" bIns="0" rtlCol="0" anchor="ctr"/>
-          <a:lstStyle/>
-          <a:p>
-            <a:pPr algn="ctr" indent="0" marL="0">
-              <a:buNone/>
-            </a:pPr>
-            <a:r>
-              <a:rPr lang="en-US" sz="1400" b="1" dirty="0">
-                <a:solidFill>
-                  <a:srgbClr val="0F1B2E"/>
-                </a:solidFill>
-                <a:latin typeface="Helvetica Neue" pitchFamily="34" charset="0"/>
-                <a:ea typeface="Helvetica Neue" pitchFamily="34" charset="-122"/>
-                <a:cs typeface="Helvetica Neue" pitchFamily="34" charset="-120"/>
-              </a:rPr>
-              <a:t>Workflows</a:t>
-            </a:r>
-            <a:endParaRPr lang="en-US" sz="1400" dirty="0"/>
-          </a:p>
-        </p:txBody>
-      </p:sp>
-      <p:sp>
-        <p:nvSpPr>
-          <p:cNvPr id="11" name="Text 9"/>
-          <p:cNvSpPr/>
-          <p:nvPr/>
-        </p:nvSpPr>
-        <p:spPr>
-          <a:xfrm>
-            <a:off x="658368" y="4581144"/>
-            <a:ext cx="1809232" cy="310896"/>
-          </a:xfrm>
-          <a:prstGeom prst="rect">
-            <a:avLst/>
-          </a:prstGeom>
-          <a:noFill/>
-          <a:ln/>
-        </p:spPr>
-        <p:txBody>
-          <a:bodyPr wrap="square" lIns="0" tIns="0" rIns="0" bIns="0" rtlCol="0" anchor="ctr"/>
-          <a:lstStyle/>
-          <a:p>
-            <a:pPr algn="ctr" indent="0" marL="0">
-              <a:buNone/>
-            </a:pPr>
-            <a:r>
-              <a:rPr lang="en-US" sz="1050" dirty="0">
-                <a:solidFill>
-                  <a:srgbClr val="6B7C93"/>
-                </a:solidFill>
-                <a:latin typeface="Helvetica Neue" pitchFamily="34" charset="0"/>
-                <a:ea typeface="Helvetica Neue" pitchFamily="34" charset="-122"/>
-                <a:cs typeface="Helvetica Neue" pitchFamily="34" charset="-120"/>
-              </a:rPr>
-              <a:t>your own DAGs</a:t>
-            </a:r>
-            <a:endParaRPr lang="en-US" sz="1050" dirty="0"/>
-          </a:p>
-        </p:txBody>
-      </p:sp>
-      <p:sp>
-        <p:nvSpPr>
-          <p:cNvPr id="12" name="Shape 10"/>
-          <p:cNvSpPr/>
-          <p:nvPr/>
-        </p:nvSpPr>
-        <p:spPr>
-          <a:xfrm>
-            <a:off x="2833360" y="3246120"/>
-            <a:ext cx="1992112" cy="1691640"/>
+          <a:ln/>
+        </p:spPr>
+      </p:sp>
+      <p:sp>
+        <p:nvSpPr>
+          <p:cNvPr id="10" name="Shape 8"/>
+          <p:cNvSpPr/>
+          <p:nvPr/>
+        </p:nvSpPr>
+        <p:spPr>
+          <a:xfrm>
+            <a:off x="4015588" y="3456432"/>
+            <a:ext cx="1828800" cy="868680"/>
           </a:xfrm>
           <a:prstGeom prst="roundRect">
             <a:avLst>
-              <a:gd name="adj" fmla="val 4865"/>
+              <a:gd name="adj" fmla="val 8421"/>
             </a:avLst>
           </a:prstGeom>
           <a:solidFill>
@@ -6183,27 +7419,95 @@
       </p:sp>
       <p:sp>
         <p:nvSpPr>
+          <p:cNvPr id="11" name="Text 9"/>
+          <p:cNvSpPr/>
+          <p:nvPr/>
+        </p:nvSpPr>
+        <p:spPr>
+          <a:xfrm>
+            <a:off x="4015588" y="3456432"/>
+            <a:ext cx="1828800" cy="868680"/>
+          </a:xfrm>
+          <a:prstGeom prst="rect">
+            <a:avLst/>
+          </a:prstGeom>
+          <a:noFill/>
+          <a:ln/>
+        </p:spPr>
+        <p:txBody>
+          <a:bodyPr wrap="square" lIns="0" tIns="0" rIns="0" bIns="0" rtlCol="0" anchor="ctr"/>
+          <a:lstStyle/>
+          <a:p>
+            <a:pPr algn="ctr" indent="0" marL="0">
+              <a:buNone/>
+            </a:pPr>
+            <a:r>
+              <a:rPr lang="en-US" sz="1200" b="1" dirty="0">
+                <a:solidFill>
+                  <a:srgbClr val="0F1B2E"/>
+                </a:solidFill>
+                <a:latin typeface="Helvetica Neue" pitchFamily="34" charset="0"/>
+                <a:ea typeface="Helvetica Neue" pitchFamily="34" charset="-122"/>
+                <a:cs typeface="Helvetica Neue" pitchFamily="34" charset="-120"/>
+              </a:rPr>
+              <a:t>AI confirms</a:t>
+            </a:r>
+            <a:endParaRPr lang="en-US" sz="1200" dirty="0"/>
+          </a:p>
+        </p:txBody>
+      </p:sp>
+      <p:sp>
+        <p:nvSpPr>
+          <p:cNvPr id="12" name="Shape 10"/>
+          <p:cNvSpPr/>
+          <p:nvPr/>
+        </p:nvSpPr>
+        <p:spPr>
+          <a:xfrm>
+            <a:off x="6050128" y="3817620"/>
+            <a:ext cx="146304" cy="146304"/>
+          </a:xfrm>
+          <a:prstGeom prst="rtTriangle">
+            <a:avLst/>
+          </a:prstGeom>
+          <a:solidFill>
+            <a:srgbClr val="15B3A4"/>
+          </a:solidFill>
+          <a:ln/>
+        </p:spPr>
+      </p:sp>
+      <p:sp>
+        <p:nvSpPr>
           <p:cNvPr id="13" name="Shape 11"/>
           <p:cNvSpPr/>
           <p:nvPr/>
         </p:nvSpPr>
         <p:spPr>
           <a:xfrm>
-            <a:off x="3527664" y="3538728"/>
-            <a:ext cx="603504" cy="603504"/>
-          </a:xfrm>
-          <a:prstGeom prst="ellipse">
-            <a:avLst/>
+            <a:off x="6347308" y="3456432"/>
+            <a:ext cx="1828800" cy="868680"/>
+          </a:xfrm>
+          <a:prstGeom prst="roundRect">
+            <a:avLst>
+              <a:gd name="adj" fmla="val 8421"/>
+            </a:avLst>
           </a:prstGeom>
           <a:solidFill>
-            <a:srgbClr val="EAF2F8"/>
+            <a:srgbClr val="15B3A4"/>
           </a:solidFill>
-          <a:ln w="19050">
+          <a:ln w="12700">
             <a:solidFill>
-              <a:srgbClr val="15B3A4"/>
+              <a:srgbClr val="E4EAF1"/>
             </a:solidFill>
             <a:prstDash val="solid"/>
           </a:ln>
+          <a:effectLst>
+            <a:outerShdw sx="100000" sy="100000" kx="0" ky="0" algn="bl" rotWithShape="0" blurRad="88900" dist="38100" dir="8100000">
+              <a:srgbClr val="0A1526">
+                <a:alpha val="10000"/>
+              </a:srgbClr>
+            </a:outerShdw>
+          </a:effectLst>
         </p:spPr>
       </p:sp>
       <p:sp>
@@ -6214,8 +7518,8 @@
         </p:nvSpPr>
         <p:spPr>
           <a:xfrm>
-            <a:off x="3527664" y="3538728"/>
-            <a:ext cx="603504" cy="603504"/>
+            <a:off x="6347308" y="3456432"/>
+            <a:ext cx="1828800" cy="868680"/>
           </a:xfrm>
           <a:prstGeom prst="rect">
             <a:avLst/>
@@ -6231,112 +7535,54 @@
               <a:buNone/>
             </a:pPr>
             <a:r>
-              <a:rPr lang="en-US" sz="2200" b="1" dirty="0">
-                <a:solidFill>
-                  <a:srgbClr val="0E9F91"/>
-                </a:solidFill>
-                <a:latin typeface="Helvetica Neue" pitchFamily="34" charset="0"/>
-                <a:ea typeface="Helvetica Neue" pitchFamily="34" charset="-122"/>
-                <a:cs typeface="Helvetica Neue" pitchFamily="34" charset="-120"/>
-              </a:rPr>
-              <a:t>↑</a:t>
-            </a:r>
-            <a:endParaRPr lang="en-US" sz="2200" dirty="0"/>
-          </a:p>
-        </p:txBody>
-      </p:sp>
-      <p:sp>
-        <p:nvSpPr>
-          <p:cNvPr id="15" name="Text 13"/>
-          <p:cNvSpPr/>
-          <p:nvPr/>
-        </p:nvSpPr>
-        <p:spPr>
-          <a:xfrm>
-            <a:off x="2924800" y="4270248"/>
-            <a:ext cx="1809232" cy="320040"/>
-          </a:xfrm>
-          <a:prstGeom prst="rect">
-            <a:avLst/>
-          </a:prstGeom>
-          <a:noFill/>
-          <a:ln/>
-        </p:spPr>
-        <p:txBody>
-          <a:bodyPr wrap="square" lIns="0" tIns="0" rIns="0" bIns="0" rtlCol="0" anchor="ctr"/>
-          <a:lstStyle/>
-          <a:p>
-            <a:pPr algn="ctr" indent="0" marL="0">
-              <a:buNone/>
-            </a:pPr>
-            <a:r>
-              <a:rPr lang="en-US" sz="1400" b="1" dirty="0">
-                <a:solidFill>
-                  <a:srgbClr val="0F1B2E"/>
-                </a:solidFill>
-                <a:latin typeface="Helvetica Neue" pitchFamily="34" charset="0"/>
-                <a:ea typeface="Helvetica Neue" pitchFamily="34" charset="-122"/>
-                <a:cs typeface="Helvetica Neue" pitchFamily="34" charset="-120"/>
-              </a:rPr>
-              <a:t>Docs</a:t>
-            </a:r>
-            <a:endParaRPr lang="en-US" sz="1400" dirty="0"/>
-          </a:p>
-        </p:txBody>
-      </p:sp>
-      <p:sp>
-        <p:nvSpPr>
-          <p:cNvPr id="16" name="Text 14"/>
-          <p:cNvSpPr/>
-          <p:nvPr/>
-        </p:nvSpPr>
-        <p:spPr>
-          <a:xfrm>
-            <a:off x="2924800" y="4581144"/>
-            <a:ext cx="1809232" cy="310896"/>
-          </a:xfrm>
-          <a:prstGeom prst="rect">
-            <a:avLst/>
-          </a:prstGeom>
-          <a:noFill/>
-          <a:ln/>
-        </p:spPr>
-        <p:txBody>
-          <a:bodyPr wrap="square" lIns="0" tIns="0" rIns="0" bIns="0" rtlCol="0" anchor="ctr"/>
-          <a:lstStyle/>
-          <a:p>
-            <a:pPr algn="ctr" indent="0" marL="0">
-              <a:buNone/>
-            </a:pPr>
-            <a:r>
-              <a:rPr lang="en-US" sz="1050" dirty="0">
-                <a:solidFill>
-                  <a:srgbClr val="6B7C93"/>
-                </a:solidFill>
-                <a:latin typeface="Helvetica Neue" pitchFamily="34" charset="0"/>
-                <a:ea typeface="Helvetica Neue" pitchFamily="34" charset="-122"/>
-                <a:cs typeface="Helvetica Neue" pitchFamily="34" charset="-120"/>
-              </a:rPr>
-              <a:t>specs &amp; context</a:t>
-            </a:r>
-            <a:endParaRPr lang="en-US" sz="1050" dirty="0"/>
-          </a:p>
-        </p:txBody>
-      </p:sp>
-      <p:sp>
-        <p:nvSpPr>
-          <p:cNvPr id="17" name="Shape 15"/>
-          <p:cNvSpPr/>
-          <p:nvPr/>
-        </p:nvSpPr>
-        <p:spPr>
-          <a:xfrm>
-            <a:off x="5099792" y="3246120"/>
-            <a:ext cx="1992112" cy="1691640"/>
+              <a:rPr lang="en-US" sz="1200" b="1" dirty="0">
+                <a:solidFill>
+                  <a:srgbClr val="FFFFFF"/>
+                </a:solidFill>
+                <a:latin typeface="Helvetica Neue" pitchFamily="34" charset="0"/>
+                <a:ea typeface="Helvetica Neue" pitchFamily="34" charset="-122"/>
+                <a:cs typeface="Helvetica Neue" pitchFamily="34" charset="-120"/>
+              </a:rPr>
+              <a:t>Auto-assemble</a:t>
+            </a:r>
+            <a:endParaRPr lang="en-US" sz="1200" dirty="0"/>
+          </a:p>
+        </p:txBody>
+      </p:sp>
+      <p:sp>
+        <p:nvSpPr>
+          <p:cNvPr id="15" name="Shape 13"/>
+          <p:cNvSpPr/>
+          <p:nvPr/>
+        </p:nvSpPr>
+        <p:spPr>
+          <a:xfrm>
+            <a:off x="8381848" y="3817620"/>
+            <a:ext cx="146304" cy="146304"/>
+          </a:xfrm>
+          <a:prstGeom prst="rtTriangle">
+            <a:avLst/>
+          </a:prstGeom>
+          <a:solidFill>
+            <a:srgbClr val="15B3A4"/>
+          </a:solidFill>
+          <a:ln/>
+        </p:spPr>
+      </p:sp>
+      <p:sp>
+        <p:nvSpPr>
+          <p:cNvPr id="16" name="Shape 14"/>
+          <p:cNvSpPr/>
+          <p:nvPr/>
+        </p:nvSpPr>
+        <p:spPr>
+          <a:xfrm>
+            <a:off x="8679028" y="3456432"/>
+            <a:ext cx="1828800" cy="868680"/>
           </a:xfrm>
           <a:prstGeom prst="roundRect">
             <a:avLst>
-              <a:gd name="adj" fmla="val 4865"/>
+              <a:gd name="adj" fmla="val 8421"/>
             </a:avLst>
           </a:prstGeom>
           <a:solidFill>
@@ -6359,171 +7605,63 @@
       </p:sp>
       <p:sp>
         <p:nvSpPr>
+          <p:cNvPr id="17" name="Text 15"/>
+          <p:cNvSpPr/>
+          <p:nvPr/>
+        </p:nvSpPr>
+        <p:spPr>
+          <a:xfrm>
+            <a:off x="8679028" y="3456432"/>
+            <a:ext cx="1828800" cy="868680"/>
+          </a:xfrm>
+          <a:prstGeom prst="rect">
+            <a:avLst/>
+          </a:prstGeom>
+          <a:noFill/>
+          <a:ln/>
+        </p:spPr>
+        <p:txBody>
+          <a:bodyPr wrap="square" lIns="0" tIns="0" rIns="0" bIns="0" rtlCol="0" anchor="ctr"/>
+          <a:lstStyle/>
+          <a:p>
+            <a:pPr algn="ctr" indent="0" marL="0">
+              <a:buNone/>
+            </a:pPr>
+            <a:r>
+              <a:rPr lang="en-US" sz="1200" b="1" dirty="0">
+                <a:solidFill>
+                  <a:srgbClr val="0F1B2E"/>
+                </a:solidFill>
+                <a:latin typeface="Helvetica Neue" pitchFamily="34" charset="0"/>
+                <a:ea typeface="Helvetica Neue" pitchFamily="34" charset="-122"/>
+                <a:cs typeface="Helvetica Neue" pitchFamily="34" charset="-120"/>
+              </a:rPr>
+              <a:t>Compile</a:t>
+            </a:r>
+            <a:endParaRPr lang="en-US" sz="1200" dirty="0"/>
+          </a:p>
+        </p:txBody>
+      </p:sp>
+      <p:sp>
+        <p:nvSpPr>
           <p:cNvPr id="18" name="Shape 16"/>
           <p:cNvSpPr/>
           <p:nvPr/>
         </p:nvSpPr>
         <p:spPr>
           <a:xfrm>
-            <a:off x="5794096" y="3538728"/>
-            <a:ext cx="603504" cy="603504"/>
-          </a:xfrm>
-          <a:prstGeom prst="ellipse">
-            <a:avLst/>
-          </a:prstGeom>
-          <a:solidFill>
-            <a:srgbClr val="EAF2F8"/>
-          </a:solidFill>
-          <a:ln w="19050">
-            <a:solidFill>
-              <a:srgbClr val="15B3A4"/>
-            </a:solidFill>
-            <a:prstDash val="solid"/>
-          </a:ln>
-        </p:spPr>
-      </p:sp>
-      <p:sp>
-        <p:nvSpPr>
-          <p:cNvPr id="19" name="Text 17"/>
-          <p:cNvSpPr/>
-          <p:nvPr/>
-        </p:nvSpPr>
-        <p:spPr>
-          <a:xfrm>
-            <a:off x="5794096" y="3538728"/>
-            <a:ext cx="603504" cy="603504"/>
-          </a:xfrm>
-          <a:prstGeom prst="rect">
-            <a:avLst/>
-          </a:prstGeom>
-          <a:noFill/>
-          <a:ln/>
-        </p:spPr>
-        <p:txBody>
-          <a:bodyPr wrap="square" lIns="0" tIns="0" rIns="0" bIns="0" rtlCol="0" anchor="ctr"/>
-          <a:lstStyle/>
-          <a:p>
-            <a:pPr algn="ctr" indent="0" marL="0">
-              <a:buNone/>
-            </a:pPr>
-            <a:r>
-              <a:rPr lang="en-US" sz="2200" b="1" dirty="0">
-                <a:solidFill>
-                  <a:srgbClr val="0E9F91"/>
-                </a:solidFill>
-                <a:latin typeface="Helvetica Neue" pitchFamily="34" charset="0"/>
-                <a:ea typeface="Helvetica Neue" pitchFamily="34" charset="-122"/>
-                <a:cs typeface="Helvetica Neue" pitchFamily="34" charset="-120"/>
-              </a:rPr>
-              <a:t>↑</a:t>
-            </a:r>
-            <a:endParaRPr lang="en-US" sz="2200" dirty="0"/>
-          </a:p>
-        </p:txBody>
-      </p:sp>
-      <p:sp>
-        <p:nvSpPr>
-          <p:cNvPr id="20" name="Text 18"/>
-          <p:cNvSpPr/>
-          <p:nvPr/>
-        </p:nvSpPr>
-        <p:spPr>
-          <a:xfrm>
-            <a:off x="5191232" y="4270248"/>
-            <a:ext cx="1809232" cy="320040"/>
-          </a:xfrm>
-          <a:prstGeom prst="rect">
-            <a:avLst/>
-          </a:prstGeom>
-          <a:noFill/>
-          <a:ln/>
-        </p:spPr>
-        <p:txBody>
-          <a:bodyPr wrap="square" lIns="0" tIns="0" rIns="0" bIns="0" rtlCol="0" anchor="ctr"/>
-          <a:lstStyle/>
-          <a:p>
-            <a:pPr algn="ctr" indent="0" marL="0">
-              <a:buNone/>
-            </a:pPr>
-            <a:r>
-              <a:rPr lang="en-US" sz="1400" b="1" dirty="0">
-                <a:solidFill>
-                  <a:srgbClr val="0F1B2E"/>
-                </a:solidFill>
-                <a:latin typeface="Helvetica Neue" pitchFamily="34" charset="0"/>
-                <a:ea typeface="Helvetica Neue" pitchFamily="34" charset="-122"/>
-                <a:cs typeface="Helvetica Neue" pitchFamily="34" charset="-120"/>
-              </a:rPr>
-              <a:t>Tools</a:t>
-            </a:r>
-            <a:endParaRPr lang="en-US" sz="1400" dirty="0"/>
-          </a:p>
-        </p:txBody>
-      </p:sp>
-      <p:sp>
-        <p:nvSpPr>
-          <p:cNvPr id="21" name="Text 19"/>
-          <p:cNvSpPr/>
-          <p:nvPr/>
-        </p:nvSpPr>
-        <p:spPr>
-          <a:xfrm>
-            <a:off x="5191232" y="4581144"/>
-            <a:ext cx="1809232" cy="310896"/>
-          </a:xfrm>
-          <a:prstGeom prst="rect">
-            <a:avLst/>
-          </a:prstGeom>
-          <a:noFill/>
-          <a:ln/>
-        </p:spPr>
-        <p:txBody>
-          <a:bodyPr wrap="square" lIns="0" tIns="0" rIns="0" bIns="0" rtlCol="0" anchor="ctr"/>
-          <a:lstStyle/>
-          <a:p>
-            <a:pPr algn="ctr" indent="0" marL="0">
-              <a:buNone/>
-            </a:pPr>
-            <a:r>
-              <a:rPr lang="en-US" sz="1050" dirty="0">
-                <a:solidFill>
-                  <a:srgbClr val="6B7C93"/>
-                </a:solidFill>
-                <a:latin typeface="Helvetica Neue" pitchFamily="34" charset="0"/>
-                <a:ea typeface="Helvetica Neue" pitchFamily="34" charset="-122"/>
-                <a:cs typeface="Helvetica Neue" pitchFamily="34" charset="-120"/>
-              </a:rPr>
-              <a:t>custom actions</a:t>
-            </a:r>
-            <a:endParaRPr lang="en-US" sz="1050" dirty="0"/>
-          </a:p>
-        </p:txBody>
-      </p:sp>
-      <p:sp>
-        <p:nvSpPr>
-          <p:cNvPr id="22" name="Shape 20"/>
-          <p:cNvSpPr/>
-          <p:nvPr/>
-        </p:nvSpPr>
-        <p:spPr>
-          <a:xfrm>
-            <a:off x="7366224" y="3246120"/>
-            <a:ext cx="1992112" cy="1691640"/>
+            <a:off x="3901288" y="4434840"/>
+            <a:ext cx="4389120" cy="822960"/>
           </a:xfrm>
           <a:prstGeom prst="roundRect">
             <a:avLst>
-              <a:gd name="adj" fmla="val 4865"/>
+              <a:gd name="adj" fmla="val 10000"/>
             </a:avLst>
           </a:prstGeom>
           <a:solidFill>
-            <a:srgbClr val="FFFFFF"/>
+            <a:srgbClr val="0A1526"/>
           </a:solidFill>
-          <a:ln w="12700">
-            <a:solidFill>
-              <a:srgbClr val="E4EAF1"/>
-            </a:solidFill>
-            <a:prstDash val="solid"/>
-          </a:ln>
+          <a:ln/>
           <a:effectLst>
             <a:outerShdw sx="100000" sy="100000" kx="0" ky="0" algn="bl" rotWithShape="0" blurRad="88900" dist="38100" dir="8100000">
               <a:srgbClr val="0A1526">
@@ -6535,39 +7673,14 @@
       </p:sp>
       <p:sp>
         <p:nvSpPr>
-          <p:cNvPr id="23" name="Shape 21"/>
-          <p:cNvSpPr/>
-          <p:nvPr/>
-        </p:nvSpPr>
-        <p:spPr>
-          <a:xfrm>
-            <a:off x="8060527" y="3538728"/>
-            <a:ext cx="603504" cy="603504"/>
-          </a:xfrm>
-          <a:prstGeom prst="ellipse">
-            <a:avLst/>
-          </a:prstGeom>
-          <a:solidFill>
-            <a:srgbClr val="EAF2F8"/>
-          </a:solidFill>
-          <a:ln w="19050">
-            <a:solidFill>
-              <a:srgbClr val="15B3A4"/>
-            </a:solidFill>
-            <a:prstDash val="solid"/>
-          </a:ln>
-        </p:spPr>
-      </p:sp>
-      <p:sp>
-        <p:nvSpPr>
-          <p:cNvPr id="24" name="Text 22"/>
-          <p:cNvSpPr/>
-          <p:nvPr/>
-        </p:nvSpPr>
-        <p:spPr>
-          <a:xfrm>
-            <a:off x="8060527" y="3538728"/>
-            <a:ext cx="603504" cy="603504"/>
+          <p:cNvPr id="19" name="Text 17"/>
+          <p:cNvSpPr/>
+          <p:nvPr/>
+        </p:nvSpPr>
+        <p:spPr>
+          <a:xfrm>
+            <a:off x="3901288" y="4498848"/>
+            <a:ext cx="4389120" cy="457200"/>
           </a:xfrm>
           <a:prstGeom prst="rect">
             <a:avLst/>
@@ -6583,30 +7696,30 @@
               <a:buNone/>
             </a:pPr>
             <a:r>
-              <a:rPr lang="en-US" sz="2200" b="1" dirty="0">
-                <a:solidFill>
-                  <a:srgbClr val="0E9F91"/>
-                </a:solidFill>
-                <a:latin typeface="Helvetica Neue" pitchFamily="34" charset="0"/>
-                <a:ea typeface="Helvetica Neue" pitchFamily="34" charset="-122"/>
-                <a:cs typeface="Helvetica Neue" pitchFamily="34" charset="-120"/>
-              </a:rPr>
-              <a:t>↑</a:t>
-            </a:r>
-            <a:endParaRPr lang="en-US" sz="2200" dirty="0"/>
-          </a:p>
-        </p:txBody>
-      </p:sp>
-      <p:sp>
-        <p:nvSpPr>
-          <p:cNvPr id="25" name="Text 23"/>
-          <p:cNvSpPr/>
-          <p:nvPr/>
-        </p:nvSpPr>
-        <p:spPr>
-          <a:xfrm>
-            <a:off x="7457664" y="4270248"/>
-            <a:ext cx="1809232" cy="320040"/>
+              <a:rPr lang="en-US" sz="2600" b="1" dirty="0">
+                <a:solidFill>
+                  <a:srgbClr val="7FE7DA"/>
+                </a:solidFill>
+                <a:latin typeface="Helvetica Neue" pitchFamily="34" charset="0"/>
+                <a:ea typeface="Helvetica Neue" pitchFamily="34" charset="-122"/>
+                <a:cs typeface="Helvetica Neue" pitchFamily="34" charset="-120"/>
+              </a:rPr>
+              <a:t>÷10</a:t>
+            </a:r>
+            <a:endParaRPr lang="en-US" sz="2600" dirty="0"/>
+          </a:p>
+        </p:txBody>
+      </p:sp>
+      <p:sp>
+        <p:nvSpPr>
+          <p:cNvPr id="20" name="Text 18"/>
+          <p:cNvSpPr/>
+          <p:nvPr/>
+        </p:nvSpPr>
+        <p:spPr>
+          <a:xfrm>
+            <a:off x="3901288" y="4956048"/>
+            <a:ext cx="4389120" cy="292608"/>
           </a:xfrm>
           <a:prstGeom prst="rect">
             <a:avLst/>
@@ -6622,238 +7735,23 @@
               <a:buNone/>
             </a:pPr>
             <a:r>
-              <a:rPr lang="en-US" sz="1400" b="1" dirty="0">
-                <a:solidFill>
-                  <a:srgbClr val="0F1B2E"/>
-                </a:solidFill>
-                <a:latin typeface="Helvetica Neue" pitchFamily="34" charset="0"/>
-                <a:ea typeface="Helvetica Neue" pitchFamily="34" charset="-122"/>
-                <a:cs typeface="Helvetica Neue" pitchFamily="34" charset="-120"/>
-              </a:rPr>
-              <a:t>Components</a:t>
-            </a:r>
-            <a:endParaRPr lang="en-US" sz="1400" dirty="0"/>
-          </a:p>
-        </p:txBody>
-      </p:sp>
-      <p:sp>
-        <p:nvSpPr>
-          <p:cNvPr id="26" name="Text 24"/>
-          <p:cNvSpPr/>
-          <p:nvPr/>
-        </p:nvSpPr>
-        <p:spPr>
-          <a:xfrm>
-            <a:off x="7457664" y="4581144"/>
-            <a:ext cx="1809232" cy="310896"/>
-          </a:xfrm>
-          <a:prstGeom prst="rect">
-            <a:avLst/>
-          </a:prstGeom>
-          <a:noFill/>
-          <a:ln/>
-        </p:spPr>
-        <p:txBody>
-          <a:bodyPr wrap="square" lIns="0" tIns="0" rIns="0" bIns="0" rtlCol="0" anchor="ctr"/>
-          <a:lstStyle/>
-          <a:p>
-            <a:pPr algn="ctr" indent="0" marL="0">
-              <a:buNone/>
-            </a:pPr>
-            <a:r>
-              <a:rPr lang="en-US" sz="1050" dirty="0">
-                <a:solidFill>
-                  <a:srgbClr val="6B7C93"/>
-                </a:solidFill>
-                <a:latin typeface="Helvetica Neue" pitchFamily="34" charset="0"/>
-                <a:ea typeface="Helvetica Neue" pitchFamily="34" charset="-122"/>
-                <a:cs typeface="Helvetica Neue" pitchFamily="34" charset="-120"/>
-              </a:rPr>
-              <a:t>into the Factory</a:t>
-            </a:r>
-            <a:endParaRPr lang="en-US" sz="1050" dirty="0"/>
-          </a:p>
-        </p:txBody>
-      </p:sp>
-      <p:sp>
-        <p:nvSpPr>
-          <p:cNvPr id="27" name="Shape 25"/>
-          <p:cNvSpPr/>
-          <p:nvPr/>
-        </p:nvSpPr>
-        <p:spPr>
-          <a:xfrm>
-            <a:off x="9632655" y="3246120"/>
-            <a:ext cx="1992112" cy="1691640"/>
-          </a:xfrm>
-          <a:prstGeom prst="roundRect">
-            <a:avLst>
-              <a:gd name="adj" fmla="val 4865"/>
-            </a:avLst>
-          </a:prstGeom>
-          <a:solidFill>
-            <a:srgbClr val="FFFFFF"/>
-          </a:solidFill>
-          <a:ln w="12700">
-            <a:solidFill>
-              <a:srgbClr val="E4EAF1"/>
-            </a:solidFill>
-            <a:prstDash val="solid"/>
-          </a:ln>
-          <a:effectLst>
-            <a:outerShdw sx="100000" sy="100000" kx="0" ky="0" algn="bl" rotWithShape="0" blurRad="88900" dist="38100" dir="8100000">
-              <a:srgbClr val="0A1526">
-                <a:alpha val="10000"/>
-              </a:srgbClr>
-            </a:outerShdw>
-          </a:effectLst>
-        </p:spPr>
-      </p:sp>
-      <p:sp>
-        <p:nvSpPr>
-          <p:cNvPr id="28" name="Shape 26"/>
-          <p:cNvSpPr/>
-          <p:nvPr/>
-        </p:nvSpPr>
-        <p:spPr>
-          <a:xfrm>
-            <a:off x="10326959" y="3538728"/>
-            <a:ext cx="603504" cy="603504"/>
-          </a:xfrm>
-          <a:prstGeom prst="ellipse">
-            <a:avLst/>
-          </a:prstGeom>
-          <a:solidFill>
-            <a:srgbClr val="EAF2F8"/>
-          </a:solidFill>
-          <a:ln w="19050">
-            <a:solidFill>
-              <a:srgbClr val="15B3A4"/>
-            </a:solidFill>
-            <a:prstDash val="solid"/>
-          </a:ln>
-        </p:spPr>
-      </p:sp>
-      <p:sp>
-        <p:nvSpPr>
-          <p:cNvPr id="29" name="Text 27"/>
-          <p:cNvSpPr/>
-          <p:nvPr/>
-        </p:nvSpPr>
-        <p:spPr>
-          <a:xfrm>
-            <a:off x="10326959" y="3538728"/>
-            <a:ext cx="603504" cy="603504"/>
-          </a:xfrm>
-          <a:prstGeom prst="rect">
-            <a:avLst/>
-          </a:prstGeom>
-          <a:noFill/>
-          <a:ln/>
-        </p:spPr>
-        <p:txBody>
-          <a:bodyPr wrap="square" lIns="0" tIns="0" rIns="0" bIns="0" rtlCol="0" anchor="ctr"/>
-          <a:lstStyle/>
-          <a:p>
-            <a:pPr algn="ctr" indent="0" marL="0">
-              <a:buNone/>
-            </a:pPr>
-            <a:r>
-              <a:rPr lang="en-US" sz="2200" b="1" dirty="0">
-                <a:solidFill>
-                  <a:srgbClr val="0E9F91"/>
-                </a:solidFill>
-                <a:latin typeface="Helvetica Neue" pitchFamily="34" charset="0"/>
-                <a:ea typeface="Helvetica Neue" pitchFamily="34" charset="-122"/>
-                <a:cs typeface="Helvetica Neue" pitchFamily="34" charset="-120"/>
-              </a:rPr>
-              <a:t>↑</a:t>
-            </a:r>
-            <a:endParaRPr lang="en-US" sz="2200" dirty="0"/>
-          </a:p>
-        </p:txBody>
-      </p:sp>
-      <p:sp>
-        <p:nvSpPr>
-          <p:cNvPr id="30" name="Text 28"/>
-          <p:cNvSpPr/>
-          <p:nvPr/>
-        </p:nvSpPr>
-        <p:spPr>
-          <a:xfrm>
-            <a:off x="9724095" y="4270248"/>
-            <a:ext cx="1809232" cy="320040"/>
-          </a:xfrm>
-          <a:prstGeom prst="rect">
-            <a:avLst/>
-          </a:prstGeom>
-          <a:noFill/>
-          <a:ln/>
-        </p:spPr>
-        <p:txBody>
-          <a:bodyPr wrap="square" lIns="0" tIns="0" rIns="0" bIns="0" rtlCol="0" anchor="ctr"/>
-          <a:lstStyle/>
-          <a:p>
-            <a:pPr algn="ctr" indent="0" marL="0">
-              <a:buNone/>
-            </a:pPr>
-            <a:r>
-              <a:rPr lang="en-US" sz="1400" b="1" dirty="0">
-                <a:solidFill>
-                  <a:srgbClr val="0F1B2E"/>
-                </a:solidFill>
-                <a:latin typeface="Helvetica Neue" pitchFamily="34" charset="0"/>
-                <a:ea typeface="Helvetica Neue" pitchFamily="34" charset="-122"/>
-                <a:cs typeface="Helvetica Neue" pitchFamily="34" charset="-120"/>
-              </a:rPr>
-              <a:t>Skills</a:t>
-            </a:r>
-            <a:endParaRPr lang="en-US" sz="1400" dirty="0"/>
-          </a:p>
-        </p:txBody>
-      </p:sp>
-      <p:sp>
-        <p:nvSpPr>
-          <p:cNvPr id="31" name="Text 29"/>
-          <p:cNvSpPr/>
-          <p:nvPr/>
-        </p:nvSpPr>
-        <p:spPr>
-          <a:xfrm>
-            <a:off x="9724095" y="4581144"/>
-            <a:ext cx="1809232" cy="310896"/>
-          </a:xfrm>
-          <a:prstGeom prst="rect">
-            <a:avLst/>
-          </a:prstGeom>
-          <a:noFill/>
-          <a:ln/>
-        </p:spPr>
-        <p:txBody>
-          <a:bodyPr wrap="square" lIns="0" tIns="0" rIns="0" bIns="0" rtlCol="0" anchor="ctr"/>
-          <a:lstStyle/>
-          <a:p>
-            <a:pPr algn="ctr" indent="0" marL="0">
-              <a:buNone/>
-            </a:pPr>
-            <a:r>
-              <a:rPr lang="en-US" sz="1050" dirty="0">
-                <a:solidFill>
-                  <a:srgbClr val="6B7C93"/>
-                </a:solidFill>
-                <a:latin typeface="Helvetica Neue" pitchFamily="34" charset="0"/>
-                <a:ea typeface="Helvetica Neue" pitchFamily="34" charset="-122"/>
-                <a:cs typeface="Helvetica Neue" pitchFamily="34" charset="-120"/>
-              </a:rPr>
-              <a:t>agent capabilities</a:t>
-            </a:r>
-            <a:endParaRPr lang="en-US" sz="1050" dirty="0"/>
-          </a:p>
-        </p:txBody>
-      </p:sp>
-      <p:sp>
-        <p:nvSpPr>
-          <p:cNvPr id="32" name="Shape 30"/>
+              <a:rPr lang="en-US" sz="1150" dirty="0">
+                <a:solidFill>
+                  <a:srgbClr val="9FB0C8"/>
+                </a:solidFill>
+                <a:latin typeface="Helvetica Neue" pitchFamily="34" charset="0"/>
+                <a:ea typeface="Helvetica Neue" pitchFamily="34" charset="-122"/>
+                <a:cs typeface="Helvetica Neue" pitchFamily="34" charset="-120"/>
+              </a:rPr>
+              <a:t>tokens vs. regenerating from scratch</a:t>
+            </a:r>
+            <a:endParaRPr lang="en-US" sz="1150" dirty="0"/>
+          </a:p>
+        </p:txBody>
+      </p:sp>
+      <p:sp>
+        <p:nvSpPr>
+          <p:cNvPr id="21" name="Shape 19"/>
           <p:cNvSpPr/>
           <p:nvPr/>
         </p:nvSpPr>
@@ -6887,7 +7785,7 @@
       </p:sp>
       <p:sp>
         <p:nvSpPr>
-          <p:cNvPr id="33" name="Text 31"/>
+          <p:cNvPr id="22" name="Text 20"/>
           <p:cNvSpPr/>
           <p:nvPr/>
         </p:nvSpPr>
@@ -6918,7 +7816,7 @@
                 <a:ea typeface="Helvetica Neue" pitchFamily="34" charset="-122"/>
                 <a:cs typeface="Helvetica Neue" pitchFamily="34" charset="-120"/>
               </a:rPr>
-              <a:t>Your workflows, your components, your tools — all uploadable, all yours.</a:t>
+              <a:t>Intelligence is banked in components, in the cloud — loaded on demand, not re-billed.</a:t>
             </a:r>
             <a:endParaRPr lang="en-US" sz="1400" dirty="0"/>
           </a:p>
@@ -6926,7 +7824,7 @@
       </p:sp>
       <p:sp>
         <p:nvSpPr>
-          <p:cNvPr id="34" name="Shape 32"/>
+          <p:cNvPr id="23" name="Shape 21"/>
           <p:cNvSpPr/>
           <p:nvPr/>
         </p:nvSpPr>
@@ -6949,7 +7847,7 @@
       </p:sp>
       <p:sp>
         <p:nvSpPr>
-          <p:cNvPr id="35" name="Text 33"/>
+          <p:cNvPr id="24" name="Text 22"/>
           <p:cNvSpPr/>
           <p:nvPr/>
         </p:nvSpPr>
@@ -7002,7 +7900,7 @@
       </p:sp>
       <p:sp>
         <p:nvSpPr>
-          <p:cNvPr id="36" name="Text 34"/>
+          <p:cNvPr id="25" name="Text 23"/>
           <p:cNvSpPr/>
           <p:nvPr/>
         </p:nvSpPr>
@@ -7126,7 +8024,7 @@
                 <a:ea typeface="Helvetica Neue" pitchFamily="34" charset="-122"/>
                 <a:cs typeface="Helvetica Neue" pitchFamily="34" charset="-120"/>
               </a:rPr>
-              <a:t>13</a:t>
+              <a:t>12</a:t>
             </a:r>
             <a:endParaRPr lang="en-US" sz="1300" dirty="0"/>
           </a:p>
@@ -7207,7 +8105,7 @@
                 <a:ea typeface="Helvetica Neue" pitchFamily="34" charset="-122"/>
                 <a:cs typeface="Helvetica Neue" pitchFamily="34" charset="-120"/>
               </a:rPr>
-              <a:t>Export, self-host, open source —</a:t>
+              <a:t>Nothing is a black box —</a:t>
             </a:r>
             <a:endParaRPr lang="en-US" sz="3200" dirty="0"/>
           </a:p>
@@ -7227,7 +8125,7 @@
                 <a:ea typeface="Helvetica Neue" pitchFamily="34" charset="-122"/>
                 <a:cs typeface="Helvetica Neue" pitchFamily="34" charset="-120"/>
               </a:rPr>
-              <a:t>zero lock-in.</a:t>
+              <a:t>bring your own.</a:t>
             </a:r>
             <a:endParaRPr lang="en-US" sz="3200" dirty="0"/>
           </a:p>
@@ -7269,7 +8167,7 @@
                 <a:ea typeface="Helvetica Neue" pitchFamily="34" charset="-122"/>
                 <a:cs typeface="Helvetica Neue" pitchFamily="34" charset="-120"/>
               </a:rPr>
-              <a:t>What you build is yours, with no limits on where it runs and no walls around the core technology.</a:t>
+              <a:t>Every resource layer is open for you to extend. Upload it, version it, reuse it across projects.</a:t>
             </a:r>
             <a:endParaRPr lang="en-US" sz="1350" dirty="0"/>
           </a:p>
@@ -7283,12 +8181,12 @@
         </p:nvSpPr>
         <p:spPr>
           <a:xfrm>
-            <a:off x="566928" y="3200400"/>
-            <a:ext cx="3442106" cy="1783080"/>
+            <a:off x="566928" y="3246120"/>
+            <a:ext cx="1992112" cy="1691640"/>
           </a:xfrm>
           <a:prstGeom prst="roundRect">
             <a:avLst>
-              <a:gd name="adj" fmla="val 4615"/>
+              <a:gd name="adj" fmla="val 4865"/>
             </a:avLst>
           </a:prstGeom>
           <a:solidFill>
@@ -7317,16 +8215,21 @@
         </p:nvSpPr>
         <p:spPr>
           <a:xfrm>
-            <a:off x="859536" y="3511296"/>
-            <a:ext cx="384048" cy="64008"/>
-          </a:xfrm>
-          <a:prstGeom prst="rect">
+            <a:off x="1261232" y="3538728"/>
+            <a:ext cx="603504" cy="603504"/>
+          </a:xfrm>
+          <a:prstGeom prst="ellipse">
             <a:avLst/>
           </a:prstGeom>
           <a:solidFill>
-            <a:srgbClr val="15B3A4"/>
+            <a:srgbClr val="EAF2F8"/>
           </a:solidFill>
-          <a:ln/>
+          <a:ln w="19050">
+            <a:solidFill>
+              <a:srgbClr val="15B3A4"/>
+            </a:solidFill>
+            <a:prstDash val="solid"/>
+          </a:ln>
         </p:spPr>
       </p:sp>
       <p:sp>
@@ -7337,24 +8240,63 @@
         </p:nvSpPr>
         <p:spPr>
           <a:xfrm>
-            <a:off x="841248" y="3694176"/>
-            <a:ext cx="2893466" cy="411480"/>
-          </a:xfrm>
-          <a:prstGeom prst="rect">
-            <a:avLst/>
-          </a:prstGeom>
-          <a:noFill/>
-          <a:ln/>
-        </p:spPr>
-        <p:txBody>
-          <a:bodyPr wrap="square" lIns="0" tIns="0" rIns="0" bIns="0" rtlCol="0" anchor="ctr"/>
-          <a:lstStyle/>
-          <a:p>
-            <a:pPr indent="0" marL="0">
-              <a:buNone/>
-            </a:pPr>
-            <a:r>
-              <a:rPr lang="en-US" sz="1700" b="1" dirty="0">
+            <a:off x="1261232" y="3538728"/>
+            <a:ext cx="603504" cy="603504"/>
+          </a:xfrm>
+          <a:prstGeom prst="rect">
+            <a:avLst/>
+          </a:prstGeom>
+          <a:noFill/>
+          <a:ln/>
+        </p:spPr>
+        <p:txBody>
+          <a:bodyPr wrap="square" lIns="0" tIns="0" rIns="0" bIns="0" rtlCol="0" anchor="ctr"/>
+          <a:lstStyle/>
+          <a:p>
+            <a:pPr algn="ctr" indent="0" marL="0">
+              <a:buNone/>
+            </a:pPr>
+            <a:r>
+              <a:rPr lang="en-US" sz="2200" b="1" dirty="0">
+                <a:solidFill>
+                  <a:srgbClr val="0E9F91"/>
+                </a:solidFill>
+                <a:latin typeface="Helvetica Neue" pitchFamily="34" charset="0"/>
+                <a:ea typeface="Helvetica Neue" pitchFamily="34" charset="-122"/>
+                <a:cs typeface="Helvetica Neue" pitchFamily="34" charset="-120"/>
+              </a:rPr>
+              <a:t>↑</a:t>
+            </a:r>
+            <a:endParaRPr lang="en-US" sz="2200" dirty="0"/>
+          </a:p>
+        </p:txBody>
+      </p:sp>
+      <p:sp>
+        <p:nvSpPr>
+          <p:cNvPr id="10" name="Text 8"/>
+          <p:cNvSpPr/>
+          <p:nvPr/>
+        </p:nvSpPr>
+        <p:spPr>
+          <a:xfrm>
+            <a:off x="658368" y="4270248"/>
+            <a:ext cx="1809232" cy="320040"/>
+          </a:xfrm>
+          <a:prstGeom prst="rect">
+            <a:avLst/>
+          </a:prstGeom>
+          <a:noFill/>
+          <a:ln/>
+        </p:spPr>
+        <p:txBody>
+          <a:bodyPr wrap="square" lIns="0" tIns="0" rIns="0" bIns="0" rtlCol="0" anchor="ctr"/>
+          <a:lstStyle/>
+          <a:p>
+            <a:pPr algn="ctr" indent="0" marL="0">
+              <a:buNone/>
+            </a:pPr>
+            <a:r>
+              <a:rPr lang="en-US" sz="1400" b="1" dirty="0">
                 <a:solidFill>
                   <a:srgbClr val="0F1B2E"/>
                 </a:solidFill>
@@ -7362,68 +8304,65 @@
                 <a:ea typeface="Helvetica Neue" pitchFamily="34" charset="-122"/>
                 <a:cs typeface="Helvetica Neue" pitchFamily="34" charset="-120"/>
               </a:rPr>
-              <a:t>Export</a:t>
-            </a:r>
-            <a:endParaRPr lang="en-US" sz="1700" dirty="0"/>
-          </a:p>
-        </p:txBody>
-      </p:sp>
-      <p:sp>
-        <p:nvSpPr>
-          <p:cNvPr id="10" name="Text 8"/>
-          <p:cNvSpPr/>
-          <p:nvPr/>
-        </p:nvSpPr>
-        <p:spPr>
-          <a:xfrm>
-            <a:off x="841248" y="4169664"/>
-            <a:ext cx="2893466" cy="731520"/>
-          </a:xfrm>
-          <a:prstGeom prst="rect">
-            <a:avLst/>
-          </a:prstGeom>
-          <a:noFill/>
-          <a:ln/>
-        </p:spPr>
-        <p:txBody>
-          <a:bodyPr wrap="square" lIns="0" tIns="0" rIns="0" bIns="0" rtlCol="0" anchor="ctr"/>
-          <a:lstStyle/>
-          <a:p>
-            <a:pPr indent="0" marL="0">
-              <a:lnSpc>
-                <a:spcPct val="115000"/>
-              </a:lnSpc>
-              <a:buNone/>
-            </a:pPr>
-            <a:r>
-              <a:rPr lang="en-US" sz="1200" dirty="0">
-                <a:solidFill>
-                  <a:srgbClr val="2A3A51"/>
-                </a:solidFill>
-                <a:latin typeface="Helvetica Neue" pitchFamily="34" charset="0"/>
-                <a:ea typeface="Helvetica Neue" pitchFamily="34" charset="-122"/>
-                <a:cs typeface="Helvetica Neue" pitchFamily="34" charset="-120"/>
-              </a:rPr>
-              <a:t>Apps export to React + Node source — run them anywhere.</a:t>
-            </a:r>
-            <a:endParaRPr lang="en-US" sz="1200" dirty="0"/>
-          </a:p>
-        </p:txBody>
-      </p:sp>
-      <p:sp>
-        <p:nvSpPr>
-          <p:cNvPr id="11" name="Shape 9"/>
-          <p:cNvSpPr/>
-          <p:nvPr/>
-        </p:nvSpPr>
-        <p:spPr>
-          <a:xfrm>
-            <a:off x="4374794" y="3200400"/>
-            <a:ext cx="3442106" cy="1783080"/>
+              <a:t>Workflows</a:t>
+            </a:r>
+            <a:endParaRPr lang="en-US" sz="1400" dirty="0"/>
+          </a:p>
+        </p:txBody>
+      </p:sp>
+      <p:sp>
+        <p:nvSpPr>
+          <p:cNvPr id="11" name="Text 9"/>
+          <p:cNvSpPr/>
+          <p:nvPr/>
+        </p:nvSpPr>
+        <p:spPr>
+          <a:xfrm>
+            <a:off x="658368" y="4581144"/>
+            <a:ext cx="1809232" cy="310896"/>
+          </a:xfrm>
+          <a:prstGeom prst="rect">
+            <a:avLst/>
+          </a:prstGeom>
+          <a:noFill/>
+          <a:ln/>
+        </p:spPr>
+        <p:txBody>
+          <a:bodyPr wrap="square" lIns="0" tIns="0" rIns="0" bIns="0" rtlCol="0" anchor="ctr"/>
+          <a:lstStyle/>
+          <a:p>
+            <a:pPr algn="ctr" indent="0" marL="0">
+              <a:buNone/>
+            </a:pPr>
+            <a:r>
+              <a:rPr lang="en-US" sz="1050" dirty="0">
+                <a:solidFill>
+                  <a:srgbClr val="6B7C93"/>
+                </a:solidFill>
+                <a:latin typeface="Helvetica Neue" pitchFamily="34" charset="0"/>
+                <a:ea typeface="Helvetica Neue" pitchFamily="34" charset="-122"/>
+                <a:cs typeface="Helvetica Neue" pitchFamily="34" charset="-120"/>
+              </a:rPr>
+              <a:t>your own DAGs</a:t>
+            </a:r>
+            <a:endParaRPr lang="en-US" sz="1050" dirty="0"/>
+          </a:p>
+        </p:txBody>
+      </p:sp>
+      <p:sp>
+        <p:nvSpPr>
+          <p:cNvPr id="12" name="Shape 10"/>
+          <p:cNvSpPr/>
+          <p:nvPr/>
+        </p:nvSpPr>
+        <p:spPr>
+          <a:xfrm>
+            <a:off x="2833360" y="3246120"/>
+            <a:ext cx="1992112" cy="1691640"/>
           </a:xfrm>
           <a:prstGeom prst="roundRect">
             <a:avLst>
-              <a:gd name="adj" fmla="val 4615"/>
+              <a:gd name="adj" fmla="val 4865"/>
             </a:avLst>
           </a:prstGeom>
           <a:solidFill>
@@ -7446,50 +8385,94 @@
       </p:sp>
       <p:sp>
         <p:nvSpPr>
-          <p:cNvPr id="12" name="Shape 10"/>
-          <p:cNvSpPr/>
-          <p:nvPr/>
-        </p:nvSpPr>
-        <p:spPr>
-          <a:xfrm>
-            <a:off x="4667402" y="3511296"/>
-            <a:ext cx="384048" cy="64008"/>
-          </a:xfrm>
-          <a:prstGeom prst="rect">
+          <p:cNvPr id="13" name="Shape 11"/>
+          <p:cNvSpPr/>
+          <p:nvPr/>
+        </p:nvSpPr>
+        <p:spPr>
+          <a:xfrm>
+            <a:off x="3527664" y="3538728"/>
+            <a:ext cx="603504" cy="603504"/>
+          </a:xfrm>
+          <a:prstGeom prst="ellipse">
             <a:avLst/>
           </a:prstGeom>
           <a:solidFill>
-            <a:srgbClr val="15B3A4"/>
+            <a:srgbClr val="EAF2F8"/>
           </a:solidFill>
-          <a:ln/>
-        </p:spPr>
-      </p:sp>
-      <p:sp>
-        <p:nvSpPr>
-          <p:cNvPr id="13" name="Text 11"/>
-          <p:cNvSpPr/>
-          <p:nvPr/>
-        </p:nvSpPr>
-        <p:spPr>
-          <a:xfrm>
-            <a:off x="4649114" y="3694176"/>
-            <a:ext cx="2893466" cy="411480"/>
-          </a:xfrm>
-          <a:prstGeom prst="rect">
-            <a:avLst/>
-          </a:prstGeom>
-          <a:noFill/>
-          <a:ln/>
-        </p:spPr>
-        <p:txBody>
-          <a:bodyPr wrap="square" lIns="0" tIns="0" rIns="0" bIns="0" rtlCol="0" anchor="ctr"/>
-          <a:lstStyle/>
-          <a:p>
-            <a:pPr indent="0" marL="0">
-              <a:buNone/>
-            </a:pPr>
-            <a:r>
-              <a:rPr lang="en-US" sz="1700" b="1" dirty="0">
+          <a:ln w="19050">
+            <a:solidFill>
+              <a:srgbClr val="15B3A4"/>
+            </a:solidFill>
+            <a:prstDash val="solid"/>
+          </a:ln>
+        </p:spPr>
+      </p:sp>
+      <p:sp>
+        <p:nvSpPr>
+          <p:cNvPr id="14" name="Text 12"/>
+          <p:cNvSpPr/>
+          <p:nvPr/>
+        </p:nvSpPr>
+        <p:spPr>
+          <a:xfrm>
+            <a:off x="3527664" y="3538728"/>
+            <a:ext cx="603504" cy="603504"/>
+          </a:xfrm>
+          <a:prstGeom prst="rect">
+            <a:avLst/>
+          </a:prstGeom>
+          <a:noFill/>
+          <a:ln/>
+        </p:spPr>
+        <p:txBody>
+          <a:bodyPr wrap="square" lIns="0" tIns="0" rIns="0" bIns="0" rtlCol="0" anchor="ctr"/>
+          <a:lstStyle/>
+          <a:p>
+            <a:pPr algn="ctr" indent="0" marL="0">
+              <a:buNone/>
+            </a:pPr>
+            <a:r>
+              <a:rPr lang="en-US" sz="2200" b="1" dirty="0">
+                <a:solidFill>
+                  <a:srgbClr val="0E9F91"/>
+                </a:solidFill>
+                <a:latin typeface="Helvetica Neue" pitchFamily="34" charset="0"/>
+                <a:ea typeface="Helvetica Neue" pitchFamily="34" charset="-122"/>
+                <a:cs typeface="Helvetica Neue" pitchFamily="34" charset="-120"/>
+              </a:rPr>
+              <a:t>↑</a:t>
+            </a:r>
+            <a:endParaRPr lang="en-US" sz="2200" dirty="0"/>
+          </a:p>
+        </p:txBody>
+      </p:sp>
+      <p:sp>
+        <p:nvSpPr>
+          <p:cNvPr id="15" name="Text 13"/>
+          <p:cNvSpPr/>
+          <p:nvPr/>
+        </p:nvSpPr>
+        <p:spPr>
+          <a:xfrm>
+            <a:off x="2924800" y="4270248"/>
+            <a:ext cx="1809232" cy="320040"/>
+          </a:xfrm>
+          <a:prstGeom prst="rect">
+            <a:avLst/>
+          </a:prstGeom>
+          <a:noFill/>
+          <a:ln/>
+        </p:spPr>
+        <p:txBody>
+          <a:bodyPr wrap="square" lIns="0" tIns="0" rIns="0" bIns="0" rtlCol="0" anchor="ctr"/>
+          <a:lstStyle/>
+          <a:p>
+            <a:pPr algn="ctr" indent="0" marL="0">
+              <a:buNone/>
+            </a:pPr>
+            <a:r>
+              <a:rPr lang="en-US" sz="1400" b="1" dirty="0">
                 <a:solidFill>
                   <a:srgbClr val="0F1B2E"/>
                 </a:solidFill>
@@ -7497,74 +8480,76 @@
                 <a:ea typeface="Helvetica Neue" pitchFamily="34" charset="-122"/>
                 <a:cs typeface="Helvetica Neue" pitchFamily="34" charset="-120"/>
               </a:rPr>
-              <a:t>Self-host</a:t>
-            </a:r>
-            <a:endParaRPr lang="en-US" sz="1700" dirty="0"/>
-          </a:p>
-        </p:txBody>
-      </p:sp>
-      <p:sp>
-        <p:nvSpPr>
-          <p:cNvPr id="14" name="Text 12"/>
-          <p:cNvSpPr/>
-          <p:nvPr/>
-        </p:nvSpPr>
-        <p:spPr>
-          <a:xfrm>
-            <a:off x="4649114" y="4169664"/>
-            <a:ext cx="2893466" cy="731520"/>
-          </a:xfrm>
-          <a:prstGeom prst="rect">
-            <a:avLst/>
-          </a:prstGeom>
-          <a:noFill/>
-          <a:ln/>
-        </p:spPr>
-        <p:txBody>
-          <a:bodyPr wrap="square" lIns="0" tIns="0" rIns="0" bIns="0" rtlCol="0" anchor="ctr"/>
-          <a:lstStyle/>
-          <a:p>
-            <a:pPr indent="0" marL="0">
-              <a:lnSpc>
-                <a:spcPct val="115000"/>
-              </a:lnSpc>
-              <a:buNone/>
-            </a:pPr>
-            <a:r>
-              <a:rPr lang="en-US" sz="1200" dirty="0">
-                <a:solidFill>
-                  <a:srgbClr val="2A3A51"/>
-                </a:solidFill>
-                <a:latin typeface="Helvetica Neue" pitchFamily="34" charset="0"/>
-                <a:ea typeface="Helvetica Neue" pitchFamily="34" charset="-122"/>
-                <a:cs typeface="Helvetica Neue" pitchFamily="34" charset="-120"/>
-              </a:rPr>
-              <a:t>Private deployment with no restrictions whatsoever.</a:t>
-            </a:r>
-            <a:endParaRPr lang="en-US" sz="1200" dirty="0"/>
-          </a:p>
-        </p:txBody>
-      </p:sp>
-      <p:sp>
-        <p:nvSpPr>
-          <p:cNvPr id="15" name="Shape 13"/>
-          <p:cNvSpPr/>
-          <p:nvPr/>
-        </p:nvSpPr>
-        <p:spPr>
-          <a:xfrm>
-            <a:off x="8182661" y="3200400"/>
-            <a:ext cx="3442106" cy="1783080"/>
+              <a:t>Docs</a:t>
+            </a:r>
+            <a:endParaRPr lang="en-US" sz="1400" dirty="0"/>
+          </a:p>
+        </p:txBody>
+      </p:sp>
+      <p:sp>
+        <p:nvSpPr>
+          <p:cNvPr id="16" name="Text 14"/>
+          <p:cNvSpPr/>
+          <p:nvPr/>
+        </p:nvSpPr>
+        <p:spPr>
+          <a:xfrm>
+            <a:off x="2924800" y="4581144"/>
+            <a:ext cx="1809232" cy="310896"/>
+          </a:xfrm>
+          <a:prstGeom prst="rect">
+            <a:avLst/>
+          </a:prstGeom>
+          <a:noFill/>
+          <a:ln/>
+        </p:spPr>
+        <p:txBody>
+          <a:bodyPr wrap="square" lIns="0" tIns="0" rIns="0" bIns="0" rtlCol="0" anchor="ctr"/>
+          <a:lstStyle/>
+          <a:p>
+            <a:pPr algn="ctr" indent="0" marL="0">
+              <a:buNone/>
+            </a:pPr>
+            <a:r>
+              <a:rPr lang="en-US" sz="1050" dirty="0">
+                <a:solidFill>
+                  <a:srgbClr val="6B7C93"/>
+                </a:solidFill>
+                <a:latin typeface="Helvetica Neue" pitchFamily="34" charset="0"/>
+                <a:ea typeface="Helvetica Neue" pitchFamily="34" charset="-122"/>
+                <a:cs typeface="Helvetica Neue" pitchFamily="34" charset="-120"/>
+              </a:rPr>
+              <a:t>specs &amp; context</a:t>
+            </a:r>
+            <a:endParaRPr lang="en-US" sz="1050" dirty="0"/>
+          </a:p>
+        </p:txBody>
+      </p:sp>
+      <p:sp>
+        <p:nvSpPr>
+          <p:cNvPr id="17" name="Shape 15"/>
+          <p:cNvSpPr/>
+          <p:nvPr/>
+        </p:nvSpPr>
+        <p:spPr>
+          <a:xfrm>
+            <a:off x="5099792" y="3246120"/>
+            <a:ext cx="1992112" cy="1691640"/>
           </a:xfrm>
           <a:prstGeom prst="roundRect">
             <a:avLst>
-              <a:gd name="adj" fmla="val 4615"/>
+              <a:gd name="adj" fmla="val 4865"/>
             </a:avLst>
           </a:prstGeom>
           <a:solidFill>
-            <a:srgbClr val="0A1526"/>
+            <a:srgbClr val="FFFFFF"/>
           </a:solidFill>
-          <a:ln/>
+          <a:ln w="12700">
+            <a:solidFill>
+              <a:srgbClr val="E4EAF1"/>
+            </a:solidFill>
+            <a:prstDash val="solid"/>
+          </a:ln>
           <a:effectLst>
             <a:outerShdw sx="100000" sy="100000" kx="0" ky="0" algn="bl" rotWithShape="0" blurRad="88900" dist="38100" dir="8100000">
               <a:srgbClr val="0A1526">
@@ -7576,108 +8561,501 @@
       </p:sp>
       <p:sp>
         <p:nvSpPr>
-          <p:cNvPr id="16" name="Shape 14"/>
-          <p:cNvSpPr/>
-          <p:nvPr/>
-        </p:nvSpPr>
-        <p:spPr>
-          <a:xfrm>
-            <a:off x="8475269" y="3511296"/>
-            <a:ext cx="384048" cy="64008"/>
-          </a:xfrm>
-          <a:prstGeom prst="rect">
+          <p:cNvPr id="18" name="Shape 16"/>
+          <p:cNvSpPr/>
+          <p:nvPr/>
+        </p:nvSpPr>
+        <p:spPr>
+          <a:xfrm>
+            <a:off x="5794096" y="3538728"/>
+            <a:ext cx="603504" cy="603504"/>
+          </a:xfrm>
+          <a:prstGeom prst="ellipse">
             <a:avLst/>
           </a:prstGeom>
           <a:solidFill>
-            <a:srgbClr val="15B3A4"/>
+            <a:srgbClr val="EAF2F8"/>
           </a:solidFill>
-          <a:ln/>
-        </p:spPr>
-      </p:sp>
-      <p:sp>
-        <p:nvSpPr>
-          <p:cNvPr id="17" name="Text 15"/>
-          <p:cNvSpPr/>
-          <p:nvPr/>
-        </p:nvSpPr>
-        <p:spPr>
-          <a:xfrm>
-            <a:off x="8456981" y="3694176"/>
-            <a:ext cx="2893466" cy="411480"/>
-          </a:xfrm>
-          <a:prstGeom prst="rect">
-            <a:avLst/>
-          </a:prstGeom>
-          <a:noFill/>
-          <a:ln/>
-        </p:spPr>
-        <p:txBody>
-          <a:bodyPr wrap="square" lIns="0" tIns="0" rIns="0" bIns="0" rtlCol="0" anchor="ctr"/>
-          <a:lstStyle/>
-          <a:p>
-            <a:pPr indent="0" marL="0">
-              <a:buNone/>
-            </a:pPr>
-            <a:r>
-              <a:rPr lang="en-US" sz="1700" b="1" dirty="0">
-                <a:solidFill>
-                  <a:srgbClr val="FFFFFF"/>
-                </a:solidFill>
-                <a:latin typeface="Helvetica Neue" pitchFamily="34" charset="0"/>
-                <a:ea typeface="Helvetica Neue" pitchFamily="34" charset="-122"/>
-                <a:cs typeface="Helvetica Neue" pitchFamily="34" charset="-120"/>
-              </a:rPr>
-              <a:t>Open source</a:t>
-            </a:r>
-            <a:endParaRPr lang="en-US" sz="1700" dirty="0"/>
-          </a:p>
-        </p:txBody>
-      </p:sp>
-      <p:sp>
-        <p:nvSpPr>
-          <p:cNvPr id="18" name="Text 16"/>
-          <p:cNvSpPr/>
-          <p:nvPr/>
-        </p:nvSpPr>
-        <p:spPr>
-          <a:xfrm>
-            <a:off x="8456981" y="4169664"/>
-            <a:ext cx="2893466" cy="731520"/>
-          </a:xfrm>
-          <a:prstGeom prst="rect">
-            <a:avLst/>
-          </a:prstGeom>
-          <a:noFill/>
-          <a:ln/>
-        </p:spPr>
-        <p:txBody>
-          <a:bodyPr wrap="square" lIns="0" tIns="0" rIns="0" bIns="0" rtlCol="0" anchor="ctr"/>
-          <a:lstStyle/>
-          <a:p>
-            <a:pPr indent="0" marL="0">
-              <a:lnSpc>
-                <a:spcPct val="115000"/>
-              </a:lnSpc>
-              <a:buNone/>
-            </a:pPr>
-            <a:r>
-              <a:rPr lang="en-US" sz="1200" dirty="0">
-                <a:solidFill>
-                  <a:srgbClr val="9FB0C8"/>
-                </a:solidFill>
-                <a:latin typeface="Helvetica Neue" pitchFamily="34" charset="0"/>
-                <a:ea typeface="Helvetica Neue" pitchFamily="34" charset="-122"/>
-                <a:cs typeface="Helvetica Neue" pitchFamily="34" charset="-120"/>
-              </a:rPr>
-              <a:t>VL syntax and core docs are open. Every component is open.</a:t>
-            </a:r>
-            <a:endParaRPr lang="en-US" sz="1200" dirty="0"/>
-          </a:p>
-        </p:txBody>
-      </p:sp>
-      <p:sp>
-        <p:nvSpPr>
-          <p:cNvPr id="19" name="Shape 17"/>
+          <a:ln w="19050">
+            <a:solidFill>
+              <a:srgbClr val="15B3A4"/>
+            </a:solidFill>
+            <a:prstDash val="solid"/>
+          </a:ln>
+        </p:spPr>
+      </p:sp>
+      <p:sp>
+        <p:nvSpPr>
+          <p:cNvPr id="19" name="Text 17"/>
+          <p:cNvSpPr/>
+          <p:nvPr/>
+        </p:nvSpPr>
+        <p:spPr>
+          <a:xfrm>
+            <a:off x="5794096" y="3538728"/>
+            <a:ext cx="603504" cy="603504"/>
+          </a:xfrm>
+          <a:prstGeom prst="rect">
+            <a:avLst/>
+          </a:prstGeom>
+          <a:noFill/>
+          <a:ln/>
+        </p:spPr>
+        <p:txBody>
+          <a:bodyPr wrap="square" lIns="0" tIns="0" rIns="0" bIns="0" rtlCol="0" anchor="ctr"/>
+          <a:lstStyle/>
+          <a:p>
+            <a:pPr algn="ctr" indent="0" marL="0">
+              <a:buNone/>
+            </a:pPr>
+            <a:r>
+              <a:rPr lang="en-US" sz="2200" b="1" dirty="0">
+                <a:solidFill>
+                  <a:srgbClr val="0E9F91"/>
+                </a:solidFill>
+                <a:latin typeface="Helvetica Neue" pitchFamily="34" charset="0"/>
+                <a:ea typeface="Helvetica Neue" pitchFamily="34" charset="-122"/>
+                <a:cs typeface="Helvetica Neue" pitchFamily="34" charset="-120"/>
+              </a:rPr>
+              <a:t>↑</a:t>
+            </a:r>
+            <a:endParaRPr lang="en-US" sz="2200" dirty="0"/>
+          </a:p>
+        </p:txBody>
+      </p:sp>
+      <p:sp>
+        <p:nvSpPr>
+          <p:cNvPr id="20" name="Text 18"/>
+          <p:cNvSpPr/>
+          <p:nvPr/>
+        </p:nvSpPr>
+        <p:spPr>
+          <a:xfrm>
+            <a:off x="5191232" y="4270248"/>
+            <a:ext cx="1809232" cy="320040"/>
+          </a:xfrm>
+          <a:prstGeom prst="rect">
+            <a:avLst/>
+          </a:prstGeom>
+          <a:noFill/>
+          <a:ln/>
+        </p:spPr>
+        <p:txBody>
+          <a:bodyPr wrap="square" lIns="0" tIns="0" rIns="0" bIns="0" rtlCol="0" anchor="ctr"/>
+          <a:lstStyle/>
+          <a:p>
+            <a:pPr algn="ctr" indent="0" marL="0">
+              <a:buNone/>
+            </a:pPr>
+            <a:r>
+              <a:rPr lang="en-US" sz="1400" b="1" dirty="0">
+                <a:solidFill>
+                  <a:srgbClr val="0F1B2E"/>
+                </a:solidFill>
+                <a:latin typeface="Helvetica Neue" pitchFamily="34" charset="0"/>
+                <a:ea typeface="Helvetica Neue" pitchFamily="34" charset="-122"/>
+                <a:cs typeface="Helvetica Neue" pitchFamily="34" charset="-120"/>
+              </a:rPr>
+              <a:t>Tools</a:t>
+            </a:r>
+            <a:endParaRPr lang="en-US" sz="1400" dirty="0"/>
+          </a:p>
+        </p:txBody>
+      </p:sp>
+      <p:sp>
+        <p:nvSpPr>
+          <p:cNvPr id="21" name="Text 19"/>
+          <p:cNvSpPr/>
+          <p:nvPr/>
+        </p:nvSpPr>
+        <p:spPr>
+          <a:xfrm>
+            <a:off x="5191232" y="4581144"/>
+            <a:ext cx="1809232" cy="310896"/>
+          </a:xfrm>
+          <a:prstGeom prst="rect">
+            <a:avLst/>
+          </a:prstGeom>
+          <a:noFill/>
+          <a:ln/>
+        </p:spPr>
+        <p:txBody>
+          <a:bodyPr wrap="square" lIns="0" tIns="0" rIns="0" bIns="0" rtlCol="0" anchor="ctr"/>
+          <a:lstStyle/>
+          <a:p>
+            <a:pPr algn="ctr" indent="0" marL="0">
+              <a:buNone/>
+            </a:pPr>
+            <a:r>
+              <a:rPr lang="en-US" sz="1050" dirty="0">
+                <a:solidFill>
+                  <a:srgbClr val="6B7C93"/>
+                </a:solidFill>
+                <a:latin typeface="Helvetica Neue" pitchFamily="34" charset="0"/>
+                <a:ea typeface="Helvetica Neue" pitchFamily="34" charset="-122"/>
+                <a:cs typeface="Helvetica Neue" pitchFamily="34" charset="-120"/>
+              </a:rPr>
+              <a:t>custom actions</a:t>
+            </a:r>
+            <a:endParaRPr lang="en-US" sz="1050" dirty="0"/>
+          </a:p>
+        </p:txBody>
+      </p:sp>
+      <p:sp>
+        <p:nvSpPr>
+          <p:cNvPr id="22" name="Shape 20"/>
+          <p:cNvSpPr/>
+          <p:nvPr/>
+        </p:nvSpPr>
+        <p:spPr>
+          <a:xfrm>
+            <a:off x="7366224" y="3246120"/>
+            <a:ext cx="1992112" cy="1691640"/>
+          </a:xfrm>
+          <a:prstGeom prst="roundRect">
+            <a:avLst>
+              <a:gd name="adj" fmla="val 4865"/>
+            </a:avLst>
+          </a:prstGeom>
+          <a:solidFill>
+            <a:srgbClr val="FFFFFF"/>
+          </a:solidFill>
+          <a:ln w="12700">
+            <a:solidFill>
+              <a:srgbClr val="E4EAF1"/>
+            </a:solidFill>
+            <a:prstDash val="solid"/>
+          </a:ln>
+          <a:effectLst>
+            <a:outerShdw sx="100000" sy="100000" kx="0" ky="0" algn="bl" rotWithShape="0" blurRad="88900" dist="38100" dir="8100000">
+              <a:srgbClr val="0A1526">
+                <a:alpha val="10000"/>
+              </a:srgbClr>
+            </a:outerShdw>
+          </a:effectLst>
+        </p:spPr>
+      </p:sp>
+      <p:sp>
+        <p:nvSpPr>
+          <p:cNvPr id="23" name="Shape 21"/>
+          <p:cNvSpPr/>
+          <p:nvPr/>
+        </p:nvSpPr>
+        <p:spPr>
+          <a:xfrm>
+            <a:off x="8060527" y="3538728"/>
+            <a:ext cx="603504" cy="603504"/>
+          </a:xfrm>
+          <a:prstGeom prst="ellipse">
+            <a:avLst/>
+          </a:prstGeom>
+          <a:solidFill>
+            <a:srgbClr val="EAF2F8"/>
+          </a:solidFill>
+          <a:ln w="19050">
+            <a:solidFill>
+              <a:srgbClr val="15B3A4"/>
+            </a:solidFill>
+            <a:prstDash val="solid"/>
+          </a:ln>
+        </p:spPr>
+      </p:sp>
+      <p:sp>
+        <p:nvSpPr>
+          <p:cNvPr id="24" name="Text 22"/>
+          <p:cNvSpPr/>
+          <p:nvPr/>
+        </p:nvSpPr>
+        <p:spPr>
+          <a:xfrm>
+            <a:off x="8060527" y="3538728"/>
+            <a:ext cx="603504" cy="603504"/>
+          </a:xfrm>
+          <a:prstGeom prst="rect">
+            <a:avLst/>
+          </a:prstGeom>
+          <a:noFill/>
+          <a:ln/>
+        </p:spPr>
+        <p:txBody>
+          <a:bodyPr wrap="square" lIns="0" tIns="0" rIns="0" bIns="0" rtlCol="0" anchor="ctr"/>
+          <a:lstStyle/>
+          <a:p>
+            <a:pPr algn="ctr" indent="0" marL="0">
+              <a:buNone/>
+            </a:pPr>
+            <a:r>
+              <a:rPr lang="en-US" sz="2200" b="1" dirty="0">
+                <a:solidFill>
+                  <a:srgbClr val="0E9F91"/>
+                </a:solidFill>
+                <a:latin typeface="Helvetica Neue" pitchFamily="34" charset="0"/>
+                <a:ea typeface="Helvetica Neue" pitchFamily="34" charset="-122"/>
+                <a:cs typeface="Helvetica Neue" pitchFamily="34" charset="-120"/>
+              </a:rPr>
+              <a:t>↑</a:t>
+            </a:r>
+            <a:endParaRPr lang="en-US" sz="2200" dirty="0"/>
+          </a:p>
+        </p:txBody>
+      </p:sp>
+      <p:sp>
+        <p:nvSpPr>
+          <p:cNvPr id="25" name="Text 23"/>
+          <p:cNvSpPr/>
+          <p:nvPr/>
+        </p:nvSpPr>
+        <p:spPr>
+          <a:xfrm>
+            <a:off x="7457664" y="4270248"/>
+            <a:ext cx="1809232" cy="320040"/>
+          </a:xfrm>
+          <a:prstGeom prst="rect">
+            <a:avLst/>
+          </a:prstGeom>
+          <a:noFill/>
+          <a:ln/>
+        </p:spPr>
+        <p:txBody>
+          <a:bodyPr wrap="square" lIns="0" tIns="0" rIns="0" bIns="0" rtlCol="0" anchor="ctr"/>
+          <a:lstStyle/>
+          <a:p>
+            <a:pPr algn="ctr" indent="0" marL="0">
+              <a:buNone/>
+            </a:pPr>
+            <a:r>
+              <a:rPr lang="en-US" sz="1400" b="1" dirty="0">
+                <a:solidFill>
+                  <a:srgbClr val="0F1B2E"/>
+                </a:solidFill>
+                <a:latin typeface="Helvetica Neue" pitchFamily="34" charset="0"/>
+                <a:ea typeface="Helvetica Neue" pitchFamily="34" charset="-122"/>
+                <a:cs typeface="Helvetica Neue" pitchFamily="34" charset="-120"/>
+              </a:rPr>
+              <a:t>Components</a:t>
+            </a:r>
+            <a:endParaRPr lang="en-US" sz="1400" dirty="0"/>
+          </a:p>
+        </p:txBody>
+      </p:sp>
+      <p:sp>
+        <p:nvSpPr>
+          <p:cNvPr id="26" name="Text 24"/>
+          <p:cNvSpPr/>
+          <p:nvPr/>
+        </p:nvSpPr>
+        <p:spPr>
+          <a:xfrm>
+            <a:off x="7457664" y="4581144"/>
+            <a:ext cx="1809232" cy="310896"/>
+          </a:xfrm>
+          <a:prstGeom prst="rect">
+            <a:avLst/>
+          </a:prstGeom>
+          <a:noFill/>
+          <a:ln/>
+        </p:spPr>
+        <p:txBody>
+          <a:bodyPr wrap="square" lIns="0" tIns="0" rIns="0" bIns="0" rtlCol="0" anchor="ctr"/>
+          <a:lstStyle/>
+          <a:p>
+            <a:pPr algn="ctr" indent="0" marL="0">
+              <a:buNone/>
+            </a:pPr>
+            <a:r>
+              <a:rPr lang="en-US" sz="1050" dirty="0">
+                <a:solidFill>
+                  <a:srgbClr val="6B7C93"/>
+                </a:solidFill>
+                <a:latin typeface="Helvetica Neue" pitchFamily="34" charset="0"/>
+                <a:ea typeface="Helvetica Neue" pitchFamily="34" charset="-122"/>
+                <a:cs typeface="Helvetica Neue" pitchFamily="34" charset="-120"/>
+              </a:rPr>
+              <a:t>into the Factory</a:t>
+            </a:r>
+            <a:endParaRPr lang="en-US" sz="1050" dirty="0"/>
+          </a:p>
+        </p:txBody>
+      </p:sp>
+      <p:sp>
+        <p:nvSpPr>
+          <p:cNvPr id="27" name="Shape 25"/>
+          <p:cNvSpPr/>
+          <p:nvPr/>
+        </p:nvSpPr>
+        <p:spPr>
+          <a:xfrm>
+            <a:off x="9632655" y="3246120"/>
+            <a:ext cx="1992112" cy="1691640"/>
+          </a:xfrm>
+          <a:prstGeom prst="roundRect">
+            <a:avLst>
+              <a:gd name="adj" fmla="val 4865"/>
+            </a:avLst>
+          </a:prstGeom>
+          <a:solidFill>
+            <a:srgbClr val="FFFFFF"/>
+          </a:solidFill>
+          <a:ln w="12700">
+            <a:solidFill>
+              <a:srgbClr val="E4EAF1"/>
+            </a:solidFill>
+            <a:prstDash val="solid"/>
+          </a:ln>
+          <a:effectLst>
+            <a:outerShdw sx="100000" sy="100000" kx="0" ky="0" algn="bl" rotWithShape="0" blurRad="88900" dist="38100" dir="8100000">
+              <a:srgbClr val="0A1526">
+                <a:alpha val="10000"/>
+              </a:srgbClr>
+            </a:outerShdw>
+          </a:effectLst>
+        </p:spPr>
+      </p:sp>
+      <p:sp>
+        <p:nvSpPr>
+          <p:cNvPr id="28" name="Shape 26"/>
+          <p:cNvSpPr/>
+          <p:nvPr/>
+        </p:nvSpPr>
+        <p:spPr>
+          <a:xfrm>
+            <a:off x="10326959" y="3538728"/>
+            <a:ext cx="603504" cy="603504"/>
+          </a:xfrm>
+          <a:prstGeom prst="ellipse">
+            <a:avLst/>
+          </a:prstGeom>
+          <a:solidFill>
+            <a:srgbClr val="EAF2F8"/>
+          </a:solidFill>
+          <a:ln w="19050">
+            <a:solidFill>
+              <a:srgbClr val="15B3A4"/>
+            </a:solidFill>
+            <a:prstDash val="solid"/>
+          </a:ln>
+        </p:spPr>
+      </p:sp>
+      <p:sp>
+        <p:nvSpPr>
+          <p:cNvPr id="29" name="Text 27"/>
+          <p:cNvSpPr/>
+          <p:nvPr/>
+        </p:nvSpPr>
+        <p:spPr>
+          <a:xfrm>
+            <a:off x="10326959" y="3538728"/>
+            <a:ext cx="603504" cy="603504"/>
+          </a:xfrm>
+          <a:prstGeom prst="rect">
+            <a:avLst/>
+          </a:prstGeom>
+          <a:noFill/>
+          <a:ln/>
+        </p:spPr>
+        <p:txBody>
+          <a:bodyPr wrap="square" lIns="0" tIns="0" rIns="0" bIns="0" rtlCol="0" anchor="ctr"/>
+          <a:lstStyle/>
+          <a:p>
+            <a:pPr algn="ctr" indent="0" marL="0">
+              <a:buNone/>
+            </a:pPr>
+            <a:r>
+              <a:rPr lang="en-US" sz="2200" b="1" dirty="0">
+                <a:solidFill>
+                  <a:srgbClr val="0E9F91"/>
+                </a:solidFill>
+                <a:latin typeface="Helvetica Neue" pitchFamily="34" charset="0"/>
+                <a:ea typeface="Helvetica Neue" pitchFamily="34" charset="-122"/>
+                <a:cs typeface="Helvetica Neue" pitchFamily="34" charset="-120"/>
+              </a:rPr>
+              <a:t>↑</a:t>
+            </a:r>
+            <a:endParaRPr lang="en-US" sz="2200" dirty="0"/>
+          </a:p>
+        </p:txBody>
+      </p:sp>
+      <p:sp>
+        <p:nvSpPr>
+          <p:cNvPr id="30" name="Text 28"/>
+          <p:cNvSpPr/>
+          <p:nvPr/>
+        </p:nvSpPr>
+        <p:spPr>
+          <a:xfrm>
+            <a:off x="9724095" y="4270248"/>
+            <a:ext cx="1809232" cy="320040"/>
+          </a:xfrm>
+          <a:prstGeom prst="rect">
+            <a:avLst/>
+          </a:prstGeom>
+          <a:noFill/>
+          <a:ln/>
+        </p:spPr>
+        <p:txBody>
+          <a:bodyPr wrap="square" lIns="0" tIns="0" rIns="0" bIns="0" rtlCol="0" anchor="ctr"/>
+          <a:lstStyle/>
+          <a:p>
+            <a:pPr algn="ctr" indent="0" marL="0">
+              <a:buNone/>
+            </a:pPr>
+            <a:r>
+              <a:rPr lang="en-US" sz="1400" b="1" dirty="0">
+                <a:solidFill>
+                  <a:srgbClr val="0F1B2E"/>
+                </a:solidFill>
+                <a:latin typeface="Helvetica Neue" pitchFamily="34" charset="0"/>
+                <a:ea typeface="Helvetica Neue" pitchFamily="34" charset="-122"/>
+                <a:cs typeface="Helvetica Neue" pitchFamily="34" charset="-120"/>
+              </a:rPr>
+              <a:t>Skills</a:t>
+            </a:r>
+            <a:endParaRPr lang="en-US" sz="1400" dirty="0"/>
+          </a:p>
+        </p:txBody>
+      </p:sp>
+      <p:sp>
+        <p:nvSpPr>
+          <p:cNvPr id="31" name="Text 29"/>
+          <p:cNvSpPr/>
+          <p:nvPr/>
+        </p:nvSpPr>
+        <p:spPr>
+          <a:xfrm>
+            <a:off x="9724095" y="4581144"/>
+            <a:ext cx="1809232" cy="310896"/>
+          </a:xfrm>
+          <a:prstGeom prst="rect">
+            <a:avLst/>
+          </a:prstGeom>
+          <a:noFill/>
+          <a:ln/>
+        </p:spPr>
+        <p:txBody>
+          <a:bodyPr wrap="square" lIns="0" tIns="0" rIns="0" bIns="0" rtlCol="0" anchor="ctr"/>
+          <a:lstStyle/>
+          <a:p>
+            <a:pPr algn="ctr" indent="0" marL="0">
+              <a:buNone/>
+            </a:pPr>
+            <a:r>
+              <a:rPr lang="en-US" sz="1050" dirty="0">
+                <a:solidFill>
+                  <a:srgbClr val="6B7C93"/>
+                </a:solidFill>
+                <a:latin typeface="Helvetica Neue" pitchFamily="34" charset="0"/>
+                <a:ea typeface="Helvetica Neue" pitchFamily="34" charset="-122"/>
+                <a:cs typeface="Helvetica Neue" pitchFamily="34" charset="-120"/>
+              </a:rPr>
+              <a:t>agent capabilities</a:t>
+            </a:r>
+            <a:endParaRPr lang="en-US" sz="1050" dirty="0"/>
+          </a:p>
+        </p:txBody>
+      </p:sp>
+      <p:sp>
+        <p:nvSpPr>
+          <p:cNvPr id="32" name="Shape 30"/>
           <p:cNvSpPr/>
           <p:nvPr/>
         </p:nvSpPr>
@@ -7711,7 +9089,7 @@
       </p:sp>
       <p:sp>
         <p:nvSpPr>
-          <p:cNvPr id="20" name="Text 18"/>
+          <p:cNvPr id="33" name="Text 31"/>
           <p:cNvSpPr/>
           <p:nvPr/>
         </p:nvSpPr>
@@ -7742,7 +9120,7 @@
                 <a:ea typeface="Helvetica Neue" pitchFamily="34" charset="-122"/>
                 <a:cs typeface="Helvetica Neue" pitchFamily="34" charset="-120"/>
               </a:rPr>
-              <a:t>Generate once, own it forever. The syntax and every component are open.</a:t>
+              <a:t>Your workflows, your components, your tools — all uploadable, all yours.</a:t>
             </a:r>
             <a:endParaRPr lang="en-US" sz="1400" dirty="0"/>
           </a:p>
@@ -7750,7 +9128,7 @@
       </p:sp>
       <p:sp>
         <p:nvSpPr>
-          <p:cNvPr id="21" name="Shape 19"/>
+          <p:cNvPr id="34" name="Shape 32"/>
           <p:cNvSpPr/>
           <p:nvPr/>
         </p:nvSpPr>
@@ -7773,7 +9151,7 @@
       </p:sp>
       <p:sp>
         <p:nvSpPr>
-          <p:cNvPr id="22" name="Text 20"/>
+          <p:cNvPr id="35" name="Text 33"/>
           <p:cNvSpPr/>
           <p:nvPr/>
         </p:nvSpPr>
@@ -7826,7 +9204,7 @@
       </p:sp>
       <p:sp>
         <p:nvSpPr>
-          <p:cNvPr id="23" name="Text 21"/>
+          <p:cNvPr id="36" name="Text 34"/>
           <p:cNvSpPr/>
           <p:nvPr/>
         </p:nvSpPr>
@@ -7874,6 +9252,830 @@
 <file path=ppt/slides/slide15.xml><?xml version="1.0" encoding="utf-8"?>
 <p:sld xmlns:a="http://schemas.openxmlformats.org/drawingml/2006/main" xmlns:r="http://schemas.openxmlformats.org/officeDocument/2006/relationships" xmlns:p="http://schemas.openxmlformats.org/presentationml/2006/main">
   <p:cSld name="Slide 15">
+    <p:bg>
+      <p:bgPr>
+        <a:solidFill>
+          <a:srgbClr val="F5F9FC"/>
+        </a:solidFill>
+      </p:bgPr>
+    </p:bg>
+    <p:spTree>
+      <p:nvGrpSpPr>
+        <p:cNvPr id="1" name=""/>
+        <p:cNvGrpSpPr/>
+        <p:nvPr/>
+      </p:nvGrpSpPr>
+      <p:grpSpPr>
+        <a:xfrm>
+          <a:off x="0" y="0"/>
+          <a:ext cx="0" cy="0"/>
+          <a:chOff x="0" y="0"/>
+          <a:chExt cx="0" cy="0"/>
+        </a:xfrm>
+      </p:grpSpPr>
+      <p:sp>
+        <p:nvSpPr>
+          <p:cNvPr id="2" name="Shape 0"/>
+          <p:cNvSpPr/>
+          <p:nvPr/>
+        </p:nvSpPr>
+        <p:spPr>
+          <a:xfrm>
+            <a:off x="566928" y="566928"/>
+            <a:ext cx="384048" cy="384048"/>
+          </a:xfrm>
+          <a:prstGeom prst="roundRect">
+            <a:avLst>
+              <a:gd name="adj" fmla="val 16667"/>
+            </a:avLst>
+          </a:prstGeom>
+          <a:solidFill>
+            <a:srgbClr val="15B3A4"/>
+          </a:solidFill>
+          <a:ln/>
+        </p:spPr>
+      </p:sp>
+      <p:sp>
+        <p:nvSpPr>
+          <p:cNvPr id="3" name="Text 1"/>
+          <p:cNvSpPr/>
+          <p:nvPr/>
+        </p:nvSpPr>
+        <p:spPr>
+          <a:xfrm>
+            <a:off x="566928" y="566928"/>
+            <a:ext cx="384048" cy="384048"/>
+          </a:xfrm>
+          <a:prstGeom prst="rect">
+            <a:avLst/>
+          </a:prstGeom>
+          <a:noFill/>
+          <a:ln/>
+        </p:spPr>
+        <p:txBody>
+          <a:bodyPr wrap="square" lIns="0" tIns="0" rIns="0" bIns="0" rtlCol="0" anchor="ctr"/>
+          <a:lstStyle/>
+          <a:p>
+            <a:pPr algn="ctr" indent="0" marL="0">
+              <a:buNone/>
+            </a:pPr>
+            <a:r>
+              <a:rPr lang="en-US" sz="1300" b="1" dirty="0">
+                <a:solidFill>
+                  <a:srgbClr val="FFFFFF"/>
+                </a:solidFill>
+                <a:latin typeface="Helvetica Neue" pitchFamily="34" charset="0"/>
+                <a:ea typeface="Helvetica Neue" pitchFamily="34" charset="-122"/>
+                <a:cs typeface="Helvetica Neue" pitchFamily="34" charset="-120"/>
+              </a:rPr>
+              <a:t>13</a:t>
+            </a:r>
+            <a:endParaRPr lang="en-US" sz="1300" dirty="0"/>
+          </a:p>
+        </p:txBody>
+      </p:sp>
+      <p:sp>
+        <p:nvSpPr>
+          <p:cNvPr id="4" name="Text 2"/>
+          <p:cNvSpPr/>
+          <p:nvPr/>
+        </p:nvSpPr>
+        <p:spPr>
+          <a:xfrm>
+            <a:off x="1078992" y="566928"/>
+            <a:ext cx="10545775" cy="384048"/>
+          </a:xfrm>
+          <a:prstGeom prst="rect">
+            <a:avLst/>
+          </a:prstGeom>
+          <a:noFill/>
+          <a:ln/>
+        </p:spPr>
+        <p:txBody>
+          <a:bodyPr wrap="square" lIns="0" tIns="0" rIns="0" bIns="0" rtlCol="0" anchor="ctr"/>
+          <a:lstStyle/>
+          <a:p>
+            <a:pPr algn="l" indent="0" marL="0">
+              <a:buNone/>
+            </a:pPr>
+            <a:r>
+              <a:rPr lang="en-US" sz="1150" b="1" spc="250" kern="0" dirty="0">
+                <a:solidFill>
+                  <a:srgbClr val="0E9F91"/>
+                </a:solidFill>
+                <a:latin typeface="Helvetica Neue" pitchFamily="34" charset="0"/>
+                <a:ea typeface="Helvetica Neue" pitchFamily="34" charset="-122"/>
+                <a:cs typeface="Helvetica Neue" pitchFamily="34" charset="-120"/>
+              </a:rPr>
+              <a:t>PART III · OPEN</a:t>
+            </a:r>
+            <a:endParaRPr lang="en-US" sz="1150" dirty="0"/>
+          </a:p>
+        </p:txBody>
+      </p:sp>
+      <p:sp>
+        <p:nvSpPr>
+          <p:cNvPr id="5" name="Text 3"/>
+          <p:cNvSpPr/>
+          <p:nvPr/>
+        </p:nvSpPr>
+        <p:spPr>
+          <a:xfrm>
+            <a:off x="566928" y="1078992"/>
+            <a:ext cx="10515600" cy="1188720"/>
+          </a:xfrm>
+          <a:prstGeom prst="rect">
+            <a:avLst/>
+          </a:prstGeom>
+          <a:noFill/>
+          <a:ln/>
+        </p:spPr>
+        <p:txBody>
+          <a:bodyPr wrap="square" lIns="0" tIns="0" rIns="0" bIns="0" rtlCol="0" anchor="t"/>
+          <a:lstStyle/>
+          <a:p>
+            <a:pPr algn="l" indent="0" marL="0">
+              <a:lnSpc>
+                <a:spcPct val="104000"/>
+              </a:lnSpc>
+              <a:buNone/>
+            </a:pPr>
+            <a:r>
+              <a:rPr lang="en-US" sz="3200" b="1" dirty="0">
+                <a:solidFill>
+                  <a:srgbClr val="0F1B2E"/>
+                </a:solidFill>
+                <a:latin typeface="Helvetica Neue" pitchFamily="34" charset="0"/>
+                <a:ea typeface="Helvetica Neue" pitchFamily="34" charset="-122"/>
+                <a:cs typeface="Helvetica Neue" pitchFamily="34" charset="-120"/>
+              </a:rPr>
+              <a:t>Export, self-host, open source —</a:t>
+            </a:r>
+            <a:endParaRPr lang="en-US" sz="3200" dirty="0"/>
+          </a:p>
+          <a:p>
+            <a:pPr algn="l" indent="0" marL="0">
+              <a:lnSpc>
+                <a:spcPct val="104000"/>
+              </a:lnSpc>
+              <a:buNone/>
+            </a:pPr>
+            <a:r>
+              <a:rPr lang="en-US" sz="3200" b="1" dirty="0">
+                <a:solidFill>
+                  <a:srgbClr val="0F1B2E"/>
+                </a:solidFill>
+                <a:latin typeface="Helvetica Neue" pitchFamily="34" charset="0"/>
+                <a:ea typeface="Helvetica Neue" pitchFamily="34" charset="-122"/>
+                <a:cs typeface="Helvetica Neue" pitchFamily="34" charset="-120"/>
+              </a:rPr>
+              <a:t>zero lock-in.</a:t>
+            </a:r>
+            <a:endParaRPr lang="en-US" sz="3200" dirty="0"/>
+          </a:p>
+        </p:txBody>
+      </p:sp>
+      <p:sp>
+        <p:nvSpPr>
+          <p:cNvPr id="6" name="Text 4"/>
+          <p:cNvSpPr/>
+          <p:nvPr/>
+        </p:nvSpPr>
+        <p:spPr>
+          <a:xfrm>
+            <a:off x="566928" y="2377440"/>
+            <a:ext cx="10058400" cy="548640"/>
+          </a:xfrm>
+          <a:prstGeom prst="rect">
+            <a:avLst/>
+          </a:prstGeom>
+          <a:noFill/>
+          <a:ln/>
+        </p:spPr>
+        <p:txBody>
+          <a:bodyPr wrap="square" lIns="0" tIns="0" rIns="0" bIns="0" rtlCol="0" anchor="t"/>
+          <a:lstStyle/>
+          <a:p>
+            <a:pPr algn="l" indent="0" marL="0">
+              <a:lnSpc>
+                <a:spcPct val="122000"/>
+              </a:lnSpc>
+              <a:buNone/>
+            </a:pPr>
+            <a:r>
+              <a:rPr lang="en-US" sz="1350" dirty="0">
+                <a:solidFill>
+                  <a:srgbClr val="2A3A51"/>
+                </a:solidFill>
+                <a:latin typeface="Helvetica Neue" pitchFamily="34" charset="0"/>
+                <a:ea typeface="Helvetica Neue" pitchFamily="34" charset="-122"/>
+                <a:cs typeface="Helvetica Neue" pitchFamily="34" charset="-120"/>
+              </a:rPr>
+              <a:t>What you build is yours, with no limits on where it runs and no walls around the core technology.</a:t>
+            </a:r>
+            <a:endParaRPr lang="en-US" sz="1350" dirty="0"/>
+          </a:p>
+        </p:txBody>
+      </p:sp>
+      <p:sp>
+        <p:nvSpPr>
+          <p:cNvPr id="7" name="Shape 5"/>
+          <p:cNvSpPr/>
+          <p:nvPr/>
+        </p:nvSpPr>
+        <p:spPr>
+          <a:xfrm>
+            <a:off x="566928" y="3200400"/>
+            <a:ext cx="3442106" cy="1783080"/>
+          </a:xfrm>
+          <a:prstGeom prst="roundRect">
+            <a:avLst>
+              <a:gd name="adj" fmla="val 4615"/>
+            </a:avLst>
+          </a:prstGeom>
+          <a:solidFill>
+            <a:srgbClr val="FFFFFF"/>
+          </a:solidFill>
+          <a:ln w="12700">
+            <a:solidFill>
+              <a:srgbClr val="E4EAF1"/>
+            </a:solidFill>
+            <a:prstDash val="solid"/>
+          </a:ln>
+          <a:effectLst>
+            <a:outerShdw sx="100000" sy="100000" kx="0" ky="0" algn="bl" rotWithShape="0" blurRad="88900" dist="38100" dir="8100000">
+              <a:srgbClr val="0A1526">
+                <a:alpha val="10000"/>
+              </a:srgbClr>
+            </a:outerShdw>
+          </a:effectLst>
+        </p:spPr>
+      </p:sp>
+      <p:sp>
+        <p:nvSpPr>
+          <p:cNvPr id="8" name="Shape 6"/>
+          <p:cNvSpPr/>
+          <p:nvPr/>
+        </p:nvSpPr>
+        <p:spPr>
+          <a:xfrm>
+            <a:off x="859536" y="3511296"/>
+            <a:ext cx="384048" cy="64008"/>
+          </a:xfrm>
+          <a:prstGeom prst="rect">
+            <a:avLst/>
+          </a:prstGeom>
+          <a:solidFill>
+            <a:srgbClr val="15B3A4"/>
+          </a:solidFill>
+          <a:ln/>
+        </p:spPr>
+      </p:sp>
+      <p:sp>
+        <p:nvSpPr>
+          <p:cNvPr id="9" name="Text 7"/>
+          <p:cNvSpPr/>
+          <p:nvPr/>
+        </p:nvSpPr>
+        <p:spPr>
+          <a:xfrm>
+            <a:off x="841248" y="3694176"/>
+            <a:ext cx="2893466" cy="411480"/>
+          </a:xfrm>
+          <a:prstGeom prst="rect">
+            <a:avLst/>
+          </a:prstGeom>
+          <a:noFill/>
+          <a:ln/>
+        </p:spPr>
+        <p:txBody>
+          <a:bodyPr wrap="square" lIns="0" tIns="0" rIns="0" bIns="0" rtlCol="0" anchor="ctr"/>
+          <a:lstStyle/>
+          <a:p>
+            <a:pPr indent="0" marL="0">
+              <a:buNone/>
+            </a:pPr>
+            <a:r>
+              <a:rPr lang="en-US" sz="1700" b="1" dirty="0">
+                <a:solidFill>
+                  <a:srgbClr val="0F1B2E"/>
+                </a:solidFill>
+                <a:latin typeface="Helvetica Neue" pitchFamily="34" charset="0"/>
+                <a:ea typeface="Helvetica Neue" pitchFamily="34" charset="-122"/>
+                <a:cs typeface="Helvetica Neue" pitchFamily="34" charset="-120"/>
+              </a:rPr>
+              <a:t>Export</a:t>
+            </a:r>
+            <a:endParaRPr lang="en-US" sz="1700" dirty="0"/>
+          </a:p>
+        </p:txBody>
+      </p:sp>
+      <p:sp>
+        <p:nvSpPr>
+          <p:cNvPr id="10" name="Text 8"/>
+          <p:cNvSpPr/>
+          <p:nvPr/>
+        </p:nvSpPr>
+        <p:spPr>
+          <a:xfrm>
+            <a:off x="841248" y="4169664"/>
+            <a:ext cx="2893466" cy="731520"/>
+          </a:xfrm>
+          <a:prstGeom prst="rect">
+            <a:avLst/>
+          </a:prstGeom>
+          <a:noFill/>
+          <a:ln/>
+        </p:spPr>
+        <p:txBody>
+          <a:bodyPr wrap="square" lIns="0" tIns="0" rIns="0" bIns="0" rtlCol="0" anchor="ctr"/>
+          <a:lstStyle/>
+          <a:p>
+            <a:pPr indent="0" marL="0">
+              <a:lnSpc>
+                <a:spcPct val="115000"/>
+              </a:lnSpc>
+              <a:buNone/>
+            </a:pPr>
+            <a:r>
+              <a:rPr lang="en-US" sz="1200" dirty="0">
+                <a:solidFill>
+                  <a:srgbClr val="2A3A51"/>
+                </a:solidFill>
+                <a:latin typeface="Helvetica Neue" pitchFamily="34" charset="0"/>
+                <a:ea typeface="Helvetica Neue" pitchFamily="34" charset="-122"/>
+                <a:cs typeface="Helvetica Neue" pitchFamily="34" charset="-120"/>
+              </a:rPr>
+              <a:t>Apps export to React + Node source — run them anywhere.</a:t>
+            </a:r>
+            <a:endParaRPr lang="en-US" sz="1200" dirty="0"/>
+          </a:p>
+        </p:txBody>
+      </p:sp>
+      <p:sp>
+        <p:nvSpPr>
+          <p:cNvPr id="11" name="Shape 9"/>
+          <p:cNvSpPr/>
+          <p:nvPr/>
+        </p:nvSpPr>
+        <p:spPr>
+          <a:xfrm>
+            <a:off x="4374794" y="3200400"/>
+            <a:ext cx="3442106" cy="1783080"/>
+          </a:xfrm>
+          <a:prstGeom prst="roundRect">
+            <a:avLst>
+              <a:gd name="adj" fmla="val 4615"/>
+            </a:avLst>
+          </a:prstGeom>
+          <a:solidFill>
+            <a:srgbClr val="FFFFFF"/>
+          </a:solidFill>
+          <a:ln w="12700">
+            <a:solidFill>
+              <a:srgbClr val="E4EAF1"/>
+            </a:solidFill>
+            <a:prstDash val="solid"/>
+          </a:ln>
+          <a:effectLst>
+            <a:outerShdw sx="100000" sy="100000" kx="0" ky="0" algn="bl" rotWithShape="0" blurRad="88900" dist="38100" dir="8100000">
+              <a:srgbClr val="0A1526">
+                <a:alpha val="10000"/>
+              </a:srgbClr>
+            </a:outerShdw>
+          </a:effectLst>
+        </p:spPr>
+      </p:sp>
+      <p:sp>
+        <p:nvSpPr>
+          <p:cNvPr id="12" name="Shape 10"/>
+          <p:cNvSpPr/>
+          <p:nvPr/>
+        </p:nvSpPr>
+        <p:spPr>
+          <a:xfrm>
+            <a:off x="4667402" y="3511296"/>
+            <a:ext cx="384048" cy="64008"/>
+          </a:xfrm>
+          <a:prstGeom prst="rect">
+            <a:avLst/>
+          </a:prstGeom>
+          <a:solidFill>
+            <a:srgbClr val="15B3A4"/>
+          </a:solidFill>
+          <a:ln/>
+        </p:spPr>
+      </p:sp>
+      <p:sp>
+        <p:nvSpPr>
+          <p:cNvPr id="13" name="Text 11"/>
+          <p:cNvSpPr/>
+          <p:nvPr/>
+        </p:nvSpPr>
+        <p:spPr>
+          <a:xfrm>
+            <a:off x="4649114" y="3694176"/>
+            <a:ext cx="2893466" cy="411480"/>
+          </a:xfrm>
+          <a:prstGeom prst="rect">
+            <a:avLst/>
+          </a:prstGeom>
+          <a:noFill/>
+          <a:ln/>
+        </p:spPr>
+        <p:txBody>
+          <a:bodyPr wrap="square" lIns="0" tIns="0" rIns="0" bIns="0" rtlCol="0" anchor="ctr"/>
+          <a:lstStyle/>
+          <a:p>
+            <a:pPr indent="0" marL="0">
+              <a:buNone/>
+            </a:pPr>
+            <a:r>
+              <a:rPr lang="en-US" sz="1700" b="1" dirty="0">
+                <a:solidFill>
+                  <a:srgbClr val="0F1B2E"/>
+                </a:solidFill>
+                <a:latin typeface="Helvetica Neue" pitchFamily="34" charset="0"/>
+                <a:ea typeface="Helvetica Neue" pitchFamily="34" charset="-122"/>
+                <a:cs typeface="Helvetica Neue" pitchFamily="34" charset="-120"/>
+              </a:rPr>
+              <a:t>Self-host</a:t>
+            </a:r>
+            <a:endParaRPr lang="en-US" sz="1700" dirty="0"/>
+          </a:p>
+        </p:txBody>
+      </p:sp>
+      <p:sp>
+        <p:nvSpPr>
+          <p:cNvPr id="14" name="Text 12"/>
+          <p:cNvSpPr/>
+          <p:nvPr/>
+        </p:nvSpPr>
+        <p:spPr>
+          <a:xfrm>
+            <a:off x="4649114" y="4169664"/>
+            <a:ext cx="2893466" cy="731520"/>
+          </a:xfrm>
+          <a:prstGeom prst="rect">
+            <a:avLst/>
+          </a:prstGeom>
+          <a:noFill/>
+          <a:ln/>
+        </p:spPr>
+        <p:txBody>
+          <a:bodyPr wrap="square" lIns="0" tIns="0" rIns="0" bIns="0" rtlCol="0" anchor="ctr"/>
+          <a:lstStyle/>
+          <a:p>
+            <a:pPr indent="0" marL="0">
+              <a:lnSpc>
+                <a:spcPct val="115000"/>
+              </a:lnSpc>
+              <a:buNone/>
+            </a:pPr>
+            <a:r>
+              <a:rPr lang="en-US" sz="1200" dirty="0">
+                <a:solidFill>
+                  <a:srgbClr val="2A3A51"/>
+                </a:solidFill>
+                <a:latin typeface="Helvetica Neue" pitchFamily="34" charset="0"/>
+                <a:ea typeface="Helvetica Neue" pitchFamily="34" charset="-122"/>
+                <a:cs typeface="Helvetica Neue" pitchFamily="34" charset="-120"/>
+              </a:rPr>
+              <a:t>Private deployment with no restrictions whatsoever.</a:t>
+            </a:r>
+            <a:endParaRPr lang="en-US" sz="1200" dirty="0"/>
+          </a:p>
+        </p:txBody>
+      </p:sp>
+      <p:sp>
+        <p:nvSpPr>
+          <p:cNvPr id="15" name="Shape 13"/>
+          <p:cNvSpPr/>
+          <p:nvPr/>
+        </p:nvSpPr>
+        <p:spPr>
+          <a:xfrm>
+            <a:off x="8182661" y="3200400"/>
+            <a:ext cx="3442106" cy="1783080"/>
+          </a:xfrm>
+          <a:prstGeom prst="roundRect">
+            <a:avLst>
+              <a:gd name="adj" fmla="val 4615"/>
+            </a:avLst>
+          </a:prstGeom>
+          <a:solidFill>
+            <a:srgbClr val="0A1526"/>
+          </a:solidFill>
+          <a:ln/>
+          <a:effectLst>
+            <a:outerShdw sx="100000" sy="100000" kx="0" ky="0" algn="bl" rotWithShape="0" blurRad="88900" dist="38100" dir="8100000">
+              <a:srgbClr val="0A1526">
+                <a:alpha val="10000"/>
+              </a:srgbClr>
+            </a:outerShdw>
+          </a:effectLst>
+        </p:spPr>
+      </p:sp>
+      <p:sp>
+        <p:nvSpPr>
+          <p:cNvPr id="16" name="Shape 14"/>
+          <p:cNvSpPr/>
+          <p:nvPr/>
+        </p:nvSpPr>
+        <p:spPr>
+          <a:xfrm>
+            <a:off x="8475269" y="3511296"/>
+            <a:ext cx="384048" cy="64008"/>
+          </a:xfrm>
+          <a:prstGeom prst="rect">
+            <a:avLst/>
+          </a:prstGeom>
+          <a:solidFill>
+            <a:srgbClr val="15B3A4"/>
+          </a:solidFill>
+          <a:ln/>
+        </p:spPr>
+      </p:sp>
+      <p:sp>
+        <p:nvSpPr>
+          <p:cNvPr id="17" name="Text 15"/>
+          <p:cNvSpPr/>
+          <p:nvPr/>
+        </p:nvSpPr>
+        <p:spPr>
+          <a:xfrm>
+            <a:off x="8456981" y="3694176"/>
+            <a:ext cx="2893466" cy="411480"/>
+          </a:xfrm>
+          <a:prstGeom prst="rect">
+            <a:avLst/>
+          </a:prstGeom>
+          <a:noFill/>
+          <a:ln/>
+        </p:spPr>
+        <p:txBody>
+          <a:bodyPr wrap="square" lIns="0" tIns="0" rIns="0" bIns="0" rtlCol="0" anchor="ctr"/>
+          <a:lstStyle/>
+          <a:p>
+            <a:pPr indent="0" marL="0">
+              <a:buNone/>
+            </a:pPr>
+            <a:r>
+              <a:rPr lang="en-US" sz="1700" b="1" dirty="0">
+                <a:solidFill>
+                  <a:srgbClr val="FFFFFF"/>
+                </a:solidFill>
+                <a:latin typeface="Helvetica Neue" pitchFamily="34" charset="0"/>
+                <a:ea typeface="Helvetica Neue" pitchFamily="34" charset="-122"/>
+                <a:cs typeface="Helvetica Neue" pitchFamily="34" charset="-120"/>
+              </a:rPr>
+              <a:t>Open source</a:t>
+            </a:r>
+            <a:endParaRPr lang="en-US" sz="1700" dirty="0"/>
+          </a:p>
+        </p:txBody>
+      </p:sp>
+      <p:sp>
+        <p:nvSpPr>
+          <p:cNvPr id="18" name="Text 16"/>
+          <p:cNvSpPr/>
+          <p:nvPr/>
+        </p:nvSpPr>
+        <p:spPr>
+          <a:xfrm>
+            <a:off x="8456981" y="4169664"/>
+            <a:ext cx="2893466" cy="731520"/>
+          </a:xfrm>
+          <a:prstGeom prst="rect">
+            <a:avLst/>
+          </a:prstGeom>
+          <a:noFill/>
+          <a:ln/>
+        </p:spPr>
+        <p:txBody>
+          <a:bodyPr wrap="square" lIns="0" tIns="0" rIns="0" bIns="0" rtlCol="0" anchor="ctr"/>
+          <a:lstStyle/>
+          <a:p>
+            <a:pPr indent="0" marL="0">
+              <a:lnSpc>
+                <a:spcPct val="115000"/>
+              </a:lnSpc>
+              <a:buNone/>
+            </a:pPr>
+            <a:r>
+              <a:rPr lang="en-US" sz="1200" dirty="0">
+                <a:solidFill>
+                  <a:srgbClr val="9FB0C8"/>
+                </a:solidFill>
+                <a:latin typeface="Helvetica Neue" pitchFamily="34" charset="0"/>
+                <a:ea typeface="Helvetica Neue" pitchFamily="34" charset="-122"/>
+                <a:cs typeface="Helvetica Neue" pitchFamily="34" charset="-120"/>
+              </a:rPr>
+              <a:t>VL syntax and core docs are open. Every component is open.</a:t>
+            </a:r>
+            <a:endParaRPr lang="en-US" sz="1200" dirty="0"/>
+          </a:p>
+        </p:txBody>
+      </p:sp>
+      <p:sp>
+        <p:nvSpPr>
+          <p:cNvPr id="19" name="Shape 17"/>
+          <p:cNvSpPr/>
+          <p:nvPr/>
+        </p:nvSpPr>
+        <p:spPr>
+          <a:xfrm>
+            <a:off x="566928" y="5486400"/>
+            <a:ext cx="11057839" cy="676656"/>
+          </a:xfrm>
+          <a:prstGeom prst="roundRect">
+            <a:avLst>
+              <a:gd name="adj" fmla="val 12162"/>
+            </a:avLst>
+          </a:prstGeom>
+          <a:solidFill>
+            <a:srgbClr val="EAF2F8"/>
+          </a:solidFill>
+          <a:ln w="12700">
+            <a:solidFill>
+              <a:srgbClr val="D6E6F2"/>
+            </a:solidFill>
+            <a:prstDash val="solid"/>
+          </a:ln>
+          <a:effectLst>
+            <a:outerShdw sx="100000" sy="100000" kx="0" ky="0" algn="bl" rotWithShape="0" blurRad="88900" dist="38100" dir="8100000">
+              <a:srgbClr val="0A1526">
+                <a:alpha val="10000"/>
+              </a:srgbClr>
+            </a:outerShdw>
+          </a:effectLst>
+        </p:spPr>
+      </p:sp>
+      <p:sp>
+        <p:nvSpPr>
+          <p:cNvPr id="20" name="Text 18"/>
+          <p:cNvSpPr/>
+          <p:nvPr/>
+        </p:nvSpPr>
+        <p:spPr>
+          <a:xfrm>
+            <a:off x="886968" y="5486400"/>
+            <a:ext cx="10417759" cy="676656"/>
+          </a:xfrm>
+          <a:prstGeom prst="rect">
+            <a:avLst/>
+          </a:prstGeom>
+          <a:noFill/>
+          <a:ln/>
+        </p:spPr>
+        <p:txBody>
+          <a:bodyPr wrap="square" lIns="0" tIns="0" rIns="0" bIns="0" rtlCol="0" anchor="ctr"/>
+          <a:lstStyle/>
+          <a:p>
+            <a:pPr algn="ctr" indent="0" marL="0">
+              <a:buNone/>
+            </a:pPr>
+            <a:r>
+              <a:rPr lang="en-US" sz="1400" b="1" i="1" dirty="0">
+                <a:solidFill>
+                  <a:srgbClr val="1F4FA8"/>
+                </a:solidFill>
+                <a:latin typeface="Helvetica Neue" pitchFamily="34" charset="0"/>
+                <a:ea typeface="Helvetica Neue" pitchFamily="34" charset="-122"/>
+                <a:cs typeface="Helvetica Neue" pitchFamily="34" charset="-120"/>
+              </a:rPr>
+              <a:t>Generate once, own it forever. The syntax and every component are open.</a:t>
+            </a:r>
+            <a:endParaRPr lang="en-US" sz="1400" dirty="0"/>
+          </a:p>
+        </p:txBody>
+      </p:sp>
+      <p:sp>
+        <p:nvSpPr>
+          <p:cNvPr id="21" name="Shape 19"/>
+          <p:cNvSpPr/>
+          <p:nvPr/>
+        </p:nvSpPr>
+        <p:spPr>
+          <a:xfrm>
+            <a:off x="566928" y="6327648"/>
+            <a:ext cx="11057839" cy="0"/>
+          </a:xfrm>
+          <a:prstGeom prst="line">
+            <a:avLst/>
+          </a:prstGeom>
+          <a:noFill/>
+          <a:ln w="12700">
+            <a:solidFill>
+              <a:srgbClr val="E4EAF1"/>
+            </a:solidFill>
+            <a:prstDash val="solid"/>
+          </a:ln>
+        </p:spPr>
+      </p:sp>
+      <p:sp>
+        <p:nvSpPr>
+          <p:cNvPr id="22" name="Text 20"/>
+          <p:cNvSpPr/>
+          <p:nvPr/>
+        </p:nvSpPr>
+        <p:spPr>
+          <a:xfrm>
+            <a:off x="566928" y="6382512"/>
+            <a:ext cx="7315200" cy="292608"/>
+          </a:xfrm>
+          <a:prstGeom prst="rect">
+            <a:avLst/>
+          </a:prstGeom>
+          <a:noFill/>
+          <a:ln/>
+        </p:spPr>
+        <p:txBody>
+          <a:bodyPr wrap="square" lIns="0" tIns="0" rIns="0" bIns="0" rtlCol="0" anchor="ctr"/>
+          <a:lstStyle/>
+          <a:p>
+            <a:pPr algn="l" indent="0" marL="0">
+              <a:buNone/>
+            </a:pPr>
+            <a:r>
+              <a:rPr lang="en-US" sz="900" b="1" dirty="0">
+                <a:solidFill>
+                  <a:srgbClr val="0E9F91"/>
+                </a:solidFill>
+                <a:latin typeface="Helvetica Neue" pitchFamily="34" charset="0"/>
+                <a:ea typeface="Helvetica Neue" pitchFamily="34" charset="-122"/>
+                <a:cs typeface="Helvetica Neue" pitchFamily="34" charset="-120"/>
+              </a:rPr>
+              <a:t>VL</a:t>
+            </a:r>
+            <a:pPr algn="l" indent="0" marL="0">
+              <a:buNone/>
+            </a:pPr>
+            <a:r>
+              <a:rPr lang="en-US" sz="900" dirty="0">
+                <a:solidFill>
+                  <a:srgbClr val="6B7C93"/>
+                </a:solidFill>
+                <a:latin typeface="Helvetica Neue" pitchFamily="34" charset="0"/>
+                <a:ea typeface="Helvetica Neue" pitchFamily="34" charset="-122"/>
+                <a:cs typeface="Helvetica Neue" pitchFamily="34" charset="-120"/>
+              </a:rPr>
+              <a:t> · CODE   —   An AI-native language, tamed by a DAG</a:t>
+            </a:r>
+            <a:endParaRPr lang="en-US" sz="900" dirty="0"/>
+          </a:p>
+        </p:txBody>
+      </p:sp>
+      <p:sp>
+        <p:nvSpPr>
+          <p:cNvPr id="23" name="Text 21"/>
+          <p:cNvSpPr/>
+          <p:nvPr/>
+        </p:nvSpPr>
+        <p:spPr>
+          <a:xfrm>
+            <a:off x="6595567" y="6382512"/>
+            <a:ext cx="5029200" cy="292608"/>
+          </a:xfrm>
+          <a:prstGeom prst="rect">
+            <a:avLst/>
+          </a:prstGeom>
+          <a:noFill/>
+          <a:ln/>
+        </p:spPr>
+        <p:txBody>
+          <a:bodyPr wrap="square" lIns="0" tIns="0" rIns="0" bIns="0" rtlCol="0" anchor="ctr"/>
+          <a:lstStyle/>
+          <a:p>
+            <a:pPr algn="r" indent="0" marL="0">
+              <a:buNone/>
+            </a:pPr>
+            <a:r>
+              <a:rPr lang="en-US" sz="900" dirty="0">
+                <a:solidFill>
+                  <a:srgbClr val="6B7C93"/>
+                </a:solidFill>
+                <a:latin typeface="Helvetica Neue" pitchFamily="34" charset="0"/>
+                <a:ea typeface="Helvetica Neue" pitchFamily="34" charset="-122"/>
+                <a:cs typeface="Helvetica Neue" pitchFamily="34" charset="-120"/>
+              </a:rPr>
+              <a:t>github.com/VisualLogic-AI/VL-Code</a:t>
+            </a:r>
+            <a:endParaRPr lang="en-US" sz="900" dirty="0"/>
+          </a:p>
+        </p:txBody>
+      </p:sp>
+    </p:spTree>
+  </p:cSld>
+  <p:clrMapOvr>
+    <a:masterClrMapping/>
+  </p:clrMapOvr>
+</p:sld>
+</file>
+
+<file path=ppt/slides/slide16.xml><?xml version="1.0" encoding="utf-8"?>
+<p:sld xmlns:a="http://schemas.openxmlformats.org/drawingml/2006/main" xmlns:r="http://schemas.openxmlformats.org/officeDocument/2006/relationships" xmlns:p="http://schemas.openxmlformats.org/presentationml/2006/main">
+  <p:cSld name="Slide 16">
     <p:bg>
       <p:bgPr>
         <a:solidFill>
